--- a/2026-10-29/1-FHIR-For-Services/Track2-KickOff-Deck.pptx
+++ b/2026-10-29/1-FHIR-For-Services/Track2-KickOff-Deck.pptx
@@ -886,7 +886,7 @@
       </p:grpSpPr>
       <p:sp>
         <p:nvSpPr>
-          <p:cNvPr id="292" name=""/>
+          <p:cNvPr id="368" name=""/>
           <p:cNvSpPr/>
           <p:nvPr/>
         </p:nvSpPr>
@@ -944,7 +944,7 @@
       </p:sp>
       <p:sp>
         <p:nvSpPr>
-          <p:cNvPr id="293" name=""/>
+          <p:cNvPr id="369" name=""/>
           <p:cNvSpPr/>
           <p:nvPr/>
         </p:nvSpPr>
@@ -1002,7 +1002,7 @@
       </p:sp>
       <p:sp>
         <p:nvSpPr>
-          <p:cNvPr id="294" name=""/>
+          <p:cNvPr id="370" name=""/>
           <p:cNvSpPr/>
           <p:nvPr/>
         </p:nvSpPr>
@@ -1060,7 +1060,7 @@
       </p:sp>
       <p:sp>
         <p:nvSpPr>
-          <p:cNvPr id="295" name=""/>
+          <p:cNvPr id="371" name=""/>
           <p:cNvSpPr/>
           <p:nvPr/>
         </p:nvSpPr>
@@ -1118,7 +1118,7 @@
       </p:sp>
       <p:sp>
         <p:nvSpPr>
-          <p:cNvPr id="296" name=""/>
+          <p:cNvPr id="372" name=""/>
           <p:cNvSpPr/>
           <p:nvPr/>
         </p:nvSpPr>
@@ -1244,7 +1244,7 @@
       </p:sp>
       <p:sp>
         <p:nvSpPr>
-          <p:cNvPr id="297" name=""/>
+          <p:cNvPr id="373" name=""/>
           <p:cNvSpPr txBox="1"/>
           <p:nvPr/>
         </p:nvSpPr>
@@ -1287,7 +1287,7 @@
       </p:sp>
       <p:sp>
         <p:nvSpPr>
-          <p:cNvPr id="298" name=""/>
+          <p:cNvPr id="374" name=""/>
           <p:cNvSpPr/>
           <p:nvPr/>
         </p:nvSpPr>
@@ -1413,7 +1413,7 @@
       </p:sp>
       <p:sp>
         <p:nvSpPr>
-          <p:cNvPr id="299" name=""/>
+          <p:cNvPr id="375" name=""/>
           <p:cNvSpPr txBox="1"/>
           <p:nvPr/>
         </p:nvSpPr>
@@ -1486,7 +1486,7 @@
       </p:sp>
       <p:sp>
         <p:nvSpPr>
-          <p:cNvPr id="300" name=""/>
+          <p:cNvPr id="376" name=""/>
           <p:cNvSpPr/>
           <p:nvPr/>
         </p:nvSpPr>
@@ -1704,7 +1704,7 @@
       </p:sp>
       <p:sp>
         <p:nvSpPr>
-          <p:cNvPr id="301" name=""/>
+          <p:cNvPr id="377" name=""/>
           <p:cNvSpPr txBox="1"/>
           <p:nvPr/>
         </p:nvSpPr>
@@ -1757,7 +1757,7 @@
       </p:sp>
       <p:sp>
         <p:nvSpPr>
-          <p:cNvPr id="302" name=""/>
+          <p:cNvPr id="378" name=""/>
           <p:cNvSpPr/>
           <p:nvPr/>
         </p:nvSpPr>
@@ -1883,7 +1883,7 @@
       </p:sp>
       <p:sp>
         <p:nvSpPr>
-          <p:cNvPr id="303" name=""/>
+          <p:cNvPr id="379" name=""/>
           <p:cNvSpPr txBox="1"/>
           <p:nvPr/>
         </p:nvSpPr>
@@ -1926,7 +1926,7 @@
       </p:sp>
       <p:sp>
         <p:nvSpPr>
-          <p:cNvPr id="304" name=""/>
+          <p:cNvPr id="380" name=""/>
           <p:cNvSpPr/>
           <p:nvPr/>
         </p:nvSpPr>
@@ -2144,7 +2144,7 @@
       </p:sp>
       <p:sp>
         <p:nvSpPr>
-          <p:cNvPr id="305" name=""/>
+          <p:cNvPr id="381" name=""/>
           <p:cNvSpPr txBox="1"/>
           <p:nvPr/>
         </p:nvSpPr>
@@ -2187,7 +2187,7 @@
       </p:sp>
       <p:sp>
         <p:nvSpPr>
-          <p:cNvPr id="306" name=""/>
+          <p:cNvPr id="382" name=""/>
           <p:cNvSpPr/>
           <p:nvPr/>
         </p:nvSpPr>
@@ -2313,7 +2313,7 @@
       </p:sp>
       <p:sp>
         <p:nvSpPr>
-          <p:cNvPr id="307" name=""/>
+          <p:cNvPr id="383" name=""/>
           <p:cNvSpPr txBox="1"/>
           <p:nvPr/>
         </p:nvSpPr>
@@ -2356,7 +2356,7 @@
       </p:sp>
       <p:sp>
         <p:nvSpPr>
-          <p:cNvPr id="308" name=""/>
+          <p:cNvPr id="384" name=""/>
           <p:cNvSpPr txBox="1"/>
           <p:nvPr/>
         </p:nvSpPr>
@@ -2399,7 +2399,7 @@
       </p:sp>
       <p:sp>
         <p:nvSpPr>
-          <p:cNvPr id="309" name=""/>
+          <p:cNvPr id="385" name=""/>
           <p:cNvSpPr txBox="1"/>
           <p:nvPr/>
         </p:nvSpPr>
@@ -2442,7 +2442,7 @@
       </p:sp>
       <p:sp>
         <p:nvSpPr>
-          <p:cNvPr id="310" name=""/>
+          <p:cNvPr id="386" name=""/>
           <p:cNvSpPr txBox="1"/>
           <p:nvPr/>
         </p:nvSpPr>
@@ -2515,7 +2515,7 @@
       </p:grpSpPr>
       <p:sp>
         <p:nvSpPr>
-          <p:cNvPr id="311" name=""/>
+          <p:cNvPr id="387" name=""/>
           <p:cNvSpPr/>
           <p:nvPr/>
         </p:nvSpPr>
@@ -2573,7 +2573,7 @@
       </p:sp>
       <p:sp>
         <p:nvSpPr>
-          <p:cNvPr id="312" name=""/>
+          <p:cNvPr id="388" name=""/>
           <p:cNvSpPr/>
           <p:nvPr/>
         </p:nvSpPr>
@@ -2631,7 +2631,7 @@
       </p:sp>
       <p:sp>
         <p:nvSpPr>
-          <p:cNvPr id="313" name=""/>
+          <p:cNvPr id="389" name=""/>
           <p:cNvSpPr/>
           <p:nvPr/>
         </p:nvSpPr>
@@ -2689,7 +2689,7 @@
       </p:sp>
       <p:sp>
         <p:nvSpPr>
-          <p:cNvPr id="314" name=""/>
+          <p:cNvPr id="390" name=""/>
           <p:cNvSpPr/>
           <p:nvPr/>
         </p:nvSpPr>
@@ -2747,7 +2747,7 @@
       </p:sp>
       <p:sp>
         <p:nvSpPr>
-          <p:cNvPr id="315" name=""/>
+          <p:cNvPr id="391" name=""/>
           <p:cNvSpPr/>
           <p:nvPr/>
         </p:nvSpPr>
@@ -2805,7 +2805,7 @@
       </p:sp>
       <p:sp>
         <p:nvSpPr>
-          <p:cNvPr id="316" name=""/>
+          <p:cNvPr id="392" name=""/>
           <p:cNvSpPr/>
           <p:nvPr/>
         </p:nvSpPr>
@@ -2931,7 +2931,7 @@
       </p:sp>
       <p:sp>
         <p:nvSpPr>
-          <p:cNvPr id="317" name=""/>
+          <p:cNvPr id="393" name=""/>
           <p:cNvSpPr txBox="1"/>
           <p:nvPr/>
         </p:nvSpPr>
@@ -2974,7 +2974,7 @@
       </p:sp>
       <p:sp>
         <p:nvSpPr>
-          <p:cNvPr id="318" name=""/>
+          <p:cNvPr id="394" name=""/>
           <p:cNvSpPr/>
           <p:nvPr/>
         </p:nvSpPr>
@@ -3100,7 +3100,7 @@
       </p:sp>
       <p:sp>
         <p:nvSpPr>
-          <p:cNvPr id="319" name=""/>
+          <p:cNvPr id="395" name=""/>
           <p:cNvSpPr txBox="1"/>
           <p:nvPr/>
         </p:nvSpPr>
@@ -3153,7 +3153,7 @@
       </p:sp>
       <p:sp>
         <p:nvSpPr>
-          <p:cNvPr id="320" name=""/>
+          <p:cNvPr id="396" name=""/>
           <p:cNvSpPr/>
           <p:nvPr/>
         </p:nvSpPr>
@@ -3231,7 +3231,7 @@
       </p:sp>
       <p:sp>
         <p:nvSpPr>
-          <p:cNvPr id="321" name=""/>
+          <p:cNvPr id="397" name=""/>
           <p:cNvSpPr/>
           <p:nvPr/>
         </p:nvSpPr>
@@ -3298,7 +3298,7 @@
       </p:sp>
       <p:sp>
         <p:nvSpPr>
-          <p:cNvPr id="322" name=""/>
+          <p:cNvPr id="398" name=""/>
           <p:cNvSpPr/>
           <p:nvPr/>
         </p:nvSpPr>
@@ -3356,7 +3356,7 @@
       </p:sp>
       <p:sp>
         <p:nvSpPr>
-          <p:cNvPr id="323" name=""/>
+          <p:cNvPr id="399" name=""/>
           <p:cNvSpPr txBox="1"/>
           <p:nvPr/>
         </p:nvSpPr>
@@ -3399,7 +3399,7 @@
       </p:sp>
       <p:sp>
         <p:nvSpPr>
-          <p:cNvPr id="324" name=""/>
+          <p:cNvPr id="400" name=""/>
           <p:cNvSpPr/>
           <p:nvPr/>
         </p:nvSpPr>
@@ -3525,7 +3525,7 @@
       </p:sp>
       <p:sp>
         <p:nvSpPr>
-          <p:cNvPr id="325" name=""/>
+          <p:cNvPr id="401" name=""/>
           <p:cNvSpPr txBox="1"/>
           <p:nvPr/>
         </p:nvSpPr>
@@ -3588,7 +3588,7 @@
       </p:sp>
       <p:sp>
         <p:nvSpPr>
-          <p:cNvPr id="326" name=""/>
+          <p:cNvPr id="402" name=""/>
           <p:cNvSpPr/>
           <p:nvPr/>
         </p:nvSpPr>
@@ -3714,7 +3714,7 @@
       </p:sp>
       <p:sp>
         <p:nvSpPr>
-          <p:cNvPr id="327" name=""/>
+          <p:cNvPr id="403" name=""/>
           <p:cNvSpPr txBox="1"/>
           <p:nvPr/>
         </p:nvSpPr>
@@ -3767,7 +3767,7 @@
       </p:sp>
       <p:sp>
         <p:nvSpPr>
-          <p:cNvPr id="328" name=""/>
+          <p:cNvPr id="404" name=""/>
           <p:cNvSpPr txBox="1"/>
           <p:nvPr/>
         </p:nvSpPr>
@@ -3820,7 +3820,7 @@
       </p:sp>
       <p:sp>
         <p:nvSpPr>
-          <p:cNvPr id="329" name=""/>
+          <p:cNvPr id="405" name=""/>
           <p:cNvSpPr/>
           <p:nvPr/>
         </p:nvSpPr>
@@ -4038,7 +4038,7 @@
       </p:sp>
       <p:sp>
         <p:nvSpPr>
-          <p:cNvPr id="330" name=""/>
+          <p:cNvPr id="406" name=""/>
           <p:cNvSpPr txBox="1"/>
           <p:nvPr/>
         </p:nvSpPr>
@@ -4081,7 +4081,7 @@
       </p:sp>
       <p:sp>
         <p:nvSpPr>
-          <p:cNvPr id="331" name=""/>
+          <p:cNvPr id="407" name=""/>
           <p:cNvSpPr txBox="1"/>
           <p:nvPr/>
         </p:nvSpPr>
@@ -4124,7 +4124,7 @@
       </p:sp>
       <p:sp>
         <p:nvSpPr>
-          <p:cNvPr id="332" name=""/>
+          <p:cNvPr id="408" name=""/>
           <p:cNvSpPr txBox="1"/>
           <p:nvPr/>
         </p:nvSpPr>
@@ -4177,7 +4177,7 @@
       </p:sp>
       <p:sp>
         <p:nvSpPr>
-          <p:cNvPr id="333" name=""/>
+          <p:cNvPr id="409" name=""/>
           <p:cNvSpPr txBox="1"/>
           <p:nvPr/>
         </p:nvSpPr>
@@ -4220,7 +4220,7 @@
       </p:sp>
       <p:sp>
         <p:nvSpPr>
-          <p:cNvPr id="334" name=""/>
+          <p:cNvPr id="410" name=""/>
           <p:cNvSpPr txBox="1"/>
           <p:nvPr/>
         </p:nvSpPr>
@@ -4293,7 +4293,7 @@
       </p:grpSpPr>
       <p:sp>
         <p:nvSpPr>
-          <p:cNvPr id="335" name=""/>
+          <p:cNvPr id="411" name=""/>
           <p:cNvSpPr/>
           <p:nvPr/>
         </p:nvSpPr>
@@ -4351,7 +4351,7 @@
       </p:sp>
       <p:sp>
         <p:nvSpPr>
-          <p:cNvPr id="336" name=""/>
+          <p:cNvPr id="412" name=""/>
           <p:cNvSpPr/>
           <p:nvPr/>
         </p:nvSpPr>
@@ -4409,7 +4409,7 @@
       </p:sp>
       <p:sp>
         <p:nvSpPr>
-          <p:cNvPr id="337" name=""/>
+          <p:cNvPr id="413" name=""/>
           <p:cNvSpPr/>
           <p:nvPr/>
         </p:nvSpPr>
@@ -4467,7 +4467,7 @@
       </p:sp>
       <p:sp>
         <p:nvSpPr>
-          <p:cNvPr id="338" name=""/>
+          <p:cNvPr id="414" name=""/>
           <p:cNvSpPr txBox="1"/>
           <p:nvPr/>
         </p:nvSpPr>
@@ -4510,7 +4510,7 @@
       </p:sp>
       <p:sp>
         <p:nvSpPr>
-          <p:cNvPr id="339" name=""/>
+          <p:cNvPr id="415" name=""/>
           <p:cNvSpPr txBox="1"/>
           <p:nvPr/>
         </p:nvSpPr>
@@ -4553,7 +4553,7 @@
       </p:sp>
       <p:sp>
         <p:nvSpPr>
-          <p:cNvPr id="340" name=""/>
+          <p:cNvPr id="416" name=""/>
           <p:cNvSpPr/>
           <p:nvPr/>
         </p:nvSpPr>
@@ -4771,7 +4771,7 @@
       </p:sp>
       <p:sp>
         <p:nvSpPr>
-          <p:cNvPr id="341" name=""/>
+          <p:cNvPr id="417" name=""/>
           <p:cNvSpPr txBox="1"/>
           <p:nvPr/>
         </p:nvSpPr>
@@ -4814,7 +4814,7 @@
       </p:sp>
       <p:sp>
         <p:nvSpPr>
-          <p:cNvPr id="342" name=""/>
+          <p:cNvPr id="418" name=""/>
           <p:cNvSpPr txBox="1"/>
           <p:nvPr/>
         </p:nvSpPr>
@@ -4857,7 +4857,7 @@
       </p:sp>
       <p:sp>
         <p:nvSpPr>
-          <p:cNvPr id="343" name=""/>
+          <p:cNvPr id="419" name=""/>
           <p:cNvSpPr/>
           <p:nvPr/>
         </p:nvSpPr>
@@ -5075,7 +5075,7 @@
       </p:sp>
       <p:sp>
         <p:nvSpPr>
-          <p:cNvPr id="344" name=""/>
+          <p:cNvPr id="420" name=""/>
           <p:cNvSpPr txBox="1"/>
           <p:nvPr/>
         </p:nvSpPr>
@@ -5118,7 +5118,7 @@
       </p:sp>
       <p:sp>
         <p:nvSpPr>
-          <p:cNvPr id="345" name=""/>
+          <p:cNvPr id="421" name=""/>
           <p:cNvSpPr txBox="1"/>
           <p:nvPr/>
         </p:nvSpPr>
@@ -5161,7 +5161,7 @@
       </p:sp>
       <p:sp>
         <p:nvSpPr>
-          <p:cNvPr id="346" name=""/>
+          <p:cNvPr id="422" name=""/>
           <p:cNvSpPr txBox="1"/>
           <p:nvPr/>
         </p:nvSpPr>
@@ -11740,7 +11740,7 @@
         </p:nvSpPr>
         <p:spPr>
           <a:xfrm>
-            <a:off x="666720" y="2705040"/>
+            <a:off x="666720" y="1504800"/>
             <a:ext cx="10858680" cy="28800"/>
           </a:xfrm>
           <a:custGeom>
@@ -11798,191 +11798,553 @@
         </p:nvSpPr>
         <p:spPr>
           <a:xfrm>
-            <a:off x="671400" y="2890800"/>
-            <a:ext cx="10849320" cy="1724400"/>
-          </a:xfrm>
-          <a:custGeom>
-            <a:avLst/>
-            <a:gdLst/>
-            <a:ahLst/>
-            <a:rect l="0" t="0" r="r" b="b"/>
-            <a:pathLst>
-              <a:path w="30137" h="4790">
-                <a:moveTo>
-                  <a:pt x="0" y="4644"/>
-                </a:moveTo>
-                <a:lnTo>
-                  <a:pt x="0" y="145"/>
-                </a:lnTo>
-                <a:cubicBezTo>
-                  <a:pt x="0" y="136"/>
-                  <a:pt x="1" y="126"/>
-                  <a:pt x="3" y="117"/>
-                </a:cubicBezTo>
-                <a:cubicBezTo>
-                  <a:pt x="4" y="107"/>
-                  <a:pt x="7" y="98"/>
-                  <a:pt x="11" y="89"/>
-                </a:cubicBezTo>
-                <a:cubicBezTo>
-                  <a:pt x="15" y="81"/>
-                  <a:pt x="19" y="72"/>
-                  <a:pt x="24" y="64"/>
-                </a:cubicBezTo>
-                <a:cubicBezTo>
-                  <a:pt x="30" y="56"/>
-                  <a:pt x="36" y="49"/>
-                  <a:pt x="42" y="42"/>
-                </a:cubicBezTo>
-                <a:cubicBezTo>
-                  <a:pt x="49" y="35"/>
-                  <a:pt x="57" y="29"/>
-                  <a:pt x="64" y="24"/>
-                </a:cubicBezTo>
-                <a:cubicBezTo>
-                  <a:pt x="72" y="19"/>
-                  <a:pt x="81" y="14"/>
-                  <a:pt x="90" y="11"/>
-                </a:cubicBezTo>
-                <a:cubicBezTo>
-                  <a:pt x="98" y="7"/>
-                  <a:pt x="108" y="4"/>
-                  <a:pt x="117" y="2"/>
-                </a:cubicBezTo>
-                <a:cubicBezTo>
-                  <a:pt x="126" y="1"/>
-                  <a:pt x="136" y="0"/>
-                  <a:pt x="145" y="0"/>
-                </a:cubicBezTo>
-                <a:lnTo>
-                  <a:pt x="29991" y="0"/>
-                </a:lnTo>
-                <a:cubicBezTo>
-                  <a:pt x="30001" y="0"/>
-                  <a:pt x="30010" y="1"/>
-                  <a:pt x="30020" y="2"/>
-                </a:cubicBezTo>
-                <a:cubicBezTo>
-                  <a:pt x="30029" y="4"/>
-                  <a:pt x="30038" y="7"/>
-                  <a:pt x="30047" y="11"/>
-                </a:cubicBezTo>
-                <a:cubicBezTo>
-                  <a:pt x="30056" y="14"/>
-                  <a:pt x="30064" y="19"/>
-                  <a:pt x="30072" y="24"/>
-                </a:cubicBezTo>
-                <a:cubicBezTo>
-                  <a:pt x="30080" y="29"/>
-                  <a:pt x="30087" y="35"/>
-                  <a:pt x="30094" y="42"/>
-                </a:cubicBezTo>
-                <a:cubicBezTo>
-                  <a:pt x="30101" y="49"/>
-                  <a:pt x="30107" y="56"/>
-                  <a:pt x="30112" y="64"/>
-                </a:cubicBezTo>
-                <a:cubicBezTo>
-                  <a:pt x="30118" y="72"/>
-                  <a:pt x="30122" y="81"/>
-                  <a:pt x="30126" y="89"/>
-                </a:cubicBezTo>
-                <a:cubicBezTo>
-                  <a:pt x="30129" y="98"/>
-                  <a:pt x="30132" y="107"/>
-                  <a:pt x="30134" y="117"/>
-                </a:cubicBezTo>
-                <a:cubicBezTo>
-                  <a:pt x="30136" y="126"/>
-                  <a:pt x="30137" y="136"/>
-                  <a:pt x="30137" y="145"/>
-                </a:cubicBezTo>
-                <a:lnTo>
-                  <a:pt x="30137" y="4644"/>
-                </a:lnTo>
-                <a:cubicBezTo>
-                  <a:pt x="30137" y="4654"/>
-                  <a:pt x="30136" y="4663"/>
-                  <a:pt x="30134" y="4672"/>
-                </a:cubicBezTo>
-                <a:cubicBezTo>
-                  <a:pt x="30132" y="4682"/>
-                  <a:pt x="30129" y="4691"/>
-                  <a:pt x="30126" y="4700"/>
-                </a:cubicBezTo>
-                <a:cubicBezTo>
-                  <a:pt x="30122" y="4709"/>
-                  <a:pt x="30118" y="4717"/>
-                  <a:pt x="30112" y="4725"/>
-                </a:cubicBezTo>
-                <a:cubicBezTo>
-                  <a:pt x="30107" y="4733"/>
-                  <a:pt x="30101" y="4740"/>
-                  <a:pt x="30094" y="4747"/>
-                </a:cubicBezTo>
-                <a:cubicBezTo>
-                  <a:pt x="30087" y="4754"/>
-                  <a:pt x="30080" y="4760"/>
-                  <a:pt x="30072" y="4765"/>
-                </a:cubicBezTo>
-                <a:cubicBezTo>
-                  <a:pt x="30064" y="4770"/>
-                  <a:pt x="30056" y="4775"/>
-                  <a:pt x="30047" y="4778"/>
-                </a:cubicBezTo>
-                <a:cubicBezTo>
-                  <a:pt x="30038" y="4782"/>
-                  <a:pt x="30029" y="4785"/>
-                  <a:pt x="30020" y="4787"/>
-                </a:cubicBezTo>
-                <a:cubicBezTo>
-                  <a:pt x="30010" y="4789"/>
-                  <a:pt x="30001" y="4790"/>
-                  <a:pt x="29991" y="4790"/>
-                </a:cubicBezTo>
-                <a:lnTo>
-                  <a:pt x="145" y="4790"/>
-                </a:lnTo>
-                <a:cubicBezTo>
-                  <a:pt x="136" y="4790"/>
-                  <a:pt x="126" y="4789"/>
-                  <a:pt x="117" y="4787"/>
-                </a:cubicBezTo>
-                <a:cubicBezTo>
-                  <a:pt x="108" y="4785"/>
-                  <a:pt x="98" y="4782"/>
-                  <a:pt x="90" y="4778"/>
-                </a:cubicBezTo>
-                <a:cubicBezTo>
-                  <a:pt x="81" y="4775"/>
-                  <a:pt x="72" y="4770"/>
-                  <a:pt x="64" y="4765"/>
-                </a:cubicBezTo>
-                <a:cubicBezTo>
-                  <a:pt x="57" y="4760"/>
-                  <a:pt x="49" y="4754"/>
-                  <a:pt x="42" y="4747"/>
-                </a:cubicBezTo>
-                <a:cubicBezTo>
-                  <a:pt x="36" y="4740"/>
-                  <a:pt x="30" y="4733"/>
-                  <a:pt x="24" y="4725"/>
-                </a:cubicBezTo>
-                <a:cubicBezTo>
-                  <a:pt x="19" y="4717"/>
-                  <a:pt x="15" y="4709"/>
-                  <a:pt x="11" y="4700"/>
-                </a:cubicBezTo>
-                <a:cubicBezTo>
-                  <a:pt x="7" y="4691"/>
-                  <a:pt x="4" y="4682"/>
-                  <a:pt x="3" y="4672"/>
-                </a:cubicBezTo>
-                <a:cubicBezTo>
-                  <a:pt x="1" y="4663"/>
-                  <a:pt x="0" y="4654"/>
-                  <a:pt x="0" y="4644"/>
-                </a:cubicBezTo>
+            <a:off x="676080" y="2219040"/>
+            <a:ext cx="362160" cy="438480"/>
+          </a:xfrm>
+          <a:custGeom>
+            <a:avLst/>
+            <a:gdLst/>
+            <a:ahLst/>
+            <a:rect l="0" t="0" r="r" b="b"/>
+            <a:pathLst>
+              <a:path w="1006" h="1218">
+                <a:moveTo>
+                  <a:pt x="0" y="0"/>
+                </a:moveTo>
+                <a:lnTo>
+                  <a:pt x="1006" y="0"/>
+                </a:lnTo>
+                <a:lnTo>
+                  <a:pt x="1006" y="1218"/>
+                </a:lnTo>
+                <a:lnTo>
+                  <a:pt x="0" y="1218"/>
+                </a:lnTo>
+                <a:lnTo>
+                  <a:pt x="0" y="0"/>
+                </a:lnTo>
+                <a:close/>
+              </a:path>
+            </a:pathLst>
+          </a:custGeom>
+          <a:solidFill>
+            <a:srgbClr val="ffffff"/>
+          </a:solidFill>
+          <a:ln w="0">
+            <a:noFill/>
+          </a:ln>
+        </p:spPr>
+        <p:txBody>
+          <a:bodyPr lIns="0" rIns="0" tIns="0" bIns="0" anchor="t">
+            <a:noAutofit/>
+          </a:bodyPr>
+          <a:p>
+            <a:endParaRPr b="0" lang="en-AU" sz="2400" spc="-1" strike="noStrike">
+              <a:solidFill>
+                <a:srgbClr val="000000"/>
+              </a:solidFill>
+              <a:latin typeface="Times New Roman"/>
+            </a:endParaRPr>
+          </a:p>
+        </p:txBody>
+      </p:sp>
+      <p:sp>
+        <p:nvSpPr>
+          <p:cNvPr id="119" name=""/>
+          <p:cNvSpPr/>
+          <p:nvPr/>
+        </p:nvSpPr>
+        <p:spPr>
+          <a:xfrm>
+            <a:off x="1037880" y="2219040"/>
+            <a:ext cx="4591440" cy="438480"/>
+          </a:xfrm>
+          <a:custGeom>
+            <a:avLst/>
+            <a:gdLst/>
+            <a:ahLst/>
+            <a:rect l="0" t="0" r="r" b="b"/>
+            <a:pathLst>
+              <a:path w="12754" h="1218">
+                <a:moveTo>
+                  <a:pt x="0" y="0"/>
+                </a:moveTo>
+                <a:lnTo>
+                  <a:pt x="12754" y="0"/>
+                </a:lnTo>
+                <a:lnTo>
+                  <a:pt x="12754" y="1218"/>
+                </a:lnTo>
+                <a:lnTo>
+                  <a:pt x="0" y="1218"/>
+                </a:lnTo>
+                <a:lnTo>
+                  <a:pt x="0" y="0"/>
+                </a:lnTo>
+                <a:close/>
+              </a:path>
+            </a:pathLst>
+          </a:custGeom>
+          <a:solidFill>
+            <a:srgbClr val="ffffff"/>
+          </a:solidFill>
+          <a:ln w="0">
+            <a:noFill/>
+          </a:ln>
+        </p:spPr>
+        <p:txBody>
+          <a:bodyPr lIns="0" rIns="0" tIns="0" bIns="0" anchor="t">
+            <a:noAutofit/>
+          </a:bodyPr>
+          <a:p>
+            <a:endParaRPr b="0" lang="en-AU" sz="2400" spc="-1" strike="noStrike">
+              <a:solidFill>
+                <a:srgbClr val="000000"/>
+              </a:solidFill>
+              <a:latin typeface="Times New Roman"/>
+            </a:endParaRPr>
+          </a:p>
+        </p:txBody>
+      </p:sp>
+      <p:sp>
+        <p:nvSpPr>
+          <p:cNvPr id="120" name=""/>
+          <p:cNvSpPr/>
+          <p:nvPr/>
+        </p:nvSpPr>
+        <p:spPr>
+          <a:xfrm>
+            <a:off x="5628960" y="2219040"/>
+            <a:ext cx="3458160" cy="438480"/>
+          </a:xfrm>
+          <a:custGeom>
+            <a:avLst/>
+            <a:gdLst/>
+            <a:ahLst/>
+            <a:rect l="0" t="0" r="r" b="b"/>
+            <a:pathLst>
+              <a:path w="9606" h="1218">
+                <a:moveTo>
+                  <a:pt x="0" y="0"/>
+                </a:moveTo>
+                <a:lnTo>
+                  <a:pt x="9606" y="0"/>
+                </a:lnTo>
+                <a:lnTo>
+                  <a:pt x="9606" y="1218"/>
+                </a:lnTo>
+                <a:lnTo>
+                  <a:pt x="0" y="1218"/>
+                </a:lnTo>
+                <a:lnTo>
+                  <a:pt x="0" y="0"/>
+                </a:lnTo>
+                <a:close/>
+              </a:path>
+            </a:pathLst>
+          </a:custGeom>
+          <a:solidFill>
+            <a:srgbClr val="ffffff"/>
+          </a:solidFill>
+          <a:ln w="0">
+            <a:noFill/>
+          </a:ln>
+        </p:spPr>
+        <p:txBody>
+          <a:bodyPr lIns="0" rIns="0" tIns="0" bIns="0" anchor="t">
+            <a:noAutofit/>
+          </a:bodyPr>
+          <a:p>
+            <a:endParaRPr b="0" lang="en-AU" sz="2400" spc="-1" strike="noStrike">
+              <a:solidFill>
+                <a:srgbClr val="000000"/>
+              </a:solidFill>
+              <a:latin typeface="Times New Roman"/>
+            </a:endParaRPr>
+          </a:p>
+        </p:txBody>
+      </p:sp>
+      <p:sp>
+        <p:nvSpPr>
+          <p:cNvPr id="121" name=""/>
+          <p:cNvSpPr/>
+          <p:nvPr/>
+        </p:nvSpPr>
+        <p:spPr>
+          <a:xfrm>
+            <a:off x="676080" y="2219040"/>
+            <a:ext cx="362160" cy="438480"/>
+          </a:xfrm>
+          <a:custGeom>
+            <a:avLst/>
+            <a:gdLst/>
+            <a:ahLst/>
+            <a:rect l="0" t="0" r="r" b="b"/>
+            <a:pathLst>
+              <a:path w="1006" h="1218">
+                <a:moveTo>
+                  <a:pt x="0" y="0"/>
+                </a:moveTo>
+                <a:lnTo>
+                  <a:pt x="1006" y="0"/>
+                </a:lnTo>
+                <a:lnTo>
+                  <a:pt x="1006" y="1218"/>
+                </a:lnTo>
+                <a:lnTo>
+                  <a:pt x="0" y="1218"/>
+                </a:lnTo>
+                <a:lnTo>
+                  <a:pt x="0" y="0"/>
+                </a:lnTo>
+                <a:close/>
+              </a:path>
+            </a:pathLst>
+          </a:custGeom>
+          <a:solidFill>
+            <a:srgbClr val="001d34"/>
+          </a:solidFill>
+          <a:ln w="0">
+            <a:noFill/>
+          </a:ln>
+        </p:spPr>
+        <p:txBody>
+          <a:bodyPr lIns="0" rIns="0" tIns="0" bIns="0" anchor="t">
+            <a:noAutofit/>
+          </a:bodyPr>
+          <a:p>
+            <a:endParaRPr b="0" lang="en-AU" sz="2400" spc="-1" strike="noStrike">
+              <a:solidFill>
+                <a:srgbClr val="ffffff"/>
+              </a:solidFill>
+              <a:latin typeface="Times New Roman"/>
+            </a:endParaRPr>
+          </a:p>
+        </p:txBody>
+      </p:sp>
+      <p:sp>
+        <p:nvSpPr>
+          <p:cNvPr id="122" name=""/>
+          <p:cNvSpPr/>
+          <p:nvPr/>
+        </p:nvSpPr>
+        <p:spPr>
+          <a:xfrm>
+            <a:off x="1037880" y="2219040"/>
+            <a:ext cx="4591440" cy="438480"/>
+          </a:xfrm>
+          <a:custGeom>
+            <a:avLst/>
+            <a:gdLst/>
+            <a:ahLst/>
+            <a:rect l="0" t="0" r="r" b="b"/>
+            <a:pathLst>
+              <a:path w="12754" h="1218">
+                <a:moveTo>
+                  <a:pt x="0" y="0"/>
+                </a:moveTo>
+                <a:lnTo>
+                  <a:pt x="12754" y="0"/>
+                </a:lnTo>
+                <a:lnTo>
+                  <a:pt x="12754" y="1218"/>
+                </a:lnTo>
+                <a:lnTo>
+                  <a:pt x="0" y="1218"/>
+                </a:lnTo>
+                <a:lnTo>
+                  <a:pt x="0" y="0"/>
+                </a:lnTo>
+                <a:close/>
+              </a:path>
+            </a:pathLst>
+          </a:custGeom>
+          <a:solidFill>
+            <a:srgbClr val="001d34"/>
+          </a:solidFill>
+          <a:ln w="0">
+            <a:noFill/>
+          </a:ln>
+        </p:spPr>
+        <p:txBody>
+          <a:bodyPr lIns="0" rIns="0" tIns="0" bIns="0" anchor="t">
+            <a:noAutofit/>
+          </a:bodyPr>
+          <a:p>
+            <a:endParaRPr b="0" lang="en-AU" sz="2400" spc="-1" strike="noStrike">
+              <a:solidFill>
+                <a:srgbClr val="ffffff"/>
+              </a:solidFill>
+              <a:latin typeface="Times New Roman"/>
+            </a:endParaRPr>
+          </a:p>
+        </p:txBody>
+      </p:sp>
+      <p:sp>
+        <p:nvSpPr>
+          <p:cNvPr id="123" name=""/>
+          <p:cNvSpPr/>
+          <p:nvPr/>
+        </p:nvSpPr>
+        <p:spPr>
+          <a:xfrm>
+            <a:off x="5628960" y="2219040"/>
+            <a:ext cx="3458160" cy="438480"/>
+          </a:xfrm>
+          <a:custGeom>
+            <a:avLst/>
+            <a:gdLst/>
+            <a:ahLst/>
+            <a:rect l="0" t="0" r="r" b="b"/>
+            <a:pathLst>
+              <a:path w="9606" h="1218">
+                <a:moveTo>
+                  <a:pt x="0" y="0"/>
+                </a:moveTo>
+                <a:lnTo>
+                  <a:pt x="9606" y="0"/>
+                </a:lnTo>
+                <a:lnTo>
+                  <a:pt x="9606" y="1218"/>
+                </a:lnTo>
+                <a:lnTo>
+                  <a:pt x="0" y="1218"/>
+                </a:lnTo>
+                <a:lnTo>
+                  <a:pt x="0" y="0"/>
+                </a:lnTo>
+                <a:close/>
+              </a:path>
+            </a:pathLst>
+          </a:custGeom>
+          <a:solidFill>
+            <a:srgbClr val="001d34"/>
+          </a:solidFill>
+          <a:ln w="0">
+            <a:noFill/>
+          </a:ln>
+        </p:spPr>
+        <p:txBody>
+          <a:bodyPr lIns="0" rIns="0" tIns="0" bIns="0" anchor="t">
+            <a:noAutofit/>
+          </a:bodyPr>
+          <a:p>
+            <a:endParaRPr b="0" lang="en-AU" sz="2400" spc="-1" strike="noStrike">
+              <a:solidFill>
+                <a:srgbClr val="ffffff"/>
+              </a:solidFill>
+              <a:latin typeface="Times New Roman"/>
+            </a:endParaRPr>
+          </a:p>
+        </p:txBody>
+      </p:sp>
+      <p:sp>
+        <p:nvSpPr>
+          <p:cNvPr id="124" name=""/>
+          <p:cNvSpPr/>
+          <p:nvPr/>
+        </p:nvSpPr>
+        <p:spPr>
+          <a:xfrm>
+            <a:off x="676080" y="2657160"/>
+            <a:ext cx="362160" cy="438480"/>
+          </a:xfrm>
+          <a:custGeom>
+            <a:avLst/>
+            <a:gdLst/>
+            <a:ahLst/>
+            <a:rect l="0" t="0" r="r" b="b"/>
+            <a:pathLst>
+              <a:path w="1006" h="1218">
+                <a:moveTo>
+                  <a:pt x="0" y="0"/>
+                </a:moveTo>
+                <a:lnTo>
+                  <a:pt x="1006" y="0"/>
+                </a:lnTo>
+                <a:lnTo>
+                  <a:pt x="1006" y="1218"/>
+                </a:lnTo>
+                <a:lnTo>
+                  <a:pt x="0" y="1218"/>
+                </a:lnTo>
+                <a:lnTo>
+                  <a:pt x="0" y="0"/>
+                </a:lnTo>
+                <a:close/>
+              </a:path>
+            </a:pathLst>
+          </a:custGeom>
+          <a:solidFill>
+            <a:srgbClr val="ffffff"/>
+          </a:solidFill>
+          <a:ln w="0">
+            <a:noFill/>
+          </a:ln>
+        </p:spPr>
+        <p:txBody>
+          <a:bodyPr lIns="0" rIns="0" tIns="0" bIns="0" anchor="t">
+            <a:noAutofit/>
+          </a:bodyPr>
+          <a:p>
+            <a:endParaRPr b="0" lang="en-AU" sz="2400" spc="-1" strike="noStrike">
+              <a:solidFill>
+                <a:srgbClr val="000000"/>
+              </a:solidFill>
+              <a:latin typeface="Times New Roman"/>
+            </a:endParaRPr>
+          </a:p>
+        </p:txBody>
+      </p:sp>
+      <p:sp>
+        <p:nvSpPr>
+          <p:cNvPr id="125" name=""/>
+          <p:cNvSpPr/>
+          <p:nvPr/>
+        </p:nvSpPr>
+        <p:spPr>
+          <a:xfrm>
+            <a:off x="1037880" y="2657160"/>
+            <a:ext cx="4591440" cy="438480"/>
+          </a:xfrm>
+          <a:custGeom>
+            <a:avLst/>
+            <a:gdLst/>
+            <a:ahLst/>
+            <a:rect l="0" t="0" r="r" b="b"/>
+            <a:pathLst>
+              <a:path w="12754" h="1218">
+                <a:moveTo>
+                  <a:pt x="0" y="0"/>
+                </a:moveTo>
+                <a:lnTo>
+                  <a:pt x="12754" y="0"/>
+                </a:lnTo>
+                <a:lnTo>
+                  <a:pt x="12754" y="1218"/>
+                </a:lnTo>
+                <a:lnTo>
+                  <a:pt x="0" y="1218"/>
+                </a:lnTo>
+                <a:lnTo>
+                  <a:pt x="0" y="0"/>
+                </a:lnTo>
+                <a:close/>
+              </a:path>
+            </a:pathLst>
+          </a:custGeom>
+          <a:solidFill>
+            <a:srgbClr val="ffffff"/>
+          </a:solidFill>
+          <a:ln w="0">
+            <a:noFill/>
+          </a:ln>
+        </p:spPr>
+        <p:txBody>
+          <a:bodyPr lIns="0" rIns="0" tIns="0" bIns="0" anchor="t">
+            <a:noAutofit/>
+          </a:bodyPr>
+          <a:p>
+            <a:endParaRPr b="0" lang="en-AU" sz="2400" spc="-1" strike="noStrike">
+              <a:solidFill>
+                <a:srgbClr val="000000"/>
+              </a:solidFill>
+              <a:latin typeface="Times New Roman"/>
+            </a:endParaRPr>
+          </a:p>
+        </p:txBody>
+      </p:sp>
+      <p:sp>
+        <p:nvSpPr>
+          <p:cNvPr id="126" name=""/>
+          <p:cNvSpPr/>
+          <p:nvPr/>
+        </p:nvSpPr>
+        <p:spPr>
+          <a:xfrm>
+            <a:off x="5628960" y="2657160"/>
+            <a:ext cx="3458160" cy="438480"/>
+          </a:xfrm>
+          <a:custGeom>
+            <a:avLst/>
+            <a:gdLst/>
+            <a:ahLst/>
+            <a:rect l="0" t="0" r="r" b="b"/>
+            <a:pathLst>
+              <a:path w="9606" h="1218">
+                <a:moveTo>
+                  <a:pt x="0" y="0"/>
+                </a:moveTo>
+                <a:lnTo>
+                  <a:pt x="9606" y="0"/>
+                </a:lnTo>
+                <a:lnTo>
+                  <a:pt x="9606" y="1218"/>
+                </a:lnTo>
+                <a:lnTo>
+                  <a:pt x="0" y="1218"/>
+                </a:lnTo>
+                <a:lnTo>
+                  <a:pt x="0" y="0"/>
+                </a:lnTo>
+                <a:close/>
+              </a:path>
+            </a:pathLst>
+          </a:custGeom>
+          <a:solidFill>
+            <a:srgbClr val="ffffff"/>
+          </a:solidFill>
+          <a:ln w="0">
+            <a:noFill/>
+          </a:ln>
+        </p:spPr>
+        <p:txBody>
+          <a:bodyPr lIns="0" rIns="0" tIns="0" bIns="0" anchor="t">
+            <a:noAutofit/>
+          </a:bodyPr>
+          <a:p>
+            <a:endParaRPr b="0" lang="en-AU" sz="2400" spc="-1" strike="noStrike">
+              <a:solidFill>
+                <a:srgbClr val="000000"/>
+              </a:solidFill>
+              <a:latin typeface="Times New Roman"/>
+            </a:endParaRPr>
+          </a:p>
+        </p:txBody>
+      </p:sp>
+      <p:sp>
+        <p:nvSpPr>
+          <p:cNvPr id="127" name=""/>
+          <p:cNvSpPr/>
+          <p:nvPr/>
+        </p:nvSpPr>
+        <p:spPr>
+          <a:xfrm>
+            <a:off x="676080" y="3095280"/>
+            <a:ext cx="362160" cy="438840"/>
+          </a:xfrm>
+          <a:custGeom>
+            <a:avLst/>
+            <a:gdLst/>
+            <a:ahLst/>
+            <a:rect l="0" t="0" r="r" b="b"/>
+            <a:pathLst>
+              <a:path w="1006" h="1219">
+                <a:moveTo>
+                  <a:pt x="0" y="0"/>
+                </a:moveTo>
+                <a:lnTo>
+                  <a:pt x="1006" y="0"/>
+                </a:lnTo>
+                <a:lnTo>
+                  <a:pt x="1006" y="1219"/>
+                </a:lnTo>
+                <a:lnTo>
+                  <a:pt x="0" y="1219"/>
+                </a:lnTo>
+                <a:lnTo>
+                  <a:pt x="0" y="0"/>
+                </a:lnTo>
                 <a:close/>
               </a:path>
             </a:pathLst>
@@ -12010,232 +12372,3899 @@
       </p:sp>
       <p:sp>
         <p:nvSpPr>
-          <p:cNvPr id="119" name=""/>
-          <p:cNvSpPr/>
-          <p:nvPr/>
-        </p:nvSpPr>
-        <p:spPr>
-          <a:xfrm>
-            <a:off x="671400" y="2890800"/>
-            <a:ext cx="10849320" cy="1724400"/>
-          </a:xfrm>
-          <a:custGeom>
-            <a:avLst/>
-            <a:gdLst/>
-            <a:ahLst/>
-            <a:rect l="0" t="0" r="r" b="b"/>
-            <a:pathLst>
-              <a:path w="30137" h="4790">
-                <a:moveTo>
-                  <a:pt x="0" y="4644"/>
-                </a:moveTo>
-                <a:lnTo>
-                  <a:pt x="0" y="145"/>
-                </a:lnTo>
-                <a:cubicBezTo>
-                  <a:pt x="0" y="136"/>
-                  <a:pt x="1" y="126"/>
-                  <a:pt x="3" y="117"/>
-                </a:cubicBezTo>
-                <a:cubicBezTo>
-                  <a:pt x="4" y="107"/>
-                  <a:pt x="7" y="98"/>
-                  <a:pt x="11" y="89"/>
-                </a:cubicBezTo>
-                <a:cubicBezTo>
-                  <a:pt x="15" y="81"/>
-                  <a:pt x="19" y="72"/>
-                  <a:pt x="24" y="64"/>
-                </a:cubicBezTo>
-                <a:cubicBezTo>
-                  <a:pt x="30" y="56"/>
-                  <a:pt x="36" y="49"/>
-                  <a:pt x="42" y="42"/>
-                </a:cubicBezTo>
-                <a:cubicBezTo>
-                  <a:pt x="49" y="35"/>
-                  <a:pt x="57" y="29"/>
-                  <a:pt x="64" y="24"/>
-                </a:cubicBezTo>
-                <a:cubicBezTo>
-                  <a:pt x="72" y="19"/>
-                  <a:pt x="81" y="14"/>
-                  <a:pt x="90" y="11"/>
-                </a:cubicBezTo>
-                <a:cubicBezTo>
-                  <a:pt x="98" y="7"/>
-                  <a:pt x="108" y="4"/>
-                  <a:pt x="117" y="2"/>
-                </a:cubicBezTo>
-                <a:cubicBezTo>
-                  <a:pt x="126" y="1"/>
-                  <a:pt x="136" y="0"/>
-                  <a:pt x="145" y="0"/>
-                </a:cubicBezTo>
-                <a:lnTo>
-                  <a:pt x="29991" y="0"/>
-                </a:lnTo>
-                <a:cubicBezTo>
-                  <a:pt x="30001" y="0"/>
-                  <a:pt x="30010" y="1"/>
-                  <a:pt x="30020" y="2"/>
-                </a:cubicBezTo>
-                <a:cubicBezTo>
-                  <a:pt x="30029" y="4"/>
-                  <a:pt x="30038" y="7"/>
-                  <a:pt x="30047" y="11"/>
-                </a:cubicBezTo>
-                <a:cubicBezTo>
-                  <a:pt x="30056" y="14"/>
-                  <a:pt x="30064" y="19"/>
-                  <a:pt x="30072" y="24"/>
-                </a:cubicBezTo>
-                <a:cubicBezTo>
-                  <a:pt x="30080" y="29"/>
-                  <a:pt x="30087" y="35"/>
-                  <a:pt x="30094" y="42"/>
-                </a:cubicBezTo>
-                <a:cubicBezTo>
-                  <a:pt x="30101" y="49"/>
-                  <a:pt x="30107" y="56"/>
-                  <a:pt x="30112" y="64"/>
-                </a:cubicBezTo>
-                <a:cubicBezTo>
-                  <a:pt x="30118" y="72"/>
-                  <a:pt x="30122" y="81"/>
-                  <a:pt x="30126" y="89"/>
-                </a:cubicBezTo>
-                <a:cubicBezTo>
-                  <a:pt x="30129" y="98"/>
-                  <a:pt x="30132" y="107"/>
-                  <a:pt x="30134" y="117"/>
-                </a:cubicBezTo>
-                <a:cubicBezTo>
-                  <a:pt x="30136" y="126"/>
-                  <a:pt x="30137" y="136"/>
-                  <a:pt x="30137" y="145"/>
-                </a:cubicBezTo>
-                <a:lnTo>
-                  <a:pt x="30137" y="4644"/>
-                </a:lnTo>
-                <a:cubicBezTo>
-                  <a:pt x="30137" y="4654"/>
-                  <a:pt x="30136" y="4663"/>
-                  <a:pt x="30134" y="4672"/>
-                </a:cubicBezTo>
-                <a:cubicBezTo>
-                  <a:pt x="30132" y="4682"/>
-                  <a:pt x="30129" y="4691"/>
-                  <a:pt x="30126" y="4700"/>
-                </a:cubicBezTo>
-                <a:cubicBezTo>
-                  <a:pt x="30122" y="4709"/>
-                  <a:pt x="30118" y="4717"/>
-                  <a:pt x="30112" y="4725"/>
-                </a:cubicBezTo>
-                <a:cubicBezTo>
-                  <a:pt x="30107" y="4733"/>
-                  <a:pt x="30101" y="4740"/>
-                  <a:pt x="30094" y="4747"/>
-                </a:cubicBezTo>
-                <a:cubicBezTo>
-                  <a:pt x="30087" y="4754"/>
-                  <a:pt x="30080" y="4760"/>
-                  <a:pt x="30072" y="4765"/>
-                </a:cubicBezTo>
-                <a:cubicBezTo>
-                  <a:pt x="30064" y="4770"/>
-                  <a:pt x="30056" y="4775"/>
-                  <a:pt x="30047" y="4778"/>
-                </a:cubicBezTo>
-                <a:cubicBezTo>
-                  <a:pt x="30038" y="4782"/>
-                  <a:pt x="30029" y="4785"/>
-                  <a:pt x="30020" y="4787"/>
-                </a:cubicBezTo>
-                <a:cubicBezTo>
-                  <a:pt x="30010" y="4789"/>
-                  <a:pt x="30001" y="4790"/>
-                  <a:pt x="29991" y="4790"/>
-                </a:cubicBezTo>
-                <a:lnTo>
-                  <a:pt x="145" y="4790"/>
-                </a:lnTo>
-                <a:cubicBezTo>
-                  <a:pt x="136" y="4790"/>
-                  <a:pt x="126" y="4789"/>
-                  <a:pt x="117" y="4787"/>
-                </a:cubicBezTo>
-                <a:cubicBezTo>
-                  <a:pt x="108" y="4785"/>
-                  <a:pt x="98" y="4782"/>
-                  <a:pt x="90" y="4778"/>
-                </a:cubicBezTo>
-                <a:cubicBezTo>
-                  <a:pt x="81" y="4775"/>
-                  <a:pt x="72" y="4770"/>
-                  <a:pt x="64" y="4765"/>
-                </a:cubicBezTo>
-                <a:cubicBezTo>
-                  <a:pt x="57" y="4760"/>
-                  <a:pt x="49" y="4754"/>
-                  <a:pt x="42" y="4747"/>
-                </a:cubicBezTo>
-                <a:cubicBezTo>
-                  <a:pt x="36" y="4740"/>
-                  <a:pt x="30" y="4733"/>
-                  <a:pt x="24" y="4725"/>
-                </a:cubicBezTo>
-                <a:cubicBezTo>
-                  <a:pt x="19" y="4717"/>
-                  <a:pt x="15" y="4709"/>
-                  <a:pt x="11" y="4700"/>
-                </a:cubicBezTo>
-                <a:cubicBezTo>
-                  <a:pt x="7" y="4691"/>
-                  <a:pt x="4" y="4682"/>
-                  <a:pt x="3" y="4672"/>
-                </a:cubicBezTo>
-                <a:cubicBezTo>
-                  <a:pt x="1" y="4663"/>
-                  <a:pt x="0" y="4654"/>
-                  <a:pt x="0" y="4644"/>
-                </a:cubicBezTo>
-                <a:close/>
-              </a:path>
-            </a:pathLst>
-          </a:custGeom>
-          <a:noFill/>
-          <a:ln w="9360">
-            <a:solidFill>
-              <a:srgbClr val="d1d9e0"/>
-            </a:solidFill>
-            <a:miter/>
-          </a:ln>
-        </p:spPr>
-        <p:txBody>
-          <a:bodyPr lIns="4680" rIns="4680" tIns="4680" bIns="4680" anchor="t">
-            <a:noAutofit/>
-          </a:bodyPr>
-          <a:p>
-            <a:endParaRPr b="0" lang="en-AU" sz="2400" spc="-1" strike="noStrike">
-              <a:solidFill>
-                <a:srgbClr val="000000"/>
-              </a:solidFill>
-              <a:latin typeface="Times New Roman"/>
-            </a:endParaRPr>
-          </a:p>
-        </p:txBody>
-      </p:sp>
-      <p:sp>
-        <p:nvSpPr>
-          <p:cNvPr id="120" name=""/>
+          <p:cNvPr id="128" name=""/>
+          <p:cNvSpPr/>
+          <p:nvPr/>
+        </p:nvSpPr>
+        <p:spPr>
+          <a:xfrm>
+            <a:off x="1037880" y="3095280"/>
+            <a:ext cx="4591440" cy="438840"/>
+          </a:xfrm>
+          <a:custGeom>
+            <a:avLst/>
+            <a:gdLst/>
+            <a:ahLst/>
+            <a:rect l="0" t="0" r="r" b="b"/>
+            <a:pathLst>
+              <a:path w="12754" h="1219">
+                <a:moveTo>
+                  <a:pt x="0" y="0"/>
+                </a:moveTo>
+                <a:lnTo>
+                  <a:pt x="12754" y="0"/>
+                </a:lnTo>
+                <a:lnTo>
+                  <a:pt x="12754" y="1219"/>
+                </a:lnTo>
+                <a:lnTo>
+                  <a:pt x="0" y="1219"/>
+                </a:lnTo>
+                <a:lnTo>
+                  <a:pt x="0" y="0"/>
+                </a:lnTo>
+                <a:close/>
+              </a:path>
+            </a:pathLst>
+          </a:custGeom>
+          <a:solidFill>
+            <a:srgbClr val="f6f8fa"/>
+          </a:solidFill>
+          <a:ln w="0">
+            <a:noFill/>
+          </a:ln>
+        </p:spPr>
+        <p:txBody>
+          <a:bodyPr lIns="0" rIns="0" tIns="0" bIns="0" anchor="t">
+            <a:noAutofit/>
+          </a:bodyPr>
+          <a:p>
+            <a:endParaRPr b="0" lang="en-AU" sz="2400" spc="-1" strike="noStrike">
+              <a:solidFill>
+                <a:srgbClr val="000000"/>
+              </a:solidFill>
+              <a:latin typeface="Times New Roman"/>
+            </a:endParaRPr>
+          </a:p>
+        </p:txBody>
+      </p:sp>
+      <p:sp>
+        <p:nvSpPr>
+          <p:cNvPr id="129" name=""/>
+          <p:cNvSpPr/>
+          <p:nvPr/>
+        </p:nvSpPr>
+        <p:spPr>
+          <a:xfrm>
+            <a:off x="5628960" y="3095280"/>
+            <a:ext cx="3458160" cy="438840"/>
+          </a:xfrm>
+          <a:custGeom>
+            <a:avLst/>
+            <a:gdLst/>
+            <a:ahLst/>
+            <a:rect l="0" t="0" r="r" b="b"/>
+            <a:pathLst>
+              <a:path w="9606" h="1219">
+                <a:moveTo>
+                  <a:pt x="0" y="0"/>
+                </a:moveTo>
+                <a:lnTo>
+                  <a:pt x="9606" y="0"/>
+                </a:lnTo>
+                <a:lnTo>
+                  <a:pt x="9606" y="1219"/>
+                </a:lnTo>
+                <a:lnTo>
+                  <a:pt x="0" y="1219"/>
+                </a:lnTo>
+                <a:lnTo>
+                  <a:pt x="0" y="0"/>
+                </a:lnTo>
+                <a:close/>
+              </a:path>
+            </a:pathLst>
+          </a:custGeom>
+          <a:solidFill>
+            <a:srgbClr val="f6f8fa"/>
+          </a:solidFill>
+          <a:ln w="0">
+            <a:noFill/>
+          </a:ln>
+        </p:spPr>
+        <p:txBody>
+          <a:bodyPr lIns="0" rIns="0" tIns="0" bIns="0" anchor="t">
+            <a:noAutofit/>
+          </a:bodyPr>
+          <a:p>
+            <a:endParaRPr b="0" lang="en-AU" sz="2400" spc="-1" strike="noStrike">
+              <a:solidFill>
+                <a:srgbClr val="000000"/>
+              </a:solidFill>
+              <a:latin typeface="Times New Roman"/>
+            </a:endParaRPr>
+          </a:p>
+        </p:txBody>
+      </p:sp>
+      <p:sp>
+        <p:nvSpPr>
+          <p:cNvPr id="130" name=""/>
+          <p:cNvSpPr/>
+          <p:nvPr/>
+        </p:nvSpPr>
+        <p:spPr>
+          <a:xfrm>
+            <a:off x="676080" y="3533760"/>
+            <a:ext cx="362160" cy="438480"/>
+          </a:xfrm>
+          <a:custGeom>
+            <a:avLst/>
+            <a:gdLst/>
+            <a:ahLst/>
+            <a:rect l="0" t="0" r="r" b="b"/>
+            <a:pathLst>
+              <a:path w="1006" h="1218">
+                <a:moveTo>
+                  <a:pt x="0" y="0"/>
+                </a:moveTo>
+                <a:lnTo>
+                  <a:pt x="1006" y="0"/>
+                </a:lnTo>
+                <a:lnTo>
+                  <a:pt x="1006" y="1218"/>
+                </a:lnTo>
+                <a:lnTo>
+                  <a:pt x="0" y="1218"/>
+                </a:lnTo>
+                <a:lnTo>
+                  <a:pt x="0" y="0"/>
+                </a:lnTo>
+                <a:close/>
+              </a:path>
+            </a:pathLst>
+          </a:custGeom>
+          <a:solidFill>
+            <a:srgbClr val="ffffff"/>
+          </a:solidFill>
+          <a:ln w="0">
+            <a:noFill/>
+          </a:ln>
+        </p:spPr>
+        <p:txBody>
+          <a:bodyPr lIns="0" rIns="0" tIns="0" bIns="0" anchor="t">
+            <a:noAutofit/>
+          </a:bodyPr>
+          <a:p>
+            <a:endParaRPr b="0" lang="en-AU" sz="2400" spc="-1" strike="noStrike">
+              <a:solidFill>
+                <a:srgbClr val="000000"/>
+              </a:solidFill>
+              <a:latin typeface="Times New Roman"/>
+            </a:endParaRPr>
+          </a:p>
+        </p:txBody>
+      </p:sp>
+      <p:sp>
+        <p:nvSpPr>
+          <p:cNvPr id="131" name=""/>
+          <p:cNvSpPr/>
+          <p:nvPr/>
+        </p:nvSpPr>
+        <p:spPr>
+          <a:xfrm>
+            <a:off x="1037880" y="3533760"/>
+            <a:ext cx="4591440" cy="438480"/>
+          </a:xfrm>
+          <a:custGeom>
+            <a:avLst/>
+            <a:gdLst/>
+            <a:ahLst/>
+            <a:rect l="0" t="0" r="r" b="b"/>
+            <a:pathLst>
+              <a:path w="12754" h="1218">
+                <a:moveTo>
+                  <a:pt x="0" y="0"/>
+                </a:moveTo>
+                <a:lnTo>
+                  <a:pt x="12754" y="0"/>
+                </a:lnTo>
+                <a:lnTo>
+                  <a:pt x="12754" y="1218"/>
+                </a:lnTo>
+                <a:lnTo>
+                  <a:pt x="0" y="1218"/>
+                </a:lnTo>
+                <a:lnTo>
+                  <a:pt x="0" y="0"/>
+                </a:lnTo>
+                <a:close/>
+              </a:path>
+            </a:pathLst>
+          </a:custGeom>
+          <a:solidFill>
+            <a:srgbClr val="ffffff"/>
+          </a:solidFill>
+          <a:ln w="0">
+            <a:noFill/>
+          </a:ln>
+        </p:spPr>
+        <p:txBody>
+          <a:bodyPr lIns="0" rIns="0" tIns="0" bIns="0" anchor="t">
+            <a:noAutofit/>
+          </a:bodyPr>
+          <a:p>
+            <a:endParaRPr b="0" lang="en-AU" sz="2400" spc="-1" strike="noStrike">
+              <a:solidFill>
+                <a:srgbClr val="000000"/>
+              </a:solidFill>
+              <a:latin typeface="Times New Roman"/>
+            </a:endParaRPr>
+          </a:p>
+        </p:txBody>
+      </p:sp>
+      <p:sp>
+        <p:nvSpPr>
+          <p:cNvPr id="132" name=""/>
+          <p:cNvSpPr/>
+          <p:nvPr/>
+        </p:nvSpPr>
+        <p:spPr>
+          <a:xfrm>
+            <a:off x="5628960" y="3533760"/>
+            <a:ext cx="3458160" cy="438480"/>
+          </a:xfrm>
+          <a:custGeom>
+            <a:avLst/>
+            <a:gdLst/>
+            <a:ahLst/>
+            <a:rect l="0" t="0" r="r" b="b"/>
+            <a:pathLst>
+              <a:path w="9606" h="1218">
+                <a:moveTo>
+                  <a:pt x="0" y="0"/>
+                </a:moveTo>
+                <a:lnTo>
+                  <a:pt x="9606" y="0"/>
+                </a:lnTo>
+                <a:lnTo>
+                  <a:pt x="9606" y="1218"/>
+                </a:lnTo>
+                <a:lnTo>
+                  <a:pt x="0" y="1218"/>
+                </a:lnTo>
+                <a:lnTo>
+                  <a:pt x="0" y="0"/>
+                </a:lnTo>
+                <a:close/>
+              </a:path>
+            </a:pathLst>
+          </a:custGeom>
+          <a:solidFill>
+            <a:srgbClr val="ffffff"/>
+          </a:solidFill>
+          <a:ln w="0">
+            <a:noFill/>
+          </a:ln>
+        </p:spPr>
+        <p:txBody>
+          <a:bodyPr lIns="0" rIns="0" tIns="0" bIns="0" anchor="t">
+            <a:noAutofit/>
+          </a:bodyPr>
+          <a:p>
+            <a:endParaRPr b="0" lang="en-AU" sz="2400" spc="-1" strike="noStrike">
+              <a:solidFill>
+                <a:srgbClr val="000000"/>
+              </a:solidFill>
+              <a:latin typeface="Times New Roman"/>
+            </a:endParaRPr>
+          </a:p>
+        </p:txBody>
+      </p:sp>
+      <p:sp>
+        <p:nvSpPr>
+          <p:cNvPr id="133" name=""/>
+          <p:cNvSpPr/>
+          <p:nvPr/>
+        </p:nvSpPr>
+        <p:spPr>
+          <a:xfrm>
+            <a:off x="676080" y="3971880"/>
+            <a:ext cx="362160" cy="438480"/>
+          </a:xfrm>
+          <a:custGeom>
+            <a:avLst/>
+            <a:gdLst/>
+            <a:ahLst/>
+            <a:rect l="0" t="0" r="r" b="b"/>
+            <a:pathLst>
+              <a:path w="1006" h="1218">
+                <a:moveTo>
+                  <a:pt x="0" y="0"/>
+                </a:moveTo>
+                <a:lnTo>
+                  <a:pt x="1006" y="0"/>
+                </a:lnTo>
+                <a:lnTo>
+                  <a:pt x="1006" y="1218"/>
+                </a:lnTo>
+                <a:lnTo>
+                  <a:pt x="0" y="1218"/>
+                </a:lnTo>
+                <a:lnTo>
+                  <a:pt x="0" y="0"/>
+                </a:lnTo>
+                <a:close/>
+              </a:path>
+            </a:pathLst>
+          </a:custGeom>
+          <a:solidFill>
+            <a:srgbClr val="f6f8fa"/>
+          </a:solidFill>
+          <a:ln w="0">
+            <a:noFill/>
+          </a:ln>
+        </p:spPr>
+        <p:txBody>
+          <a:bodyPr lIns="0" rIns="0" tIns="0" bIns="0" anchor="t">
+            <a:noAutofit/>
+          </a:bodyPr>
+          <a:p>
+            <a:endParaRPr b="0" lang="en-AU" sz="2400" spc="-1" strike="noStrike">
+              <a:solidFill>
+                <a:srgbClr val="000000"/>
+              </a:solidFill>
+              <a:latin typeface="Times New Roman"/>
+            </a:endParaRPr>
+          </a:p>
+        </p:txBody>
+      </p:sp>
+      <p:sp>
+        <p:nvSpPr>
+          <p:cNvPr id="134" name=""/>
+          <p:cNvSpPr/>
+          <p:nvPr/>
+        </p:nvSpPr>
+        <p:spPr>
+          <a:xfrm>
+            <a:off x="1037880" y="3971880"/>
+            <a:ext cx="4591440" cy="438480"/>
+          </a:xfrm>
+          <a:custGeom>
+            <a:avLst/>
+            <a:gdLst/>
+            <a:ahLst/>
+            <a:rect l="0" t="0" r="r" b="b"/>
+            <a:pathLst>
+              <a:path w="12754" h="1218">
+                <a:moveTo>
+                  <a:pt x="0" y="0"/>
+                </a:moveTo>
+                <a:lnTo>
+                  <a:pt x="12754" y="0"/>
+                </a:lnTo>
+                <a:lnTo>
+                  <a:pt x="12754" y="1218"/>
+                </a:lnTo>
+                <a:lnTo>
+                  <a:pt x="0" y="1218"/>
+                </a:lnTo>
+                <a:lnTo>
+                  <a:pt x="0" y="0"/>
+                </a:lnTo>
+                <a:close/>
+              </a:path>
+            </a:pathLst>
+          </a:custGeom>
+          <a:solidFill>
+            <a:srgbClr val="f6f8fa"/>
+          </a:solidFill>
+          <a:ln w="0">
+            <a:noFill/>
+          </a:ln>
+        </p:spPr>
+        <p:txBody>
+          <a:bodyPr lIns="0" rIns="0" tIns="0" bIns="0" anchor="t">
+            <a:noAutofit/>
+          </a:bodyPr>
+          <a:p>
+            <a:endParaRPr b="0" lang="en-AU" sz="2400" spc="-1" strike="noStrike">
+              <a:solidFill>
+                <a:srgbClr val="000000"/>
+              </a:solidFill>
+              <a:latin typeface="Times New Roman"/>
+            </a:endParaRPr>
+          </a:p>
+        </p:txBody>
+      </p:sp>
+      <p:sp>
+        <p:nvSpPr>
+          <p:cNvPr id="135" name=""/>
+          <p:cNvSpPr/>
+          <p:nvPr/>
+        </p:nvSpPr>
+        <p:spPr>
+          <a:xfrm>
+            <a:off x="5628960" y="3971880"/>
+            <a:ext cx="3458160" cy="438480"/>
+          </a:xfrm>
+          <a:custGeom>
+            <a:avLst/>
+            <a:gdLst/>
+            <a:ahLst/>
+            <a:rect l="0" t="0" r="r" b="b"/>
+            <a:pathLst>
+              <a:path w="9606" h="1218">
+                <a:moveTo>
+                  <a:pt x="0" y="0"/>
+                </a:moveTo>
+                <a:lnTo>
+                  <a:pt x="9606" y="0"/>
+                </a:lnTo>
+                <a:lnTo>
+                  <a:pt x="9606" y="1218"/>
+                </a:lnTo>
+                <a:lnTo>
+                  <a:pt x="0" y="1218"/>
+                </a:lnTo>
+                <a:lnTo>
+                  <a:pt x="0" y="0"/>
+                </a:lnTo>
+                <a:close/>
+              </a:path>
+            </a:pathLst>
+          </a:custGeom>
+          <a:solidFill>
+            <a:srgbClr val="f6f8fa"/>
+          </a:solidFill>
+          <a:ln w="0">
+            <a:noFill/>
+          </a:ln>
+        </p:spPr>
+        <p:txBody>
+          <a:bodyPr lIns="0" rIns="0" tIns="0" bIns="0" anchor="t">
+            <a:noAutofit/>
+          </a:bodyPr>
+          <a:p>
+            <a:endParaRPr b="0" lang="en-AU" sz="2400" spc="-1" strike="noStrike">
+              <a:solidFill>
+                <a:srgbClr val="000000"/>
+              </a:solidFill>
+              <a:latin typeface="Times New Roman"/>
+            </a:endParaRPr>
+          </a:p>
+        </p:txBody>
+      </p:sp>
+      <p:sp>
+        <p:nvSpPr>
+          <p:cNvPr id="136" name=""/>
+          <p:cNvSpPr/>
+          <p:nvPr/>
+        </p:nvSpPr>
+        <p:spPr>
+          <a:xfrm>
+            <a:off x="676080" y="4410000"/>
+            <a:ext cx="362160" cy="438480"/>
+          </a:xfrm>
+          <a:custGeom>
+            <a:avLst/>
+            <a:gdLst/>
+            <a:ahLst/>
+            <a:rect l="0" t="0" r="r" b="b"/>
+            <a:pathLst>
+              <a:path w="1006" h="1218">
+                <a:moveTo>
+                  <a:pt x="0" y="0"/>
+                </a:moveTo>
+                <a:lnTo>
+                  <a:pt x="1006" y="0"/>
+                </a:lnTo>
+                <a:lnTo>
+                  <a:pt x="1006" y="1218"/>
+                </a:lnTo>
+                <a:lnTo>
+                  <a:pt x="0" y="1218"/>
+                </a:lnTo>
+                <a:lnTo>
+                  <a:pt x="0" y="0"/>
+                </a:lnTo>
+                <a:close/>
+              </a:path>
+            </a:pathLst>
+          </a:custGeom>
+          <a:solidFill>
+            <a:srgbClr val="ffffff"/>
+          </a:solidFill>
+          <a:ln w="0">
+            <a:noFill/>
+          </a:ln>
+        </p:spPr>
+        <p:txBody>
+          <a:bodyPr lIns="0" rIns="0" tIns="0" bIns="0" anchor="t">
+            <a:noAutofit/>
+          </a:bodyPr>
+          <a:p>
+            <a:endParaRPr b="0" lang="en-AU" sz="2400" spc="-1" strike="noStrike">
+              <a:solidFill>
+                <a:srgbClr val="000000"/>
+              </a:solidFill>
+              <a:latin typeface="Times New Roman"/>
+            </a:endParaRPr>
+          </a:p>
+        </p:txBody>
+      </p:sp>
+      <p:sp>
+        <p:nvSpPr>
+          <p:cNvPr id="137" name=""/>
+          <p:cNvSpPr/>
+          <p:nvPr/>
+        </p:nvSpPr>
+        <p:spPr>
+          <a:xfrm>
+            <a:off x="1037880" y="4410000"/>
+            <a:ext cx="4591440" cy="438480"/>
+          </a:xfrm>
+          <a:custGeom>
+            <a:avLst/>
+            <a:gdLst/>
+            <a:ahLst/>
+            <a:rect l="0" t="0" r="r" b="b"/>
+            <a:pathLst>
+              <a:path w="12754" h="1218">
+                <a:moveTo>
+                  <a:pt x="0" y="0"/>
+                </a:moveTo>
+                <a:lnTo>
+                  <a:pt x="12754" y="0"/>
+                </a:lnTo>
+                <a:lnTo>
+                  <a:pt x="12754" y="1218"/>
+                </a:lnTo>
+                <a:lnTo>
+                  <a:pt x="0" y="1218"/>
+                </a:lnTo>
+                <a:lnTo>
+                  <a:pt x="0" y="0"/>
+                </a:lnTo>
+                <a:close/>
+              </a:path>
+            </a:pathLst>
+          </a:custGeom>
+          <a:solidFill>
+            <a:srgbClr val="ffffff"/>
+          </a:solidFill>
+          <a:ln w="0">
+            <a:noFill/>
+          </a:ln>
+        </p:spPr>
+        <p:txBody>
+          <a:bodyPr lIns="0" rIns="0" tIns="0" bIns="0" anchor="t">
+            <a:noAutofit/>
+          </a:bodyPr>
+          <a:p>
+            <a:endParaRPr b="0" lang="en-AU" sz="2400" spc="-1" strike="noStrike">
+              <a:solidFill>
+                <a:srgbClr val="000000"/>
+              </a:solidFill>
+              <a:latin typeface="Times New Roman"/>
+            </a:endParaRPr>
+          </a:p>
+        </p:txBody>
+      </p:sp>
+      <p:sp>
+        <p:nvSpPr>
+          <p:cNvPr id="138" name=""/>
+          <p:cNvSpPr/>
+          <p:nvPr/>
+        </p:nvSpPr>
+        <p:spPr>
+          <a:xfrm>
+            <a:off x="5628960" y="4410000"/>
+            <a:ext cx="3458160" cy="438480"/>
+          </a:xfrm>
+          <a:custGeom>
+            <a:avLst/>
+            <a:gdLst/>
+            <a:ahLst/>
+            <a:rect l="0" t="0" r="r" b="b"/>
+            <a:pathLst>
+              <a:path w="9606" h="1218">
+                <a:moveTo>
+                  <a:pt x="0" y="0"/>
+                </a:moveTo>
+                <a:lnTo>
+                  <a:pt x="9606" y="0"/>
+                </a:lnTo>
+                <a:lnTo>
+                  <a:pt x="9606" y="1218"/>
+                </a:lnTo>
+                <a:lnTo>
+                  <a:pt x="0" y="1218"/>
+                </a:lnTo>
+                <a:lnTo>
+                  <a:pt x="0" y="0"/>
+                </a:lnTo>
+                <a:close/>
+              </a:path>
+            </a:pathLst>
+          </a:custGeom>
+          <a:solidFill>
+            <a:srgbClr val="ffffff"/>
+          </a:solidFill>
+          <a:ln w="0">
+            <a:noFill/>
+          </a:ln>
+        </p:spPr>
+        <p:txBody>
+          <a:bodyPr lIns="0" rIns="0" tIns="0" bIns="0" anchor="t">
+            <a:noAutofit/>
+          </a:bodyPr>
+          <a:p>
+            <a:endParaRPr b="0" lang="en-AU" sz="2400" spc="-1" strike="noStrike">
+              <a:solidFill>
+                <a:srgbClr val="000000"/>
+              </a:solidFill>
+              <a:latin typeface="Times New Roman"/>
+            </a:endParaRPr>
+          </a:p>
+        </p:txBody>
+      </p:sp>
+      <p:sp>
+        <p:nvSpPr>
+          <p:cNvPr id="139" name=""/>
+          <p:cNvSpPr/>
+          <p:nvPr/>
+        </p:nvSpPr>
+        <p:spPr>
+          <a:xfrm>
+            <a:off x="676080" y="4848120"/>
+            <a:ext cx="362160" cy="438480"/>
+          </a:xfrm>
+          <a:custGeom>
+            <a:avLst/>
+            <a:gdLst/>
+            <a:ahLst/>
+            <a:rect l="0" t="0" r="r" b="b"/>
+            <a:pathLst>
+              <a:path w="1006" h="1218">
+                <a:moveTo>
+                  <a:pt x="0" y="0"/>
+                </a:moveTo>
+                <a:lnTo>
+                  <a:pt x="1006" y="0"/>
+                </a:lnTo>
+                <a:lnTo>
+                  <a:pt x="1006" y="1218"/>
+                </a:lnTo>
+                <a:lnTo>
+                  <a:pt x="0" y="1218"/>
+                </a:lnTo>
+                <a:lnTo>
+                  <a:pt x="0" y="0"/>
+                </a:lnTo>
+                <a:close/>
+              </a:path>
+            </a:pathLst>
+          </a:custGeom>
+          <a:solidFill>
+            <a:srgbClr val="f6f8fa"/>
+          </a:solidFill>
+          <a:ln w="0">
+            <a:noFill/>
+          </a:ln>
+        </p:spPr>
+        <p:txBody>
+          <a:bodyPr lIns="0" rIns="0" tIns="0" bIns="0" anchor="t">
+            <a:noAutofit/>
+          </a:bodyPr>
+          <a:p>
+            <a:endParaRPr b="0" lang="en-AU" sz="2400" spc="-1" strike="noStrike">
+              <a:solidFill>
+                <a:srgbClr val="000000"/>
+              </a:solidFill>
+              <a:latin typeface="Times New Roman"/>
+            </a:endParaRPr>
+          </a:p>
+        </p:txBody>
+      </p:sp>
+      <p:sp>
+        <p:nvSpPr>
+          <p:cNvPr id="140" name=""/>
+          <p:cNvSpPr/>
+          <p:nvPr/>
+        </p:nvSpPr>
+        <p:spPr>
+          <a:xfrm>
+            <a:off x="1037880" y="4848120"/>
+            <a:ext cx="4591440" cy="438480"/>
+          </a:xfrm>
+          <a:custGeom>
+            <a:avLst/>
+            <a:gdLst/>
+            <a:ahLst/>
+            <a:rect l="0" t="0" r="r" b="b"/>
+            <a:pathLst>
+              <a:path w="12754" h="1218">
+                <a:moveTo>
+                  <a:pt x="0" y="0"/>
+                </a:moveTo>
+                <a:lnTo>
+                  <a:pt x="12754" y="0"/>
+                </a:lnTo>
+                <a:lnTo>
+                  <a:pt x="12754" y="1218"/>
+                </a:lnTo>
+                <a:lnTo>
+                  <a:pt x="0" y="1218"/>
+                </a:lnTo>
+                <a:lnTo>
+                  <a:pt x="0" y="0"/>
+                </a:lnTo>
+                <a:close/>
+              </a:path>
+            </a:pathLst>
+          </a:custGeom>
+          <a:solidFill>
+            <a:srgbClr val="f6f8fa"/>
+          </a:solidFill>
+          <a:ln w="0">
+            <a:noFill/>
+          </a:ln>
+        </p:spPr>
+        <p:txBody>
+          <a:bodyPr lIns="0" rIns="0" tIns="0" bIns="0" anchor="t">
+            <a:noAutofit/>
+          </a:bodyPr>
+          <a:p>
+            <a:endParaRPr b="0" lang="en-AU" sz="2400" spc="-1" strike="noStrike">
+              <a:solidFill>
+                <a:srgbClr val="000000"/>
+              </a:solidFill>
+              <a:latin typeface="Times New Roman"/>
+            </a:endParaRPr>
+          </a:p>
+        </p:txBody>
+      </p:sp>
+      <p:sp>
+        <p:nvSpPr>
+          <p:cNvPr id="141" name=""/>
+          <p:cNvSpPr/>
+          <p:nvPr/>
+        </p:nvSpPr>
+        <p:spPr>
+          <a:xfrm>
+            <a:off x="5628960" y="4848120"/>
+            <a:ext cx="3458160" cy="438480"/>
+          </a:xfrm>
+          <a:custGeom>
+            <a:avLst/>
+            <a:gdLst/>
+            <a:ahLst/>
+            <a:rect l="0" t="0" r="r" b="b"/>
+            <a:pathLst>
+              <a:path w="9606" h="1218">
+                <a:moveTo>
+                  <a:pt x="0" y="0"/>
+                </a:moveTo>
+                <a:lnTo>
+                  <a:pt x="9606" y="0"/>
+                </a:lnTo>
+                <a:lnTo>
+                  <a:pt x="9606" y="1218"/>
+                </a:lnTo>
+                <a:lnTo>
+                  <a:pt x="0" y="1218"/>
+                </a:lnTo>
+                <a:lnTo>
+                  <a:pt x="0" y="0"/>
+                </a:lnTo>
+                <a:close/>
+              </a:path>
+            </a:pathLst>
+          </a:custGeom>
+          <a:solidFill>
+            <a:srgbClr val="f6f8fa"/>
+          </a:solidFill>
+          <a:ln w="0">
+            <a:noFill/>
+          </a:ln>
+        </p:spPr>
+        <p:txBody>
+          <a:bodyPr lIns="0" rIns="0" tIns="0" bIns="0" anchor="t">
+            <a:noAutofit/>
+          </a:bodyPr>
+          <a:p>
+            <a:endParaRPr b="0" lang="en-AU" sz="2400" spc="-1" strike="noStrike">
+              <a:solidFill>
+                <a:srgbClr val="000000"/>
+              </a:solidFill>
+              <a:latin typeface="Times New Roman"/>
+            </a:endParaRPr>
+          </a:p>
+        </p:txBody>
+      </p:sp>
+      <p:sp>
+        <p:nvSpPr>
+          <p:cNvPr id="142" name=""/>
+          <p:cNvSpPr/>
+          <p:nvPr/>
+        </p:nvSpPr>
+        <p:spPr>
+          <a:xfrm>
+            <a:off x="666720" y="2209680"/>
+            <a:ext cx="9720" cy="447840"/>
+          </a:xfrm>
+          <a:custGeom>
+            <a:avLst/>
+            <a:gdLst/>
+            <a:ahLst/>
+            <a:rect l="0" t="0" r="r" b="b"/>
+            <a:pathLst>
+              <a:path w="27" h="1244">
+                <a:moveTo>
+                  <a:pt x="0" y="0"/>
+                </a:moveTo>
+                <a:lnTo>
+                  <a:pt x="27" y="0"/>
+                </a:lnTo>
+                <a:lnTo>
+                  <a:pt x="27" y="1244"/>
+                </a:lnTo>
+                <a:lnTo>
+                  <a:pt x="0" y="1244"/>
+                </a:lnTo>
+                <a:lnTo>
+                  <a:pt x="0" y="0"/>
+                </a:lnTo>
+                <a:close/>
+              </a:path>
+            </a:pathLst>
+          </a:custGeom>
+          <a:solidFill>
+            <a:srgbClr val="d1d9e0"/>
+          </a:solidFill>
+          <a:ln w="0">
+            <a:noFill/>
+          </a:ln>
+        </p:spPr>
+        <p:txBody>
+          <a:bodyPr lIns="0" rIns="0" tIns="0" bIns="0" anchor="t">
+            <a:noAutofit/>
+          </a:bodyPr>
+          <a:p>
+            <a:endParaRPr b="0" lang="en-AU" sz="2400" spc="-1" strike="noStrike">
+              <a:solidFill>
+                <a:srgbClr val="000000"/>
+              </a:solidFill>
+              <a:latin typeface="Times New Roman"/>
+            </a:endParaRPr>
+          </a:p>
+        </p:txBody>
+      </p:sp>
+      <p:sp>
+        <p:nvSpPr>
+          <p:cNvPr id="143" name=""/>
+          <p:cNvSpPr/>
+          <p:nvPr/>
+        </p:nvSpPr>
+        <p:spPr>
+          <a:xfrm>
+            <a:off x="666720" y="2209680"/>
+            <a:ext cx="371520" cy="9720"/>
+          </a:xfrm>
+          <a:custGeom>
+            <a:avLst/>
+            <a:gdLst/>
+            <a:ahLst/>
+            <a:rect l="0" t="0" r="r" b="b"/>
+            <a:pathLst>
+              <a:path w="1032" h="27">
+                <a:moveTo>
+                  <a:pt x="0" y="0"/>
+                </a:moveTo>
+                <a:lnTo>
+                  <a:pt x="1032" y="0"/>
+                </a:lnTo>
+                <a:lnTo>
+                  <a:pt x="1032" y="27"/>
+                </a:lnTo>
+                <a:lnTo>
+                  <a:pt x="0" y="27"/>
+                </a:lnTo>
+                <a:lnTo>
+                  <a:pt x="0" y="0"/>
+                </a:lnTo>
+                <a:close/>
+              </a:path>
+            </a:pathLst>
+          </a:custGeom>
+          <a:solidFill>
+            <a:srgbClr val="d1d9e0"/>
+          </a:solidFill>
+          <a:ln w="0">
+            <a:noFill/>
+          </a:ln>
+        </p:spPr>
+        <p:txBody>
+          <a:bodyPr lIns="0" rIns="0" tIns="0" bIns="0" anchor="t">
+            <a:noAutofit/>
+          </a:bodyPr>
+          <a:p>
+            <a:endParaRPr b="0" lang="en-AU" sz="2400" spc="-1" strike="noStrike">
+              <a:solidFill>
+                <a:srgbClr val="000000"/>
+              </a:solidFill>
+              <a:latin typeface="Times New Roman"/>
+            </a:endParaRPr>
+          </a:p>
+        </p:txBody>
+      </p:sp>
+      <p:sp>
+        <p:nvSpPr>
+          <p:cNvPr id="144" name=""/>
+          <p:cNvSpPr/>
+          <p:nvPr/>
+        </p:nvSpPr>
+        <p:spPr>
+          <a:xfrm>
+            <a:off x="1028520" y="2209680"/>
+            <a:ext cx="9720" cy="447840"/>
+          </a:xfrm>
+          <a:custGeom>
+            <a:avLst/>
+            <a:gdLst/>
+            <a:ahLst/>
+            <a:rect l="0" t="0" r="r" b="b"/>
+            <a:pathLst>
+              <a:path w="27" h="1244">
+                <a:moveTo>
+                  <a:pt x="0" y="0"/>
+                </a:moveTo>
+                <a:lnTo>
+                  <a:pt x="27" y="0"/>
+                </a:lnTo>
+                <a:lnTo>
+                  <a:pt x="27" y="1244"/>
+                </a:lnTo>
+                <a:lnTo>
+                  <a:pt x="0" y="1244"/>
+                </a:lnTo>
+                <a:lnTo>
+                  <a:pt x="0" y="0"/>
+                </a:lnTo>
+                <a:close/>
+              </a:path>
+            </a:pathLst>
+          </a:custGeom>
+          <a:solidFill>
+            <a:srgbClr val="d1d9e0"/>
+          </a:solidFill>
+          <a:ln w="0">
+            <a:noFill/>
+          </a:ln>
+        </p:spPr>
+        <p:txBody>
+          <a:bodyPr lIns="0" rIns="0" tIns="0" bIns="0" anchor="t">
+            <a:noAutofit/>
+          </a:bodyPr>
+          <a:p>
+            <a:endParaRPr b="0" lang="en-AU" sz="2400" spc="-1" strike="noStrike">
+              <a:solidFill>
+                <a:srgbClr val="000000"/>
+              </a:solidFill>
+              <a:latin typeface="Times New Roman"/>
+            </a:endParaRPr>
+          </a:p>
+        </p:txBody>
+      </p:sp>
+      <p:sp>
+        <p:nvSpPr>
+          <p:cNvPr id="145" name=""/>
+          <p:cNvSpPr/>
+          <p:nvPr/>
+        </p:nvSpPr>
+        <p:spPr>
+          <a:xfrm>
+            <a:off x="1037880" y="2209680"/>
+            <a:ext cx="4591440" cy="9720"/>
+          </a:xfrm>
+          <a:custGeom>
+            <a:avLst/>
+            <a:gdLst/>
+            <a:ahLst/>
+            <a:rect l="0" t="0" r="r" b="b"/>
+            <a:pathLst>
+              <a:path w="12754" h="27">
+                <a:moveTo>
+                  <a:pt x="0" y="0"/>
+                </a:moveTo>
+                <a:lnTo>
+                  <a:pt x="12754" y="0"/>
+                </a:lnTo>
+                <a:lnTo>
+                  <a:pt x="12754" y="27"/>
+                </a:lnTo>
+                <a:lnTo>
+                  <a:pt x="0" y="27"/>
+                </a:lnTo>
+                <a:lnTo>
+                  <a:pt x="0" y="0"/>
+                </a:lnTo>
+                <a:close/>
+              </a:path>
+            </a:pathLst>
+          </a:custGeom>
+          <a:solidFill>
+            <a:srgbClr val="d1d9e0"/>
+          </a:solidFill>
+          <a:ln w="0">
+            <a:noFill/>
+          </a:ln>
+        </p:spPr>
+        <p:txBody>
+          <a:bodyPr lIns="0" rIns="0" tIns="0" bIns="0" anchor="t">
+            <a:noAutofit/>
+          </a:bodyPr>
+          <a:p>
+            <a:endParaRPr b="0" lang="en-AU" sz="2400" spc="-1" strike="noStrike">
+              <a:solidFill>
+                <a:srgbClr val="000000"/>
+              </a:solidFill>
+              <a:latin typeface="Times New Roman"/>
+            </a:endParaRPr>
+          </a:p>
+        </p:txBody>
+      </p:sp>
+      <p:sp>
+        <p:nvSpPr>
+          <p:cNvPr id="146" name=""/>
+          <p:cNvSpPr/>
+          <p:nvPr/>
+        </p:nvSpPr>
+        <p:spPr>
+          <a:xfrm>
+            <a:off x="5619600" y="2209680"/>
+            <a:ext cx="9720" cy="447840"/>
+          </a:xfrm>
+          <a:custGeom>
+            <a:avLst/>
+            <a:gdLst/>
+            <a:ahLst/>
+            <a:rect l="0" t="0" r="r" b="b"/>
+            <a:pathLst>
+              <a:path w="27" h="1244">
+                <a:moveTo>
+                  <a:pt x="0" y="0"/>
+                </a:moveTo>
+                <a:lnTo>
+                  <a:pt x="27" y="0"/>
+                </a:lnTo>
+                <a:lnTo>
+                  <a:pt x="27" y="1244"/>
+                </a:lnTo>
+                <a:lnTo>
+                  <a:pt x="0" y="1244"/>
+                </a:lnTo>
+                <a:lnTo>
+                  <a:pt x="0" y="0"/>
+                </a:lnTo>
+                <a:close/>
+              </a:path>
+            </a:pathLst>
+          </a:custGeom>
+          <a:solidFill>
+            <a:srgbClr val="d1d9e0"/>
+          </a:solidFill>
+          <a:ln w="0">
+            <a:noFill/>
+          </a:ln>
+        </p:spPr>
+        <p:txBody>
+          <a:bodyPr lIns="0" rIns="0" tIns="0" bIns="0" anchor="t">
+            <a:noAutofit/>
+          </a:bodyPr>
+          <a:p>
+            <a:endParaRPr b="0" lang="en-AU" sz="2400" spc="-1" strike="noStrike">
+              <a:solidFill>
+                <a:srgbClr val="000000"/>
+              </a:solidFill>
+              <a:latin typeface="Times New Roman"/>
+            </a:endParaRPr>
+          </a:p>
+        </p:txBody>
+      </p:sp>
+      <p:sp>
+        <p:nvSpPr>
+          <p:cNvPr id="147" name=""/>
+          <p:cNvSpPr/>
+          <p:nvPr/>
+        </p:nvSpPr>
+        <p:spPr>
+          <a:xfrm>
+            <a:off x="5628960" y="2209680"/>
+            <a:ext cx="3458160" cy="9720"/>
+          </a:xfrm>
+          <a:custGeom>
+            <a:avLst/>
+            <a:gdLst/>
+            <a:ahLst/>
+            <a:rect l="0" t="0" r="r" b="b"/>
+            <a:pathLst>
+              <a:path w="9606" h="27">
+                <a:moveTo>
+                  <a:pt x="0" y="0"/>
+                </a:moveTo>
+                <a:lnTo>
+                  <a:pt x="9606" y="0"/>
+                </a:lnTo>
+                <a:lnTo>
+                  <a:pt x="9606" y="27"/>
+                </a:lnTo>
+                <a:lnTo>
+                  <a:pt x="0" y="27"/>
+                </a:lnTo>
+                <a:lnTo>
+                  <a:pt x="0" y="0"/>
+                </a:lnTo>
+                <a:close/>
+              </a:path>
+            </a:pathLst>
+          </a:custGeom>
+          <a:solidFill>
+            <a:srgbClr val="d1d9e0"/>
+          </a:solidFill>
+          <a:ln w="0">
+            <a:noFill/>
+          </a:ln>
+        </p:spPr>
+        <p:txBody>
+          <a:bodyPr lIns="0" rIns="0" tIns="0" bIns="0" anchor="t">
+            <a:noAutofit/>
+          </a:bodyPr>
+          <a:p>
+            <a:endParaRPr b="0" lang="en-AU" sz="2400" spc="-1" strike="noStrike">
+              <a:solidFill>
+                <a:srgbClr val="000000"/>
+              </a:solidFill>
+              <a:latin typeface="Times New Roman"/>
+            </a:endParaRPr>
+          </a:p>
+        </p:txBody>
+      </p:sp>
+      <p:sp>
+        <p:nvSpPr>
+          <p:cNvPr id="148" name=""/>
+          <p:cNvSpPr/>
+          <p:nvPr/>
+        </p:nvSpPr>
+        <p:spPr>
+          <a:xfrm>
+            <a:off x="9077040" y="2209680"/>
+            <a:ext cx="10080" cy="447840"/>
+          </a:xfrm>
+          <a:custGeom>
+            <a:avLst/>
+            <a:gdLst/>
+            <a:ahLst/>
+            <a:rect l="0" t="0" r="r" b="b"/>
+            <a:pathLst>
+              <a:path w="28" h="1244">
+                <a:moveTo>
+                  <a:pt x="0" y="0"/>
+                </a:moveTo>
+                <a:lnTo>
+                  <a:pt x="28" y="0"/>
+                </a:lnTo>
+                <a:lnTo>
+                  <a:pt x="28" y="1244"/>
+                </a:lnTo>
+                <a:lnTo>
+                  <a:pt x="0" y="1244"/>
+                </a:lnTo>
+                <a:lnTo>
+                  <a:pt x="0" y="0"/>
+                </a:lnTo>
+                <a:close/>
+              </a:path>
+            </a:pathLst>
+          </a:custGeom>
+          <a:solidFill>
+            <a:srgbClr val="d1d9e0"/>
+          </a:solidFill>
+          <a:ln w="0">
+            <a:noFill/>
+          </a:ln>
+        </p:spPr>
+        <p:txBody>
+          <a:bodyPr lIns="0" rIns="0" tIns="0" bIns="0" anchor="t">
+            <a:noAutofit/>
+          </a:bodyPr>
+          <a:p>
+            <a:endParaRPr b="0" lang="en-AU" sz="2400" spc="-1" strike="noStrike">
+              <a:solidFill>
+                <a:srgbClr val="000000"/>
+              </a:solidFill>
+              <a:latin typeface="Times New Roman"/>
+            </a:endParaRPr>
+          </a:p>
+        </p:txBody>
+      </p:sp>
+      <p:sp>
+        <p:nvSpPr>
+          <p:cNvPr id="149" name=""/>
+          <p:cNvSpPr/>
+          <p:nvPr/>
+        </p:nvSpPr>
+        <p:spPr>
+          <a:xfrm>
+            <a:off x="666720" y="2647800"/>
+            <a:ext cx="371520" cy="9720"/>
+          </a:xfrm>
+          <a:custGeom>
+            <a:avLst/>
+            <a:gdLst/>
+            <a:ahLst/>
+            <a:rect l="0" t="0" r="r" b="b"/>
+            <a:pathLst>
+              <a:path w="1032" h="27">
+                <a:moveTo>
+                  <a:pt x="0" y="0"/>
+                </a:moveTo>
+                <a:lnTo>
+                  <a:pt x="1032" y="0"/>
+                </a:lnTo>
+                <a:lnTo>
+                  <a:pt x="1032" y="27"/>
+                </a:lnTo>
+                <a:lnTo>
+                  <a:pt x="0" y="27"/>
+                </a:lnTo>
+                <a:lnTo>
+                  <a:pt x="0" y="0"/>
+                </a:lnTo>
+                <a:close/>
+              </a:path>
+            </a:pathLst>
+          </a:custGeom>
+          <a:solidFill>
+            <a:srgbClr val="d1d9e0"/>
+          </a:solidFill>
+          <a:ln w="0">
+            <a:noFill/>
+          </a:ln>
+        </p:spPr>
+        <p:txBody>
+          <a:bodyPr lIns="0" rIns="0" tIns="0" bIns="0" anchor="t">
+            <a:noAutofit/>
+          </a:bodyPr>
+          <a:p>
+            <a:endParaRPr b="0" lang="en-AU" sz="2400" spc="-1" strike="noStrike">
+              <a:solidFill>
+                <a:srgbClr val="000000"/>
+              </a:solidFill>
+              <a:latin typeface="Times New Roman"/>
+            </a:endParaRPr>
+          </a:p>
+        </p:txBody>
+      </p:sp>
+      <p:sp>
+        <p:nvSpPr>
+          <p:cNvPr id="150" name=""/>
+          <p:cNvSpPr/>
+          <p:nvPr/>
+        </p:nvSpPr>
+        <p:spPr>
+          <a:xfrm>
+            <a:off x="1037880" y="2647800"/>
+            <a:ext cx="4591440" cy="9720"/>
+          </a:xfrm>
+          <a:custGeom>
+            <a:avLst/>
+            <a:gdLst/>
+            <a:ahLst/>
+            <a:rect l="0" t="0" r="r" b="b"/>
+            <a:pathLst>
+              <a:path w="12754" h="27">
+                <a:moveTo>
+                  <a:pt x="0" y="0"/>
+                </a:moveTo>
+                <a:lnTo>
+                  <a:pt x="12754" y="0"/>
+                </a:lnTo>
+                <a:lnTo>
+                  <a:pt x="12754" y="27"/>
+                </a:lnTo>
+                <a:lnTo>
+                  <a:pt x="0" y="27"/>
+                </a:lnTo>
+                <a:lnTo>
+                  <a:pt x="0" y="0"/>
+                </a:lnTo>
+                <a:close/>
+              </a:path>
+            </a:pathLst>
+          </a:custGeom>
+          <a:solidFill>
+            <a:srgbClr val="d1d9e0"/>
+          </a:solidFill>
+          <a:ln w="0">
+            <a:noFill/>
+          </a:ln>
+        </p:spPr>
+        <p:txBody>
+          <a:bodyPr lIns="0" rIns="0" tIns="0" bIns="0" anchor="t">
+            <a:noAutofit/>
+          </a:bodyPr>
+          <a:p>
+            <a:endParaRPr b="0" lang="en-AU" sz="2400" spc="-1" strike="noStrike">
+              <a:solidFill>
+                <a:srgbClr val="000000"/>
+              </a:solidFill>
+              <a:latin typeface="Times New Roman"/>
+            </a:endParaRPr>
+          </a:p>
+        </p:txBody>
+      </p:sp>
+      <p:sp>
+        <p:nvSpPr>
+          <p:cNvPr id="151" name=""/>
+          <p:cNvSpPr/>
+          <p:nvPr/>
+        </p:nvSpPr>
+        <p:spPr>
+          <a:xfrm>
+            <a:off x="5628960" y="2647800"/>
+            <a:ext cx="3458160" cy="9720"/>
+          </a:xfrm>
+          <a:custGeom>
+            <a:avLst/>
+            <a:gdLst/>
+            <a:ahLst/>
+            <a:rect l="0" t="0" r="r" b="b"/>
+            <a:pathLst>
+              <a:path w="9606" h="27">
+                <a:moveTo>
+                  <a:pt x="0" y="0"/>
+                </a:moveTo>
+                <a:lnTo>
+                  <a:pt x="9606" y="0"/>
+                </a:lnTo>
+                <a:lnTo>
+                  <a:pt x="9606" y="27"/>
+                </a:lnTo>
+                <a:lnTo>
+                  <a:pt x="0" y="27"/>
+                </a:lnTo>
+                <a:lnTo>
+                  <a:pt x="0" y="0"/>
+                </a:lnTo>
+                <a:close/>
+              </a:path>
+            </a:pathLst>
+          </a:custGeom>
+          <a:solidFill>
+            <a:srgbClr val="d1d9e0"/>
+          </a:solidFill>
+          <a:ln w="0">
+            <a:noFill/>
+          </a:ln>
+        </p:spPr>
+        <p:txBody>
+          <a:bodyPr lIns="0" rIns="0" tIns="0" bIns="0" anchor="t">
+            <a:noAutofit/>
+          </a:bodyPr>
+          <a:p>
+            <a:endParaRPr b="0" lang="en-AU" sz="2400" spc="-1" strike="noStrike">
+              <a:solidFill>
+                <a:srgbClr val="000000"/>
+              </a:solidFill>
+              <a:latin typeface="Times New Roman"/>
+            </a:endParaRPr>
+          </a:p>
+        </p:txBody>
+      </p:sp>
+      <p:sp>
+        <p:nvSpPr>
+          <p:cNvPr id="152" name=""/>
+          <p:cNvSpPr/>
+          <p:nvPr/>
+        </p:nvSpPr>
+        <p:spPr>
+          <a:xfrm>
+            <a:off x="666720" y="2657160"/>
+            <a:ext cx="9720" cy="438480"/>
+          </a:xfrm>
+          <a:custGeom>
+            <a:avLst/>
+            <a:gdLst/>
+            <a:ahLst/>
+            <a:rect l="0" t="0" r="r" b="b"/>
+            <a:pathLst>
+              <a:path w="27" h="1218">
+                <a:moveTo>
+                  <a:pt x="0" y="0"/>
+                </a:moveTo>
+                <a:lnTo>
+                  <a:pt x="27" y="0"/>
+                </a:lnTo>
+                <a:lnTo>
+                  <a:pt x="27" y="1218"/>
+                </a:lnTo>
+                <a:lnTo>
+                  <a:pt x="0" y="1218"/>
+                </a:lnTo>
+                <a:lnTo>
+                  <a:pt x="0" y="0"/>
+                </a:lnTo>
+                <a:close/>
+              </a:path>
+            </a:pathLst>
+          </a:custGeom>
+          <a:solidFill>
+            <a:srgbClr val="d1d9e0"/>
+          </a:solidFill>
+          <a:ln w="0">
+            <a:noFill/>
+          </a:ln>
+        </p:spPr>
+        <p:txBody>
+          <a:bodyPr lIns="0" rIns="0" tIns="0" bIns="0" anchor="t">
+            <a:noAutofit/>
+          </a:bodyPr>
+          <a:p>
+            <a:endParaRPr b="0" lang="en-AU" sz="2400" spc="-1" strike="noStrike">
+              <a:solidFill>
+                <a:srgbClr val="000000"/>
+              </a:solidFill>
+              <a:latin typeface="Times New Roman"/>
+            </a:endParaRPr>
+          </a:p>
+        </p:txBody>
+      </p:sp>
+      <p:sp>
+        <p:nvSpPr>
+          <p:cNvPr id="153" name=""/>
+          <p:cNvSpPr/>
+          <p:nvPr/>
+        </p:nvSpPr>
+        <p:spPr>
+          <a:xfrm>
+            <a:off x="1028520" y="2657160"/>
+            <a:ext cx="9720" cy="438480"/>
+          </a:xfrm>
+          <a:custGeom>
+            <a:avLst/>
+            <a:gdLst/>
+            <a:ahLst/>
+            <a:rect l="0" t="0" r="r" b="b"/>
+            <a:pathLst>
+              <a:path w="27" h="1218">
+                <a:moveTo>
+                  <a:pt x="0" y="0"/>
+                </a:moveTo>
+                <a:lnTo>
+                  <a:pt x="27" y="0"/>
+                </a:lnTo>
+                <a:lnTo>
+                  <a:pt x="27" y="1218"/>
+                </a:lnTo>
+                <a:lnTo>
+                  <a:pt x="0" y="1218"/>
+                </a:lnTo>
+                <a:lnTo>
+                  <a:pt x="0" y="0"/>
+                </a:lnTo>
+                <a:close/>
+              </a:path>
+            </a:pathLst>
+          </a:custGeom>
+          <a:solidFill>
+            <a:srgbClr val="d1d9e0"/>
+          </a:solidFill>
+          <a:ln w="0">
+            <a:noFill/>
+          </a:ln>
+        </p:spPr>
+        <p:txBody>
+          <a:bodyPr lIns="0" rIns="0" tIns="0" bIns="0" anchor="t">
+            <a:noAutofit/>
+          </a:bodyPr>
+          <a:p>
+            <a:endParaRPr b="0" lang="en-AU" sz="2400" spc="-1" strike="noStrike">
+              <a:solidFill>
+                <a:srgbClr val="000000"/>
+              </a:solidFill>
+              <a:latin typeface="Times New Roman"/>
+            </a:endParaRPr>
+          </a:p>
+        </p:txBody>
+      </p:sp>
+      <p:sp>
+        <p:nvSpPr>
+          <p:cNvPr id="154" name=""/>
+          <p:cNvSpPr/>
+          <p:nvPr/>
+        </p:nvSpPr>
+        <p:spPr>
+          <a:xfrm>
+            <a:off x="5619600" y="2657160"/>
+            <a:ext cx="9720" cy="438480"/>
+          </a:xfrm>
+          <a:custGeom>
+            <a:avLst/>
+            <a:gdLst/>
+            <a:ahLst/>
+            <a:rect l="0" t="0" r="r" b="b"/>
+            <a:pathLst>
+              <a:path w="27" h="1218">
+                <a:moveTo>
+                  <a:pt x="0" y="0"/>
+                </a:moveTo>
+                <a:lnTo>
+                  <a:pt x="27" y="0"/>
+                </a:lnTo>
+                <a:lnTo>
+                  <a:pt x="27" y="1218"/>
+                </a:lnTo>
+                <a:lnTo>
+                  <a:pt x="0" y="1218"/>
+                </a:lnTo>
+                <a:lnTo>
+                  <a:pt x="0" y="0"/>
+                </a:lnTo>
+                <a:close/>
+              </a:path>
+            </a:pathLst>
+          </a:custGeom>
+          <a:solidFill>
+            <a:srgbClr val="d1d9e0"/>
+          </a:solidFill>
+          <a:ln w="0">
+            <a:noFill/>
+          </a:ln>
+        </p:spPr>
+        <p:txBody>
+          <a:bodyPr lIns="0" rIns="0" tIns="0" bIns="0" anchor="t">
+            <a:noAutofit/>
+          </a:bodyPr>
+          <a:p>
+            <a:endParaRPr b="0" lang="en-AU" sz="2400" spc="-1" strike="noStrike">
+              <a:solidFill>
+                <a:srgbClr val="000000"/>
+              </a:solidFill>
+              <a:latin typeface="Times New Roman"/>
+            </a:endParaRPr>
+          </a:p>
+        </p:txBody>
+      </p:sp>
+      <p:sp>
+        <p:nvSpPr>
+          <p:cNvPr id="155" name=""/>
+          <p:cNvSpPr/>
+          <p:nvPr/>
+        </p:nvSpPr>
+        <p:spPr>
+          <a:xfrm>
+            <a:off x="9077040" y="2657160"/>
+            <a:ext cx="10080" cy="438480"/>
+          </a:xfrm>
+          <a:custGeom>
+            <a:avLst/>
+            <a:gdLst/>
+            <a:ahLst/>
+            <a:rect l="0" t="0" r="r" b="b"/>
+            <a:pathLst>
+              <a:path w="28" h="1218">
+                <a:moveTo>
+                  <a:pt x="0" y="0"/>
+                </a:moveTo>
+                <a:lnTo>
+                  <a:pt x="28" y="0"/>
+                </a:lnTo>
+                <a:lnTo>
+                  <a:pt x="28" y="1218"/>
+                </a:lnTo>
+                <a:lnTo>
+                  <a:pt x="0" y="1218"/>
+                </a:lnTo>
+                <a:lnTo>
+                  <a:pt x="0" y="0"/>
+                </a:lnTo>
+                <a:close/>
+              </a:path>
+            </a:pathLst>
+          </a:custGeom>
+          <a:solidFill>
+            <a:srgbClr val="d1d9e0"/>
+          </a:solidFill>
+          <a:ln w="0">
+            <a:noFill/>
+          </a:ln>
+        </p:spPr>
+        <p:txBody>
+          <a:bodyPr lIns="0" rIns="0" tIns="0" bIns="0" anchor="t">
+            <a:noAutofit/>
+          </a:bodyPr>
+          <a:p>
+            <a:endParaRPr b="0" lang="en-AU" sz="2400" spc="-1" strike="noStrike">
+              <a:solidFill>
+                <a:srgbClr val="000000"/>
+              </a:solidFill>
+              <a:latin typeface="Times New Roman"/>
+            </a:endParaRPr>
+          </a:p>
+        </p:txBody>
+      </p:sp>
+      <p:sp>
+        <p:nvSpPr>
+          <p:cNvPr id="156" name=""/>
+          <p:cNvSpPr/>
+          <p:nvPr/>
+        </p:nvSpPr>
+        <p:spPr>
+          <a:xfrm>
+            <a:off x="666720" y="3095280"/>
+            <a:ext cx="9720" cy="438840"/>
+          </a:xfrm>
+          <a:custGeom>
+            <a:avLst/>
+            <a:gdLst/>
+            <a:ahLst/>
+            <a:rect l="0" t="0" r="r" b="b"/>
+            <a:pathLst>
+              <a:path w="27" h="1219">
+                <a:moveTo>
+                  <a:pt x="0" y="0"/>
+                </a:moveTo>
+                <a:lnTo>
+                  <a:pt x="27" y="0"/>
+                </a:lnTo>
+                <a:lnTo>
+                  <a:pt x="27" y="1219"/>
+                </a:lnTo>
+                <a:lnTo>
+                  <a:pt x="0" y="1219"/>
+                </a:lnTo>
+                <a:lnTo>
+                  <a:pt x="0" y="0"/>
+                </a:lnTo>
+                <a:close/>
+              </a:path>
+            </a:pathLst>
+          </a:custGeom>
+          <a:solidFill>
+            <a:srgbClr val="d1d9e0"/>
+          </a:solidFill>
+          <a:ln w="0">
+            <a:noFill/>
+          </a:ln>
+        </p:spPr>
+        <p:txBody>
+          <a:bodyPr lIns="0" rIns="0" tIns="0" bIns="0" anchor="t">
+            <a:noAutofit/>
+          </a:bodyPr>
+          <a:p>
+            <a:endParaRPr b="0" lang="en-AU" sz="2400" spc="-1" strike="noStrike">
+              <a:solidFill>
+                <a:srgbClr val="000000"/>
+              </a:solidFill>
+              <a:latin typeface="Times New Roman"/>
+            </a:endParaRPr>
+          </a:p>
+        </p:txBody>
+      </p:sp>
+      <p:sp>
+        <p:nvSpPr>
+          <p:cNvPr id="157" name=""/>
+          <p:cNvSpPr/>
+          <p:nvPr/>
+        </p:nvSpPr>
+        <p:spPr>
+          <a:xfrm>
+            <a:off x="666720" y="3085920"/>
+            <a:ext cx="371520" cy="9720"/>
+          </a:xfrm>
+          <a:custGeom>
+            <a:avLst/>
+            <a:gdLst/>
+            <a:ahLst/>
+            <a:rect l="0" t="0" r="r" b="b"/>
+            <a:pathLst>
+              <a:path w="1032" h="27">
+                <a:moveTo>
+                  <a:pt x="0" y="0"/>
+                </a:moveTo>
+                <a:lnTo>
+                  <a:pt x="1032" y="0"/>
+                </a:lnTo>
+                <a:lnTo>
+                  <a:pt x="1032" y="27"/>
+                </a:lnTo>
+                <a:lnTo>
+                  <a:pt x="0" y="27"/>
+                </a:lnTo>
+                <a:lnTo>
+                  <a:pt x="0" y="0"/>
+                </a:lnTo>
+                <a:close/>
+              </a:path>
+            </a:pathLst>
+          </a:custGeom>
+          <a:solidFill>
+            <a:srgbClr val="d1d9e0"/>
+          </a:solidFill>
+          <a:ln w="0">
+            <a:noFill/>
+          </a:ln>
+        </p:spPr>
+        <p:txBody>
+          <a:bodyPr lIns="0" rIns="0" tIns="0" bIns="0" anchor="t">
+            <a:noAutofit/>
+          </a:bodyPr>
+          <a:p>
+            <a:endParaRPr b="0" lang="en-AU" sz="2400" spc="-1" strike="noStrike">
+              <a:solidFill>
+                <a:srgbClr val="000000"/>
+              </a:solidFill>
+              <a:latin typeface="Times New Roman"/>
+            </a:endParaRPr>
+          </a:p>
+        </p:txBody>
+      </p:sp>
+      <p:sp>
+        <p:nvSpPr>
+          <p:cNvPr id="158" name=""/>
+          <p:cNvSpPr/>
+          <p:nvPr/>
+        </p:nvSpPr>
+        <p:spPr>
+          <a:xfrm>
+            <a:off x="1028520" y="3095280"/>
+            <a:ext cx="9720" cy="438840"/>
+          </a:xfrm>
+          <a:custGeom>
+            <a:avLst/>
+            <a:gdLst/>
+            <a:ahLst/>
+            <a:rect l="0" t="0" r="r" b="b"/>
+            <a:pathLst>
+              <a:path w="27" h="1219">
+                <a:moveTo>
+                  <a:pt x="0" y="0"/>
+                </a:moveTo>
+                <a:lnTo>
+                  <a:pt x="27" y="0"/>
+                </a:lnTo>
+                <a:lnTo>
+                  <a:pt x="27" y="1219"/>
+                </a:lnTo>
+                <a:lnTo>
+                  <a:pt x="0" y="1219"/>
+                </a:lnTo>
+                <a:lnTo>
+                  <a:pt x="0" y="0"/>
+                </a:lnTo>
+                <a:close/>
+              </a:path>
+            </a:pathLst>
+          </a:custGeom>
+          <a:solidFill>
+            <a:srgbClr val="d1d9e0"/>
+          </a:solidFill>
+          <a:ln w="0">
+            <a:noFill/>
+          </a:ln>
+        </p:spPr>
+        <p:txBody>
+          <a:bodyPr lIns="0" rIns="0" tIns="0" bIns="0" anchor="t">
+            <a:noAutofit/>
+          </a:bodyPr>
+          <a:p>
+            <a:endParaRPr b="0" lang="en-AU" sz="2400" spc="-1" strike="noStrike">
+              <a:solidFill>
+                <a:srgbClr val="000000"/>
+              </a:solidFill>
+              <a:latin typeface="Times New Roman"/>
+            </a:endParaRPr>
+          </a:p>
+        </p:txBody>
+      </p:sp>
+      <p:sp>
+        <p:nvSpPr>
+          <p:cNvPr id="159" name=""/>
+          <p:cNvSpPr/>
+          <p:nvPr/>
+        </p:nvSpPr>
+        <p:spPr>
+          <a:xfrm>
+            <a:off x="1037880" y="3085920"/>
+            <a:ext cx="4591440" cy="9720"/>
+          </a:xfrm>
+          <a:custGeom>
+            <a:avLst/>
+            <a:gdLst/>
+            <a:ahLst/>
+            <a:rect l="0" t="0" r="r" b="b"/>
+            <a:pathLst>
+              <a:path w="12754" h="27">
+                <a:moveTo>
+                  <a:pt x="0" y="0"/>
+                </a:moveTo>
+                <a:lnTo>
+                  <a:pt x="12754" y="0"/>
+                </a:lnTo>
+                <a:lnTo>
+                  <a:pt x="12754" y="27"/>
+                </a:lnTo>
+                <a:lnTo>
+                  <a:pt x="0" y="27"/>
+                </a:lnTo>
+                <a:lnTo>
+                  <a:pt x="0" y="0"/>
+                </a:lnTo>
+                <a:close/>
+              </a:path>
+            </a:pathLst>
+          </a:custGeom>
+          <a:solidFill>
+            <a:srgbClr val="d1d9e0"/>
+          </a:solidFill>
+          <a:ln w="0">
+            <a:noFill/>
+          </a:ln>
+        </p:spPr>
+        <p:txBody>
+          <a:bodyPr lIns="0" rIns="0" tIns="0" bIns="0" anchor="t">
+            <a:noAutofit/>
+          </a:bodyPr>
+          <a:p>
+            <a:endParaRPr b="0" lang="en-AU" sz="2400" spc="-1" strike="noStrike">
+              <a:solidFill>
+                <a:srgbClr val="000000"/>
+              </a:solidFill>
+              <a:latin typeface="Times New Roman"/>
+            </a:endParaRPr>
+          </a:p>
+        </p:txBody>
+      </p:sp>
+      <p:sp>
+        <p:nvSpPr>
+          <p:cNvPr id="160" name=""/>
+          <p:cNvSpPr/>
+          <p:nvPr/>
+        </p:nvSpPr>
+        <p:spPr>
+          <a:xfrm>
+            <a:off x="5619600" y="3095280"/>
+            <a:ext cx="9720" cy="438840"/>
+          </a:xfrm>
+          <a:custGeom>
+            <a:avLst/>
+            <a:gdLst/>
+            <a:ahLst/>
+            <a:rect l="0" t="0" r="r" b="b"/>
+            <a:pathLst>
+              <a:path w="27" h="1219">
+                <a:moveTo>
+                  <a:pt x="0" y="0"/>
+                </a:moveTo>
+                <a:lnTo>
+                  <a:pt x="27" y="0"/>
+                </a:lnTo>
+                <a:lnTo>
+                  <a:pt x="27" y="1219"/>
+                </a:lnTo>
+                <a:lnTo>
+                  <a:pt x="0" y="1219"/>
+                </a:lnTo>
+                <a:lnTo>
+                  <a:pt x="0" y="0"/>
+                </a:lnTo>
+                <a:close/>
+              </a:path>
+            </a:pathLst>
+          </a:custGeom>
+          <a:solidFill>
+            <a:srgbClr val="d1d9e0"/>
+          </a:solidFill>
+          <a:ln w="0">
+            <a:noFill/>
+          </a:ln>
+        </p:spPr>
+        <p:txBody>
+          <a:bodyPr lIns="0" rIns="0" tIns="0" bIns="0" anchor="t">
+            <a:noAutofit/>
+          </a:bodyPr>
+          <a:p>
+            <a:endParaRPr b="0" lang="en-AU" sz="2400" spc="-1" strike="noStrike">
+              <a:solidFill>
+                <a:srgbClr val="000000"/>
+              </a:solidFill>
+              <a:latin typeface="Times New Roman"/>
+            </a:endParaRPr>
+          </a:p>
+        </p:txBody>
+      </p:sp>
+      <p:sp>
+        <p:nvSpPr>
+          <p:cNvPr id="161" name=""/>
+          <p:cNvSpPr/>
+          <p:nvPr/>
+        </p:nvSpPr>
+        <p:spPr>
+          <a:xfrm>
+            <a:off x="5628960" y="3085920"/>
+            <a:ext cx="3458160" cy="9720"/>
+          </a:xfrm>
+          <a:custGeom>
+            <a:avLst/>
+            <a:gdLst/>
+            <a:ahLst/>
+            <a:rect l="0" t="0" r="r" b="b"/>
+            <a:pathLst>
+              <a:path w="9606" h="27">
+                <a:moveTo>
+                  <a:pt x="0" y="0"/>
+                </a:moveTo>
+                <a:lnTo>
+                  <a:pt x="9606" y="0"/>
+                </a:lnTo>
+                <a:lnTo>
+                  <a:pt x="9606" y="27"/>
+                </a:lnTo>
+                <a:lnTo>
+                  <a:pt x="0" y="27"/>
+                </a:lnTo>
+                <a:lnTo>
+                  <a:pt x="0" y="0"/>
+                </a:lnTo>
+                <a:close/>
+              </a:path>
+            </a:pathLst>
+          </a:custGeom>
+          <a:solidFill>
+            <a:srgbClr val="d1d9e0"/>
+          </a:solidFill>
+          <a:ln w="0">
+            <a:noFill/>
+          </a:ln>
+        </p:spPr>
+        <p:txBody>
+          <a:bodyPr lIns="0" rIns="0" tIns="0" bIns="0" anchor="t">
+            <a:noAutofit/>
+          </a:bodyPr>
+          <a:p>
+            <a:endParaRPr b="0" lang="en-AU" sz="2400" spc="-1" strike="noStrike">
+              <a:solidFill>
+                <a:srgbClr val="000000"/>
+              </a:solidFill>
+              <a:latin typeface="Times New Roman"/>
+            </a:endParaRPr>
+          </a:p>
+        </p:txBody>
+      </p:sp>
+      <p:sp>
+        <p:nvSpPr>
+          <p:cNvPr id="162" name=""/>
+          <p:cNvSpPr/>
+          <p:nvPr/>
+        </p:nvSpPr>
+        <p:spPr>
+          <a:xfrm>
+            <a:off x="9077040" y="3095280"/>
+            <a:ext cx="10080" cy="438840"/>
+          </a:xfrm>
+          <a:custGeom>
+            <a:avLst/>
+            <a:gdLst/>
+            <a:ahLst/>
+            <a:rect l="0" t="0" r="r" b="b"/>
+            <a:pathLst>
+              <a:path w="28" h="1219">
+                <a:moveTo>
+                  <a:pt x="0" y="0"/>
+                </a:moveTo>
+                <a:lnTo>
+                  <a:pt x="28" y="0"/>
+                </a:lnTo>
+                <a:lnTo>
+                  <a:pt x="28" y="1219"/>
+                </a:lnTo>
+                <a:lnTo>
+                  <a:pt x="0" y="1219"/>
+                </a:lnTo>
+                <a:lnTo>
+                  <a:pt x="0" y="0"/>
+                </a:lnTo>
+                <a:close/>
+              </a:path>
+            </a:pathLst>
+          </a:custGeom>
+          <a:solidFill>
+            <a:srgbClr val="d1d9e0"/>
+          </a:solidFill>
+          <a:ln w="0">
+            <a:noFill/>
+          </a:ln>
+        </p:spPr>
+        <p:txBody>
+          <a:bodyPr lIns="0" rIns="0" tIns="0" bIns="0" anchor="t">
+            <a:noAutofit/>
+          </a:bodyPr>
+          <a:p>
+            <a:endParaRPr b="0" lang="en-AU" sz="2400" spc="-1" strike="noStrike">
+              <a:solidFill>
+                <a:srgbClr val="000000"/>
+              </a:solidFill>
+              <a:latin typeface="Times New Roman"/>
+            </a:endParaRPr>
+          </a:p>
+        </p:txBody>
+      </p:sp>
+      <p:sp>
+        <p:nvSpPr>
+          <p:cNvPr id="163" name=""/>
+          <p:cNvSpPr/>
+          <p:nvPr/>
+        </p:nvSpPr>
+        <p:spPr>
+          <a:xfrm>
+            <a:off x="666720" y="3533760"/>
+            <a:ext cx="9720" cy="438480"/>
+          </a:xfrm>
+          <a:custGeom>
+            <a:avLst/>
+            <a:gdLst/>
+            <a:ahLst/>
+            <a:rect l="0" t="0" r="r" b="b"/>
+            <a:pathLst>
+              <a:path w="27" h="1218">
+                <a:moveTo>
+                  <a:pt x="0" y="0"/>
+                </a:moveTo>
+                <a:lnTo>
+                  <a:pt x="27" y="0"/>
+                </a:lnTo>
+                <a:lnTo>
+                  <a:pt x="27" y="1218"/>
+                </a:lnTo>
+                <a:lnTo>
+                  <a:pt x="0" y="1218"/>
+                </a:lnTo>
+                <a:lnTo>
+                  <a:pt x="0" y="0"/>
+                </a:lnTo>
+                <a:close/>
+              </a:path>
+            </a:pathLst>
+          </a:custGeom>
+          <a:solidFill>
+            <a:srgbClr val="d1d9e0"/>
+          </a:solidFill>
+          <a:ln w="0">
+            <a:noFill/>
+          </a:ln>
+        </p:spPr>
+        <p:txBody>
+          <a:bodyPr lIns="0" rIns="0" tIns="0" bIns="0" anchor="t">
+            <a:noAutofit/>
+          </a:bodyPr>
+          <a:p>
+            <a:endParaRPr b="0" lang="en-AU" sz="2400" spc="-1" strike="noStrike">
+              <a:solidFill>
+                <a:srgbClr val="000000"/>
+              </a:solidFill>
+              <a:latin typeface="Times New Roman"/>
+            </a:endParaRPr>
+          </a:p>
+        </p:txBody>
+      </p:sp>
+      <p:sp>
+        <p:nvSpPr>
+          <p:cNvPr id="164" name=""/>
+          <p:cNvSpPr/>
+          <p:nvPr/>
+        </p:nvSpPr>
+        <p:spPr>
+          <a:xfrm>
+            <a:off x="666720" y="3524040"/>
+            <a:ext cx="371520" cy="10080"/>
+          </a:xfrm>
+          <a:custGeom>
+            <a:avLst/>
+            <a:gdLst/>
+            <a:ahLst/>
+            <a:rect l="0" t="0" r="r" b="b"/>
+            <a:pathLst>
+              <a:path w="1032" h="28">
+                <a:moveTo>
+                  <a:pt x="0" y="0"/>
+                </a:moveTo>
+                <a:lnTo>
+                  <a:pt x="1032" y="0"/>
+                </a:lnTo>
+                <a:lnTo>
+                  <a:pt x="1032" y="28"/>
+                </a:lnTo>
+                <a:lnTo>
+                  <a:pt x="0" y="28"/>
+                </a:lnTo>
+                <a:lnTo>
+                  <a:pt x="0" y="0"/>
+                </a:lnTo>
+                <a:close/>
+              </a:path>
+            </a:pathLst>
+          </a:custGeom>
+          <a:solidFill>
+            <a:srgbClr val="d1d9e0"/>
+          </a:solidFill>
+          <a:ln w="0">
+            <a:noFill/>
+          </a:ln>
+        </p:spPr>
+        <p:txBody>
+          <a:bodyPr lIns="0" rIns="0" tIns="0" bIns="0" anchor="t">
+            <a:noAutofit/>
+          </a:bodyPr>
+          <a:p>
+            <a:endParaRPr b="0" lang="en-AU" sz="2400" spc="-1" strike="noStrike">
+              <a:solidFill>
+                <a:srgbClr val="000000"/>
+              </a:solidFill>
+              <a:latin typeface="Times New Roman"/>
+            </a:endParaRPr>
+          </a:p>
+        </p:txBody>
+      </p:sp>
+      <p:sp>
+        <p:nvSpPr>
+          <p:cNvPr id="165" name=""/>
+          <p:cNvSpPr/>
+          <p:nvPr/>
+        </p:nvSpPr>
+        <p:spPr>
+          <a:xfrm>
+            <a:off x="1028520" y="3533760"/>
+            <a:ext cx="9720" cy="438480"/>
+          </a:xfrm>
+          <a:custGeom>
+            <a:avLst/>
+            <a:gdLst/>
+            <a:ahLst/>
+            <a:rect l="0" t="0" r="r" b="b"/>
+            <a:pathLst>
+              <a:path w="27" h="1218">
+                <a:moveTo>
+                  <a:pt x="0" y="0"/>
+                </a:moveTo>
+                <a:lnTo>
+                  <a:pt x="27" y="0"/>
+                </a:lnTo>
+                <a:lnTo>
+                  <a:pt x="27" y="1218"/>
+                </a:lnTo>
+                <a:lnTo>
+                  <a:pt x="0" y="1218"/>
+                </a:lnTo>
+                <a:lnTo>
+                  <a:pt x="0" y="0"/>
+                </a:lnTo>
+                <a:close/>
+              </a:path>
+            </a:pathLst>
+          </a:custGeom>
+          <a:solidFill>
+            <a:srgbClr val="d1d9e0"/>
+          </a:solidFill>
+          <a:ln w="0">
+            <a:noFill/>
+          </a:ln>
+        </p:spPr>
+        <p:txBody>
+          <a:bodyPr lIns="0" rIns="0" tIns="0" bIns="0" anchor="t">
+            <a:noAutofit/>
+          </a:bodyPr>
+          <a:p>
+            <a:endParaRPr b="0" lang="en-AU" sz="2400" spc="-1" strike="noStrike">
+              <a:solidFill>
+                <a:srgbClr val="000000"/>
+              </a:solidFill>
+              <a:latin typeface="Times New Roman"/>
+            </a:endParaRPr>
+          </a:p>
+        </p:txBody>
+      </p:sp>
+      <p:sp>
+        <p:nvSpPr>
+          <p:cNvPr id="166" name=""/>
+          <p:cNvSpPr/>
+          <p:nvPr/>
+        </p:nvSpPr>
+        <p:spPr>
+          <a:xfrm>
+            <a:off x="1037880" y="3524040"/>
+            <a:ext cx="4591440" cy="10080"/>
+          </a:xfrm>
+          <a:custGeom>
+            <a:avLst/>
+            <a:gdLst/>
+            <a:ahLst/>
+            <a:rect l="0" t="0" r="r" b="b"/>
+            <a:pathLst>
+              <a:path w="12754" h="28">
+                <a:moveTo>
+                  <a:pt x="0" y="0"/>
+                </a:moveTo>
+                <a:lnTo>
+                  <a:pt x="12754" y="0"/>
+                </a:lnTo>
+                <a:lnTo>
+                  <a:pt x="12754" y="28"/>
+                </a:lnTo>
+                <a:lnTo>
+                  <a:pt x="0" y="28"/>
+                </a:lnTo>
+                <a:lnTo>
+                  <a:pt x="0" y="0"/>
+                </a:lnTo>
+                <a:close/>
+              </a:path>
+            </a:pathLst>
+          </a:custGeom>
+          <a:solidFill>
+            <a:srgbClr val="d1d9e0"/>
+          </a:solidFill>
+          <a:ln w="0">
+            <a:noFill/>
+          </a:ln>
+        </p:spPr>
+        <p:txBody>
+          <a:bodyPr lIns="0" rIns="0" tIns="0" bIns="0" anchor="t">
+            <a:noAutofit/>
+          </a:bodyPr>
+          <a:p>
+            <a:endParaRPr b="0" lang="en-AU" sz="2400" spc="-1" strike="noStrike">
+              <a:solidFill>
+                <a:srgbClr val="000000"/>
+              </a:solidFill>
+              <a:latin typeface="Times New Roman"/>
+            </a:endParaRPr>
+          </a:p>
+        </p:txBody>
+      </p:sp>
+      <p:sp>
+        <p:nvSpPr>
+          <p:cNvPr id="167" name=""/>
+          <p:cNvSpPr/>
+          <p:nvPr/>
+        </p:nvSpPr>
+        <p:spPr>
+          <a:xfrm>
+            <a:off x="5619600" y="3533760"/>
+            <a:ext cx="9720" cy="438480"/>
+          </a:xfrm>
+          <a:custGeom>
+            <a:avLst/>
+            <a:gdLst/>
+            <a:ahLst/>
+            <a:rect l="0" t="0" r="r" b="b"/>
+            <a:pathLst>
+              <a:path w="27" h="1218">
+                <a:moveTo>
+                  <a:pt x="0" y="0"/>
+                </a:moveTo>
+                <a:lnTo>
+                  <a:pt x="27" y="0"/>
+                </a:lnTo>
+                <a:lnTo>
+                  <a:pt x="27" y="1218"/>
+                </a:lnTo>
+                <a:lnTo>
+                  <a:pt x="0" y="1218"/>
+                </a:lnTo>
+                <a:lnTo>
+                  <a:pt x="0" y="0"/>
+                </a:lnTo>
+                <a:close/>
+              </a:path>
+            </a:pathLst>
+          </a:custGeom>
+          <a:solidFill>
+            <a:srgbClr val="d1d9e0"/>
+          </a:solidFill>
+          <a:ln w="0">
+            <a:noFill/>
+          </a:ln>
+        </p:spPr>
+        <p:txBody>
+          <a:bodyPr lIns="0" rIns="0" tIns="0" bIns="0" anchor="t">
+            <a:noAutofit/>
+          </a:bodyPr>
+          <a:p>
+            <a:endParaRPr b="0" lang="en-AU" sz="2400" spc="-1" strike="noStrike">
+              <a:solidFill>
+                <a:srgbClr val="000000"/>
+              </a:solidFill>
+              <a:latin typeface="Times New Roman"/>
+            </a:endParaRPr>
+          </a:p>
+        </p:txBody>
+      </p:sp>
+      <p:sp>
+        <p:nvSpPr>
+          <p:cNvPr id="168" name=""/>
+          <p:cNvSpPr/>
+          <p:nvPr/>
+        </p:nvSpPr>
+        <p:spPr>
+          <a:xfrm>
+            <a:off x="5628960" y="3524040"/>
+            <a:ext cx="3458160" cy="10080"/>
+          </a:xfrm>
+          <a:custGeom>
+            <a:avLst/>
+            <a:gdLst/>
+            <a:ahLst/>
+            <a:rect l="0" t="0" r="r" b="b"/>
+            <a:pathLst>
+              <a:path w="9606" h="28">
+                <a:moveTo>
+                  <a:pt x="0" y="0"/>
+                </a:moveTo>
+                <a:lnTo>
+                  <a:pt x="9606" y="0"/>
+                </a:lnTo>
+                <a:lnTo>
+                  <a:pt x="9606" y="28"/>
+                </a:lnTo>
+                <a:lnTo>
+                  <a:pt x="0" y="28"/>
+                </a:lnTo>
+                <a:lnTo>
+                  <a:pt x="0" y="0"/>
+                </a:lnTo>
+                <a:close/>
+              </a:path>
+            </a:pathLst>
+          </a:custGeom>
+          <a:solidFill>
+            <a:srgbClr val="d1d9e0"/>
+          </a:solidFill>
+          <a:ln w="0">
+            <a:noFill/>
+          </a:ln>
+        </p:spPr>
+        <p:txBody>
+          <a:bodyPr lIns="0" rIns="0" tIns="0" bIns="0" anchor="t">
+            <a:noAutofit/>
+          </a:bodyPr>
+          <a:p>
+            <a:endParaRPr b="0" lang="en-AU" sz="2400" spc="-1" strike="noStrike">
+              <a:solidFill>
+                <a:srgbClr val="000000"/>
+              </a:solidFill>
+              <a:latin typeface="Times New Roman"/>
+            </a:endParaRPr>
+          </a:p>
+        </p:txBody>
+      </p:sp>
+      <p:sp>
+        <p:nvSpPr>
+          <p:cNvPr id="169" name=""/>
+          <p:cNvSpPr/>
+          <p:nvPr/>
+        </p:nvSpPr>
+        <p:spPr>
+          <a:xfrm>
+            <a:off x="9077040" y="3533760"/>
+            <a:ext cx="10080" cy="438480"/>
+          </a:xfrm>
+          <a:custGeom>
+            <a:avLst/>
+            <a:gdLst/>
+            <a:ahLst/>
+            <a:rect l="0" t="0" r="r" b="b"/>
+            <a:pathLst>
+              <a:path w="28" h="1218">
+                <a:moveTo>
+                  <a:pt x="0" y="0"/>
+                </a:moveTo>
+                <a:lnTo>
+                  <a:pt x="28" y="0"/>
+                </a:lnTo>
+                <a:lnTo>
+                  <a:pt x="28" y="1218"/>
+                </a:lnTo>
+                <a:lnTo>
+                  <a:pt x="0" y="1218"/>
+                </a:lnTo>
+                <a:lnTo>
+                  <a:pt x="0" y="0"/>
+                </a:lnTo>
+                <a:close/>
+              </a:path>
+            </a:pathLst>
+          </a:custGeom>
+          <a:solidFill>
+            <a:srgbClr val="d1d9e0"/>
+          </a:solidFill>
+          <a:ln w="0">
+            <a:noFill/>
+          </a:ln>
+        </p:spPr>
+        <p:txBody>
+          <a:bodyPr lIns="0" rIns="0" tIns="0" bIns="0" anchor="t">
+            <a:noAutofit/>
+          </a:bodyPr>
+          <a:p>
+            <a:endParaRPr b="0" lang="en-AU" sz="2400" spc="-1" strike="noStrike">
+              <a:solidFill>
+                <a:srgbClr val="000000"/>
+              </a:solidFill>
+              <a:latin typeface="Times New Roman"/>
+            </a:endParaRPr>
+          </a:p>
+        </p:txBody>
+      </p:sp>
+      <p:sp>
+        <p:nvSpPr>
+          <p:cNvPr id="170" name=""/>
+          <p:cNvSpPr/>
+          <p:nvPr/>
+        </p:nvSpPr>
+        <p:spPr>
+          <a:xfrm>
+            <a:off x="666720" y="3971880"/>
+            <a:ext cx="9720" cy="438480"/>
+          </a:xfrm>
+          <a:custGeom>
+            <a:avLst/>
+            <a:gdLst/>
+            <a:ahLst/>
+            <a:rect l="0" t="0" r="r" b="b"/>
+            <a:pathLst>
+              <a:path w="27" h="1218">
+                <a:moveTo>
+                  <a:pt x="0" y="0"/>
+                </a:moveTo>
+                <a:lnTo>
+                  <a:pt x="27" y="0"/>
+                </a:lnTo>
+                <a:lnTo>
+                  <a:pt x="27" y="1218"/>
+                </a:lnTo>
+                <a:lnTo>
+                  <a:pt x="0" y="1218"/>
+                </a:lnTo>
+                <a:lnTo>
+                  <a:pt x="0" y="0"/>
+                </a:lnTo>
+                <a:close/>
+              </a:path>
+            </a:pathLst>
+          </a:custGeom>
+          <a:solidFill>
+            <a:srgbClr val="d1d9e0"/>
+          </a:solidFill>
+          <a:ln w="0">
+            <a:noFill/>
+          </a:ln>
+        </p:spPr>
+        <p:txBody>
+          <a:bodyPr lIns="0" rIns="0" tIns="0" bIns="0" anchor="t">
+            <a:noAutofit/>
+          </a:bodyPr>
+          <a:p>
+            <a:endParaRPr b="0" lang="en-AU" sz="2400" spc="-1" strike="noStrike">
+              <a:solidFill>
+                <a:srgbClr val="000000"/>
+              </a:solidFill>
+              <a:latin typeface="Times New Roman"/>
+            </a:endParaRPr>
+          </a:p>
+        </p:txBody>
+      </p:sp>
+      <p:sp>
+        <p:nvSpPr>
+          <p:cNvPr id="171" name=""/>
+          <p:cNvSpPr/>
+          <p:nvPr/>
+        </p:nvSpPr>
+        <p:spPr>
+          <a:xfrm>
+            <a:off x="666720" y="3962160"/>
+            <a:ext cx="371520" cy="10080"/>
+          </a:xfrm>
+          <a:custGeom>
+            <a:avLst/>
+            <a:gdLst/>
+            <a:ahLst/>
+            <a:rect l="0" t="0" r="r" b="b"/>
+            <a:pathLst>
+              <a:path w="1032" h="28">
+                <a:moveTo>
+                  <a:pt x="0" y="0"/>
+                </a:moveTo>
+                <a:lnTo>
+                  <a:pt x="1032" y="0"/>
+                </a:lnTo>
+                <a:lnTo>
+                  <a:pt x="1032" y="28"/>
+                </a:lnTo>
+                <a:lnTo>
+                  <a:pt x="0" y="28"/>
+                </a:lnTo>
+                <a:lnTo>
+                  <a:pt x="0" y="0"/>
+                </a:lnTo>
+                <a:close/>
+              </a:path>
+            </a:pathLst>
+          </a:custGeom>
+          <a:solidFill>
+            <a:srgbClr val="d1d9e0"/>
+          </a:solidFill>
+          <a:ln w="0">
+            <a:noFill/>
+          </a:ln>
+        </p:spPr>
+        <p:txBody>
+          <a:bodyPr lIns="0" rIns="0" tIns="0" bIns="0" anchor="t">
+            <a:noAutofit/>
+          </a:bodyPr>
+          <a:p>
+            <a:endParaRPr b="0" lang="en-AU" sz="2400" spc="-1" strike="noStrike">
+              <a:solidFill>
+                <a:srgbClr val="000000"/>
+              </a:solidFill>
+              <a:latin typeface="Times New Roman"/>
+            </a:endParaRPr>
+          </a:p>
+        </p:txBody>
+      </p:sp>
+      <p:sp>
+        <p:nvSpPr>
+          <p:cNvPr id="172" name=""/>
+          <p:cNvSpPr/>
+          <p:nvPr/>
+        </p:nvSpPr>
+        <p:spPr>
+          <a:xfrm>
+            <a:off x="1028520" y="3971880"/>
+            <a:ext cx="9720" cy="438480"/>
+          </a:xfrm>
+          <a:custGeom>
+            <a:avLst/>
+            <a:gdLst/>
+            <a:ahLst/>
+            <a:rect l="0" t="0" r="r" b="b"/>
+            <a:pathLst>
+              <a:path w="27" h="1218">
+                <a:moveTo>
+                  <a:pt x="0" y="0"/>
+                </a:moveTo>
+                <a:lnTo>
+                  <a:pt x="27" y="0"/>
+                </a:lnTo>
+                <a:lnTo>
+                  <a:pt x="27" y="1218"/>
+                </a:lnTo>
+                <a:lnTo>
+                  <a:pt x="0" y="1218"/>
+                </a:lnTo>
+                <a:lnTo>
+                  <a:pt x="0" y="0"/>
+                </a:lnTo>
+                <a:close/>
+              </a:path>
+            </a:pathLst>
+          </a:custGeom>
+          <a:solidFill>
+            <a:srgbClr val="d1d9e0"/>
+          </a:solidFill>
+          <a:ln w="0">
+            <a:noFill/>
+          </a:ln>
+        </p:spPr>
+        <p:txBody>
+          <a:bodyPr lIns="0" rIns="0" tIns="0" bIns="0" anchor="t">
+            <a:noAutofit/>
+          </a:bodyPr>
+          <a:p>
+            <a:endParaRPr b="0" lang="en-AU" sz="2400" spc="-1" strike="noStrike">
+              <a:solidFill>
+                <a:srgbClr val="000000"/>
+              </a:solidFill>
+              <a:latin typeface="Times New Roman"/>
+            </a:endParaRPr>
+          </a:p>
+        </p:txBody>
+      </p:sp>
+      <p:sp>
+        <p:nvSpPr>
+          <p:cNvPr id="173" name=""/>
+          <p:cNvSpPr/>
+          <p:nvPr/>
+        </p:nvSpPr>
+        <p:spPr>
+          <a:xfrm>
+            <a:off x="1037880" y="3962160"/>
+            <a:ext cx="4591440" cy="10080"/>
+          </a:xfrm>
+          <a:custGeom>
+            <a:avLst/>
+            <a:gdLst/>
+            <a:ahLst/>
+            <a:rect l="0" t="0" r="r" b="b"/>
+            <a:pathLst>
+              <a:path w="12754" h="28">
+                <a:moveTo>
+                  <a:pt x="0" y="0"/>
+                </a:moveTo>
+                <a:lnTo>
+                  <a:pt x="12754" y="0"/>
+                </a:lnTo>
+                <a:lnTo>
+                  <a:pt x="12754" y="28"/>
+                </a:lnTo>
+                <a:lnTo>
+                  <a:pt x="0" y="28"/>
+                </a:lnTo>
+                <a:lnTo>
+                  <a:pt x="0" y="0"/>
+                </a:lnTo>
+                <a:close/>
+              </a:path>
+            </a:pathLst>
+          </a:custGeom>
+          <a:solidFill>
+            <a:srgbClr val="d1d9e0"/>
+          </a:solidFill>
+          <a:ln w="0">
+            <a:noFill/>
+          </a:ln>
+        </p:spPr>
+        <p:txBody>
+          <a:bodyPr lIns="0" rIns="0" tIns="0" bIns="0" anchor="t">
+            <a:noAutofit/>
+          </a:bodyPr>
+          <a:p>
+            <a:endParaRPr b="0" lang="en-AU" sz="2400" spc="-1" strike="noStrike">
+              <a:solidFill>
+                <a:srgbClr val="000000"/>
+              </a:solidFill>
+              <a:latin typeface="Times New Roman"/>
+            </a:endParaRPr>
+          </a:p>
+        </p:txBody>
+      </p:sp>
+      <p:sp>
+        <p:nvSpPr>
+          <p:cNvPr id="174" name=""/>
+          <p:cNvSpPr/>
+          <p:nvPr/>
+        </p:nvSpPr>
+        <p:spPr>
+          <a:xfrm>
+            <a:off x="5619600" y="3971880"/>
+            <a:ext cx="9720" cy="438480"/>
+          </a:xfrm>
+          <a:custGeom>
+            <a:avLst/>
+            <a:gdLst/>
+            <a:ahLst/>
+            <a:rect l="0" t="0" r="r" b="b"/>
+            <a:pathLst>
+              <a:path w="27" h="1218">
+                <a:moveTo>
+                  <a:pt x="0" y="0"/>
+                </a:moveTo>
+                <a:lnTo>
+                  <a:pt x="27" y="0"/>
+                </a:lnTo>
+                <a:lnTo>
+                  <a:pt x="27" y="1218"/>
+                </a:lnTo>
+                <a:lnTo>
+                  <a:pt x="0" y="1218"/>
+                </a:lnTo>
+                <a:lnTo>
+                  <a:pt x="0" y="0"/>
+                </a:lnTo>
+                <a:close/>
+              </a:path>
+            </a:pathLst>
+          </a:custGeom>
+          <a:solidFill>
+            <a:srgbClr val="d1d9e0"/>
+          </a:solidFill>
+          <a:ln w="0">
+            <a:noFill/>
+          </a:ln>
+        </p:spPr>
+        <p:txBody>
+          <a:bodyPr lIns="0" rIns="0" tIns="0" bIns="0" anchor="t">
+            <a:noAutofit/>
+          </a:bodyPr>
+          <a:p>
+            <a:endParaRPr b="0" lang="en-AU" sz="2400" spc="-1" strike="noStrike">
+              <a:solidFill>
+                <a:srgbClr val="000000"/>
+              </a:solidFill>
+              <a:latin typeface="Times New Roman"/>
+            </a:endParaRPr>
+          </a:p>
+        </p:txBody>
+      </p:sp>
+      <p:sp>
+        <p:nvSpPr>
+          <p:cNvPr id="175" name=""/>
+          <p:cNvSpPr/>
+          <p:nvPr/>
+        </p:nvSpPr>
+        <p:spPr>
+          <a:xfrm>
+            <a:off x="5628960" y="3962160"/>
+            <a:ext cx="3458160" cy="10080"/>
+          </a:xfrm>
+          <a:custGeom>
+            <a:avLst/>
+            <a:gdLst/>
+            <a:ahLst/>
+            <a:rect l="0" t="0" r="r" b="b"/>
+            <a:pathLst>
+              <a:path w="9606" h="28">
+                <a:moveTo>
+                  <a:pt x="0" y="0"/>
+                </a:moveTo>
+                <a:lnTo>
+                  <a:pt x="9606" y="0"/>
+                </a:lnTo>
+                <a:lnTo>
+                  <a:pt x="9606" y="28"/>
+                </a:lnTo>
+                <a:lnTo>
+                  <a:pt x="0" y="28"/>
+                </a:lnTo>
+                <a:lnTo>
+                  <a:pt x="0" y="0"/>
+                </a:lnTo>
+                <a:close/>
+              </a:path>
+            </a:pathLst>
+          </a:custGeom>
+          <a:solidFill>
+            <a:srgbClr val="d1d9e0"/>
+          </a:solidFill>
+          <a:ln w="0">
+            <a:noFill/>
+          </a:ln>
+        </p:spPr>
+        <p:txBody>
+          <a:bodyPr lIns="0" rIns="0" tIns="0" bIns="0" anchor="t">
+            <a:noAutofit/>
+          </a:bodyPr>
+          <a:p>
+            <a:endParaRPr b="0" lang="en-AU" sz="2400" spc="-1" strike="noStrike">
+              <a:solidFill>
+                <a:srgbClr val="000000"/>
+              </a:solidFill>
+              <a:latin typeface="Times New Roman"/>
+            </a:endParaRPr>
+          </a:p>
+        </p:txBody>
+      </p:sp>
+      <p:sp>
+        <p:nvSpPr>
+          <p:cNvPr id="176" name=""/>
+          <p:cNvSpPr/>
+          <p:nvPr/>
+        </p:nvSpPr>
+        <p:spPr>
+          <a:xfrm>
+            <a:off x="9077040" y="3971880"/>
+            <a:ext cx="10080" cy="438480"/>
+          </a:xfrm>
+          <a:custGeom>
+            <a:avLst/>
+            <a:gdLst/>
+            <a:ahLst/>
+            <a:rect l="0" t="0" r="r" b="b"/>
+            <a:pathLst>
+              <a:path w="28" h="1218">
+                <a:moveTo>
+                  <a:pt x="0" y="0"/>
+                </a:moveTo>
+                <a:lnTo>
+                  <a:pt x="28" y="0"/>
+                </a:lnTo>
+                <a:lnTo>
+                  <a:pt x="28" y="1218"/>
+                </a:lnTo>
+                <a:lnTo>
+                  <a:pt x="0" y="1218"/>
+                </a:lnTo>
+                <a:lnTo>
+                  <a:pt x="0" y="0"/>
+                </a:lnTo>
+                <a:close/>
+              </a:path>
+            </a:pathLst>
+          </a:custGeom>
+          <a:solidFill>
+            <a:srgbClr val="d1d9e0"/>
+          </a:solidFill>
+          <a:ln w="0">
+            <a:noFill/>
+          </a:ln>
+        </p:spPr>
+        <p:txBody>
+          <a:bodyPr lIns="0" rIns="0" tIns="0" bIns="0" anchor="t">
+            <a:noAutofit/>
+          </a:bodyPr>
+          <a:p>
+            <a:endParaRPr b="0" lang="en-AU" sz="2400" spc="-1" strike="noStrike">
+              <a:solidFill>
+                <a:srgbClr val="000000"/>
+              </a:solidFill>
+              <a:latin typeface="Times New Roman"/>
+            </a:endParaRPr>
+          </a:p>
+        </p:txBody>
+      </p:sp>
+      <p:sp>
+        <p:nvSpPr>
+          <p:cNvPr id="177" name=""/>
+          <p:cNvSpPr/>
+          <p:nvPr/>
+        </p:nvSpPr>
+        <p:spPr>
+          <a:xfrm>
+            <a:off x="666720" y="4410000"/>
+            <a:ext cx="9720" cy="438480"/>
+          </a:xfrm>
+          <a:custGeom>
+            <a:avLst/>
+            <a:gdLst/>
+            <a:ahLst/>
+            <a:rect l="0" t="0" r="r" b="b"/>
+            <a:pathLst>
+              <a:path w="27" h="1218">
+                <a:moveTo>
+                  <a:pt x="0" y="0"/>
+                </a:moveTo>
+                <a:lnTo>
+                  <a:pt x="27" y="0"/>
+                </a:lnTo>
+                <a:lnTo>
+                  <a:pt x="27" y="1218"/>
+                </a:lnTo>
+                <a:lnTo>
+                  <a:pt x="0" y="1218"/>
+                </a:lnTo>
+                <a:lnTo>
+                  <a:pt x="0" y="0"/>
+                </a:lnTo>
+                <a:close/>
+              </a:path>
+            </a:pathLst>
+          </a:custGeom>
+          <a:solidFill>
+            <a:srgbClr val="d1d9e0"/>
+          </a:solidFill>
+          <a:ln w="0">
+            <a:noFill/>
+          </a:ln>
+        </p:spPr>
+        <p:txBody>
+          <a:bodyPr lIns="0" rIns="0" tIns="0" bIns="0" anchor="t">
+            <a:noAutofit/>
+          </a:bodyPr>
+          <a:p>
+            <a:endParaRPr b="0" lang="en-AU" sz="2400" spc="-1" strike="noStrike">
+              <a:solidFill>
+                <a:srgbClr val="000000"/>
+              </a:solidFill>
+              <a:latin typeface="Times New Roman"/>
+            </a:endParaRPr>
+          </a:p>
+        </p:txBody>
+      </p:sp>
+      <p:sp>
+        <p:nvSpPr>
+          <p:cNvPr id="178" name=""/>
+          <p:cNvSpPr/>
+          <p:nvPr/>
+        </p:nvSpPr>
+        <p:spPr>
+          <a:xfrm>
+            <a:off x="666720" y="4400280"/>
+            <a:ext cx="371520" cy="10080"/>
+          </a:xfrm>
+          <a:custGeom>
+            <a:avLst/>
+            <a:gdLst/>
+            <a:ahLst/>
+            <a:rect l="0" t="0" r="r" b="b"/>
+            <a:pathLst>
+              <a:path w="1032" h="28">
+                <a:moveTo>
+                  <a:pt x="0" y="0"/>
+                </a:moveTo>
+                <a:lnTo>
+                  <a:pt x="1032" y="0"/>
+                </a:lnTo>
+                <a:lnTo>
+                  <a:pt x="1032" y="28"/>
+                </a:lnTo>
+                <a:lnTo>
+                  <a:pt x="0" y="28"/>
+                </a:lnTo>
+                <a:lnTo>
+                  <a:pt x="0" y="0"/>
+                </a:lnTo>
+                <a:close/>
+              </a:path>
+            </a:pathLst>
+          </a:custGeom>
+          <a:solidFill>
+            <a:srgbClr val="d1d9e0"/>
+          </a:solidFill>
+          <a:ln w="0">
+            <a:noFill/>
+          </a:ln>
+        </p:spPr>
+        <p:txBody>
+          <a:bodyPr lIns="0" rIns="0" tIns="0" bIns="0" anchor="t">
+            <a:noAutofit/>
+          </a:bodyPr>
+          <a:p>
+            <a:endParaRPr b="0" lang="en-AU" sz="2400" spc="-1" strike="noStrike">
+              <a:solidFill>
+                <a:srgbClr val="000000"/>
+              </a:solidFill>
+              <a:latin typeface="Times New Roman"/>
+            </a:endParaRPr>
+          </a:p>
+        </p:txBody>
+      </p:sp>
+      <p:sp>
+        <p:nvSpPr>
+          <p:cNvPr id="179" name=""/>
+          <p:cNvSpPr/>
+          <p:nvPr/>
+        </p:nvSpPr>
+        <p:spPr>
+          <a:xfrm>
+            <a:off x="1028520" y="4410000"/>
+            <a:ext cx="9720" cy="438480"/>
+          </a:xfrm>
+          <a:custGeom>
+            <a:avLst/>
+            <a:gdLst/>
+            <a:ahLst/>
+            <a:rect l="0" t="0" r="r" b="b"/>
+            <a:pathLst>
+              <a:path w="27" h="1218">
+                <a:moveTo>
+                  <a:pt x="0" y="0"/>
+                </a:moveTo>
+                <a:lnTo>
+                  <a:pt x="27" y="0"/>
+                </a:lnTo>
+                <a:lnTo>
+                  <a:pt x="27" y="1218"/>
+                </a:lnTo>
+                <a:lnTo>
+                  <a:pt x="0" y="1218"/>
+                </a:lnTo>
+                <a:lnTo>
+                  <a:pt x="0" y="0"/>
+                </a:lnTo>
+                <a:close/>
+              </a:path>
+            </a:pathLst>
+          </a:custGeom>
+          <a:solidFill>
+            <a:srgbClr val="d1d9e0"/>
+          </a:solidFill>
+          <a:ln w="0">
+            <a:noFill/>
+          </a:ln>
+        </p:spPr>
+        <p:txBody>
+          <a:bodyPr lIns="0" rIns="0" tIns="0" bIns="0" anchor="t">
+            <a:noAutofit/>
+          </a:bodyPr>
+          <a:p>
+            <a:endParaRPr b="0" lang="en-AU" sz="2400" spc="-1" strike="noStrike">
+              <a:solidFill>
+                <a:srgbClr val="000000"/>
+              </a:solidFill>
+              <a:latin typeface="Times New Roman"/>
+            </a:endParaRPr>
+          </a:p>
+        </p:txBody>
+      </p:sp>
+      <p:sp>
+        <p:nvSpPr>
+          <p:cNvPr id="180" name=""/>
+          <p:cNvSpPr/>
+          <p:nvPr/>
+        </p:nvSpPr>
+        <p:spPr>
+          <a:xfrm>
+            <a:off x="1037880" y="4400280"/>
+            <a:ext cx="4591440" cy="10080"/>
+          </a:xfrm>
+          <a:custGeom>
+            <a:avLst/>
+            <a:gdLst/>
+            <a:ahLst/>
+            <a:rect l="0" t="0" r="r" b="b"/>
+            <a:pathLst>
+              <a:path w="12754" h="28">
+                <a:moveTo>
+                  <a:pt x="0" y="0"/>
+                </a:moveTo>
+                <a:lnTo>
+                  <a:pt x="12754" y="0"/>
+                </a:lnTo>
+                <a:lnTo>
+                  <a:pt x="12754" y="28"/>
+                </a:lnTo>
+                <a:lnTo>
+                  <a:pt x="0" y="28"/>
+                </a:lnTo>
+                <a:lnTo>
+                  <a:pt x="0" y="0"/>
+                </a:lnTo>
+                <a:close/>
+              </a:path>
+            </a:pathLst>
+          </a:custGeom>
+          <a:solidFill>
+            <a:srgbClr val="d1d9e0"/>
+          </a:solidFill>
+          <a:ln w="0">
+            <a:noFill/>
+          </a:ln>
+        </p:spPr>
+        <p:txBody>
+          <a:bodyPr lIns="0" rIns="0" tIns="0" bIns="0" anchor="t">
+            <a:noAutofit/>
+          </a:bodyPr>
+          <a:p>
+            <a:endParaRPr b="0" lang="en-AU" sz="2400" spc="-1" strike="noStrike">
+              <a:solidFill>
+                <a:srgbClr val="000000"/>
+              </a:solidFill>
+              <a:latin typeface="Times New Roman"/>
+            </a:endParaRPr>
+          </a:p>
+        </p:txBody>
+      </p:sp>
+      <p:sp>
+        <p:nvSpPr>
+          <p:cNvPr id="181" name=""/>
+          <p:cNvSpPr/>
+          <p:nvPr/>
+        </p:nvSpPr>
+        <p:spPr>
+          <a:xfrm>
+            <a:off x="5619600" y="4410000"/>
+            <a:ext cx="9720" cy="438480"/>
+          </a:xfrm>
+          <a:custGeom>
+            <a:avLst/>
+            <a:gdLst/>
+            <a:ahLst/>
+            <a:rect l="0" t="0" r="r" b="b"/>
+            <a:pathLst>
+              <a:path w="27" h="1218">
+                <a:moveTo>
+                  <a:pt x="0" y="0"/>
+                </a:moveTo>
+                <a:lnTo>
+                  <a:pt x="27" y="0"/>
+                </a:lnTo>
+                <a:lnTo>
+                  <a:pt x="27" y="1218"/>
+                </a:lnTo>
+                <a:lnTo>
+                  <a:pt x="0" y="1218"/>
+                </a:lnTo>
+                <a:lnTo>
+                  <a:pt x="0" y="0"/>
+                </a:lnTo>
+                <a:close/>
+              </a:path>
+            </a:pathLst>
+          </a:custGeom>
+          <a:solidFill>
+            <a:srgbClr val="d1d9e0"/>
+          </a:solidFill>
+          <a:ln w="0">
+            <a:noFill/>
+          </a:ln>
+        </p:spPr>
+        <p:txBody>
+          <a:bodyPr lIns="0" rIns="0" tIns="0" bIns="0" anchor="t">
+            <a:noAutofit/>
+          </a:bodyPr>
+          <a:p>
+            <a:endParaRPr b="0" lang="en-AU" sz="2400" spc="-1" strike="noStrike">
+              <a:solidFill>
+                <a:srgbClr val="000000"/>
+              </a:solidFill>
+              <a:latin typeface="Times New Roman"/>
+            </a:endParaRPr>
+          </a:p>
+        </p:txBody>
+      </p:sp>
+      <p:sp>
+        <p:nvSpPr>
+          <p:cNvPr id="182" name=""/>
+          <p:cNvSpPr/>
+          <p:nvPr/>
+        </p:nvSpPr>
+        <p:spPr>
+          <a:xfrm>
+            <a:off x="5628960" y="4400280"/>
+            <a:ext cx="3458160" cy="10080"/>
+          </a:xfrm>
+          <a:custGeom>
+            <a:avLst/>
+            <a:gdLst/>
+            <a:ahLst/>
+            <a:rect l="0" t="0" r="r" b="b"/>
+            <a:pathLst>
+              <a:path w="9606" h="28">
+                <a:moveTo>
+                  <a:pt x="0" y="0"/>
+                </a:moveTo>
+                <a:lnTo>
+                  <a:pt x="9606" y="0"/>
+                </a:lnTo>
+                <a:lnTo>
+                  <a:pt x="9606" y="28"/>
+                </a:lnTo>
+                <a:lnTo>
+                  <a:pt x="0" y="28"/>
+                </a:lnTo>
+                <a:lnTo>
+                  <a:pt x="0" y="0"/>
+                </a:lnTo>
+                <a:close/>
+              </a:path>
+            </a:pathLst>
+          </a:custGeom>
+          <a:solidFill>
+            <a:srgbClr val="d1d9e0"/>
+          </a:solidFill>
+          <a:ln w="0">
+            <a:noFill/>
+          </a:ln>
+        </p:spPr>
+        <p:txBody>
+          <a:bodyPr lIns="0" rIns="0" tIns="0" bIns="0" anchor="t">
+            <a:noAutofit/>
+          </a:bodyPr>
+          <a:p>
+            <a:endParaRPr b="0" lang="en-AU" sz="2400" spc="-1" strike="noStrike">
+              <a:solidFill>
+                <a:srgbClr val="000000"/>
+              </a:solidFill>
+              <a:latin typeface="Times New Roman"/>
+            </a:endParaRPr>
+          </a:p>
+        </p:txBody>
+      </p:sp>
+      <p:sp>
+        <p:nvSpPr>
+          <p:cNvPr id="183" name=""/>
+          <p:cNvSpPr/>
+          <p:nvPr/>
+        </p:nvSpPr>
+        <p:spPr>
+          <a:xfrm>
+            <a:off x="9077040" y="4410000"/>
+            <a:ext cx="10080" cy="438480"/>
+          </a:xfrm>
+          <a:custGeom>
+            <a:avLst/>
+            <a:gdLst/>
+            <a:ahLst/>
+            <a:rect l="0" t="0" r="r" b="b"/>
+            <a:pathLst>
+              <a:path w="28" h="1218">
+                <a:moveTo>
+                  <a:pt x="0" y="0"/>
+                </a:moveTo>
+                <a:lnTo>
+                  <a:pt x="28" y="0"/>
+                </a:lnTo>
+                <a:lnTo>
+                  <a:pt x="28" y="1218"/>
+                </a:lnTo>
+                <a:lnTo>
+                  <a:pt x="0" y="1218"/>
+                </a:lnTo>
+                <a:lnTo>
+                  <a:pt x="0" y="0"/>
+                </a:lnTo>
+                <a:close/>
+              </a:path>
+            </a:pathLst>
+          </a:custGeom>
+          <a:solidFill>
+            <a:srgbClr val="d1d9e0"/>
+          </a:solidFill>
+          <a:ln w="0">
+            <a:noFill/>
+          </a:ln>
+        </p:spPr>
+        <p:txBody>
+          <a:bodyPr lIns="0" rIns="0" tIns="0" bIns="0" anchor="t">
+            <a:noAutofit/>
+          </a:bodyPr>
+          <a:p>
+            <a:endParaRPr b="0" lang="en-AU" sz="2400" spc="-1" strike="noStrike">
+              <a:solidFill>
+                <a:srgbClr val="000000"/>
+              </a:solidFill>
+              <a:latin typeface="Times New Roman"/>
+            </a:endParaRPr>
+          </a:p>
+        </p:txBody>
+      </p:sp>
+      <p:sp>
+        <p:nvSpPr>
+          <p:cNvPr id="184" name=""/>
+          <p:cNvSpPr/>
+          <p:nvPr/>
+        </p:nvSpPr>
+        <p:spPr>
+          <a:xfrm>
+            <a:off x="666720" y="4848120"/>
+            <a:ext cx="9720" cy="438480"/>
+          </a:xfrm>
+          <a:custGeom>
+            <a:avLst/>
+            <a:gdLst/>
+            <a:ahLst/>
+            <a:rect l="0" t="0" r="r" b="b"/>
+            <a:pathLst>
+              <a:path w="27" h="1218">
+                <a:moveTo>
+                  <a:pt x="0" y="0"/>
+                </a:moveTo>
+                <a:lnTo>
+                  <a:pt x="27" y="0"/>
+                </a:lnTo>
+                <a:lnTo>
+                  <a:pt x="27" y="1218"/>
+                </a:lnTo>
+                <a:lnTo>
+                  <a:pt x="0" y="1218"/>
+                </a:lnTo>
+                <a:lnTo>
+                  <a:pt x="0" y="0"/>
+                </a:lnTo>
+                <a:close/>
+              </a:path>
+            </a:pathLst>
+          </a:custGeom>
+          <a:solidFill>
+            <a:srgbClr val="d1d9e0"/>
+          </a:solidFill>
+          <a:ln w="0">
+            <a:noFill/>
+          </a:ln>
+        </p:spPr>
+        <p:txBody>
+          <a:bodyPr lIns="0" rIns="0" tIns="0" bIns="0" anchor="t">
+            <a:noAutofit/>
+          </a:bodyPr>
+          <a:p>
+            <a:endParaRPr b="0" lang="en-AU" sz="2400" spc="-1" strike="noStrike">
+              <a:solidFill>
+                <a:srgbClr val="000000"/>
+              </a:solidFill>
+              <a:latin typeface="Times New Roman"/>
+            </a:endParaRPr>
+          </a:p>
+        </p:txBody>
+      </p:sp>
+      <p:sp>
+        <p:nvSpPr>
+          <p:cNvPr id="185" name=""/>
+          <p:cNvSpPr/>
+          <p:nvPr/>
+        </p:nvSpPr>
+        <p:spPr>
+          <a:xfrm>
+            <a:off x="666720" y="4838400"/>
+            <a:ext cx="371520" cy="10080"/>
+          </a:xfrm>
+          <a:custGeom>
+            <a:avLst/>
+            <a:gdLst/>
+            <a:ahLst/>
+            <a:rect l="0" t="0" r="r" b="b"/>
+            <a:pathLst>
+              <a:path w="1032" h="28">
+                <a:moveTo>
+                  <a:pt x="0" y="0"/>
+                </a:moveTo>
+                <a:lnTo>
+                  <a:pt x="1032" y="0"/>
+                </a:lnTo>
+                <a:lnTo>
+                  <a:pt x="1032" y="28"/>
+                </a:lnTo>
+                <a:lnTo>
+                  <a:pt x="0" y="28"/>
+                </a:lnTo>
+                <a:lnTo>
+                  <a:pt x="0" y="0"/>
+                </a:lnTo>
+                <a:close/>
+              </a:path>
+            </a:pathLst>
+          </a:custGeom>
+          <a:solidFill>
+            <a:srgbClr val="d1d9e0"/>
+          </a:solidFill>
+          <a:ln w="0">
+            <a:noFill/>
+          </a:ln>
+        </p:spPr>
+        <p:txBody>
+          <a:bodyPr lIns="0" rIns="0" tIns="0" bIns="0" anchor="t">
+            <a:noAutofit/>
+          </a:bodyPr>
+          <a:p>
+            <a:endParaRPr b="0" lang="en-AU" sz="2400" spc="-1" strike="noStrike">
+              <a:solidFill>
+                <a:srgbClr val="000000"/>
+              </a:solidFill>
+              <a:latin typeface="Times New Roman"/>
+            </a:endParaRPr>
+          </a:p>
+        </p:txBody>
+      </p:sp>
+      <p:sp>
+        <p:nvSpPr>
+          <p:cNvPr id="186" name=""/>
+          <p:cNvSpPr/>
+          <p:nvPr/>
+        </p:nvSpPr>
+        <p:spPr>
+          <a:xfrm>
+            <a:off x="1028520" y="4848120"/>
+            <a:ext cx="9720" cy="438480"/>
+          </a:xfrm>
+          <a:custGeom>
+            <a:avLst/>
+            <a:gdLst/>
+            <a:ahLst/>
+            <a:rect l="0" t="0" r="r" b="b"/>
+            <a:pathLst>
+              <a:path w="27" h="1218">
+                <a:moveTo>
+                  <a:pt x="0" y="0"/>
+                </a:moveTo>
+                <a:lnTo>
+                  <a:pt x="27" y="0"/>
+                </a:lnTo>
+                <a:lnTo>
+                  <a:pt x="27" y="1218"/>
+                </a:lnTo>
+                <a:lnTo>
+                  <a:pt x="0" y="1218"/>
+                </a:lnTo>
+                <a:lnTo>
+                  <a:pt x="0" y="0"/>
+                </a:lnTo>
+                <a:close/>
+              </a:path>
+            </a:pathLst>
+          </a:custGeom>
+          <a:solidFill>
+            <a:srgbClr val="d1d9e0"/>
+          </a:solidFill>
+          <a:ln w="0">
+            <a:noFill/>
+          </a:ln>
+        </p:spPr>
+        <p:txBody>
+          <a:bodyPr lIns="0" rIns="0" tIns="0" bIns="0" anchor="t">
+            <a:noAutofit/>
+          </a:bodyPr>
+          <a:p>
+            <a:endParaRPr b="0" lang="en-AU" sz="2400" spc="-1" strike="noStrike">
+              <a:solidFill>
+                <a:srgbClr val="000000"/>
+              </a:solidFill>
+              <a:latin typeface="Times New Roman"/>
+            </a:endParaRPr>
+          </a:p>
+        </p:txBody>
+      </p:sp>
+      <p:sp>
+        <p:nvSpPr>
+          <p:cNvPr id="187" name=""/>
+          <p:cNvSpPr/>
+          <p:nvPr/>
+        </p:nvSpPr>
+        <p:spPr>
+          <a:xfrm>
+            <a:off x="1037880" y="4838400"/>
+            <a:ext cx="4591440" cy="10080"/>
+          </a:xfrm>
+          <a:custGeom>
+            <a:avLst/>
+            <a:gdLst/>
+            <a:ahLst/>
+            <a:rect l="0" t="0" r="r" b="b"/>
+            <a:pathLst>
+              <a:path w="12754" h="28">
+                <a:moveTo>
+                  <a:pt x="0" y="0"/>
+                </a:moveTo>
+                <a:lnTo>
+                  <a:pt x="12754" y="0"/>
+                </a:lnTo>
+                <a:lnTo>
+                  <a:pt x="12754" y="28"/>
+                </a:lnTo>
+                <a:lnTo>
+                  <a:pt x="0" y="28"/>
+                </a:lnTo>
+                <a:lnTo>
+                  <a:pt x="0" y="0"/>
+                </a:lnTo>
+                <a:close/>
+              </a:path>
+            </a:pathLst>
+          </a:custGeom>
+          <a:solidFill>
+            <a:srgbClr val="d1d9e0"/>
+          </a:solidFill>
+          <a:ln w="0">
+            <a:noFill/>
+          </a:ln>
+        </p:spPr>
+        <p:txBody>
+          <a:bodyPr lIns="0" rIns="0" tIns="0" bIns="0" anchor="t">
+            <a:noAutofit/>
+          </a:bodyPr>
+          <a:p>
+            <a:endParaRPr b="0" lang="en-AU" sz="2400" spc="-1" strike="noStrike">
+              <a:solidFill>
+                <a:srgbClr val="000000"/>
+              </a:solidFill>
+              <a:latin typeface="Times New Roman"/>
+            </a:endParaRPr>
+          </a:p>
+        </p:txBody>
+      </p:sp>
+      <p:sp>
+        <p:nvSpPr>
+          <p:cNvPr id="188" name=""/>
+          <p:cNvSpPr/>
+          <p:nvPr/>
+        </p:nvSpPr>
+        <p:spPr>
+          <a:xfrm>
+            <a:off x="5619600" y="4848120"/>
+            <a:ext cx="9720" cy="438480"/>
+          </a:xfrm>
+          <a:custGeom>
+            <a:avLst/>
+            <a:gdLst/>
+            <a:ahLst/>
+            <a:rect l="0" t="0" r="r" b="b"/>
+            <a:pathLst>
+              <a:path w="27" h="1218">
+                <a:moveTo>
+                  <a:pt x="0" y="0"/>
+                </a:moveTo>
+                <a:lnTo>
+                  <a:pt x="27" y="0"/>
+                </a:lnTo>
+                <a:lnTo>
+                  <a:pt x="27" y="1218"/>
+                </a:lnTo>
+                <a:lnTo>
+                  <a:pt x="0" y="1218"/>
+                </a:lnTo>
+                <a:lnTo>
+                  <a:pt x="0" y="0"/>
+                </a:lnTo>
+                <a:close/>
+              </a:path>
+            </a:pathLst>
+          </a:custGeom>
+          <a:solidFill>
+            <a:srgbClr val="d1d9e0"/>
+          </a:solidFill>
+          <a:ln w="0">
+            <a:noFill/>
+          </a:ln>
+        </p:spPr>
+        <p:txBody>
+          <a:bodyPr lIns="0" rIns="0" tIns="0" bIns="0" anchor="t">
+            <a:noAutofit/>
+          </a:bodyPr>
+          <a:p>
+            <a:endParaRPr b="0" lang="en-AU" sz="2400" spc="-1" strike="noStrike">
+              <a:solidFill>
+                <a:srgbClr val="000000"/>
+              </a:solidFill>
+              <a:latin typeface="Times New Roman"/>
+            </a:endParaRPr>
+          </a:p>
+        </p:txBody>
+      </p:sp>
+      <p:sp>
+        <p:nvSpPr>
+          <p:cNvPr id="189" name=""/>
+          <p:cNvSpPr/>
+          <p:nvPr/>
+        </p:nvSpPr>
+        <p:spPr>
+          <a:xfrm>
+            <a:off x="5628960" y="4838400"/>
+            <a:ext cx="3458160" cy="10080"/>
+          </a:xfrm>
+          <a:custGeom>
+            <a:avLst/>
+            <a:gdLst/>
+            <a:ahLst/>
+            <a:rect l="0" t="0" r="r" b="b"/>
+            <a:pathLst>
+              <a:path w="9606" h="28">
+                <a:moveTo>
+                  <a:pt x="0" y="0"/>
+                </a:moveTo>
+                <a:lnTo>
+                  <a:pt x="9606" y="0"/>
+                </a:lnTo>
+                <a:lnTo>
+                  <a:pt x="9606" y="28"/>
+                </a:lnTo>
+                <a:lnTo>
+                  <a:pt x="0" y="28"/>
+                </a:lnTo>
+                <a:lnTo>
+                  <a:pt x="0" y="0"/>
+                </a:lnTo>
+                <a:close/>
+              </a:path>
+            </a:pathLst>
+          </a:custGeom>
+          <a:solidFill>
+            <a:srgbClr val="d1d9e0"/>
+          </a:solidFill>
+          <a:ln w="0">
+            <a:noFill/>
+          </a:ln>
+        </p:spPr>
+        <p:txBody>
+          <a:bodyPr lIns="0" rIns="0" tIns="0" bIns="0" anchor="t">
+            <a:noAutofit/>
+          </a:bodyPr>
+          <a:p>
+            <a:endParaRPr b="0" lang="en-AU" sz="2400" spc="-1" strike="noStrike">
+              <a:solidFill>
+                <a:srgbClr val="000000"/>
+              </a:solidFill>
+              <a:latin typeface="Times New Roman"/>
+            </a:endParaRPr>
+          </a:p>
+        </p:txBody>
+      </p:sp>
+      <p:sp>
+        <p:nvSpPr>
+          <p:cNvPr id="190" name=""/>
+          <p:cNvSpPr/>
+          <p:nvPr/>
+        </p:nvSpPr>
+        <p:spPr>
+          <a:xfrm>
+            <a:off x="9077040" y="4848120"/>
+            <a:ext cx="10080" cy="438480"/>
+          </a:xfrm>
+          <a:custGeom>
+            <a:avLst/>
+            <a:gdLst/>
+            <a:ahLst/>
+            <a:rect l="0" t="0" r="r" b="b"/>
+            <a:pathLst>
+              <a:path w="28" h="1218">
+                <a:moveTo>
+                  <a:pt x="0" y="0"/>
+                </a:moveTo>
+                <a:lnTo>
+                  <a:pt x="28" y="0"/>
+                </a:lnTo>
+                <a:lnTo>
+                  <a:pt x="28" y="1218"/>
+                </a:lnTo>
+                <a:lnTo>
+                  <a:pt x="0" y="1218"/>
+                </a:lnTo>
+                <a:lnTo>
+                  <a:pt x="0" y="0"/>
+                </a:lnTo>
+                <a:close/>
+              </a:path>
+            </a:pathLst>
+          </a:custGeom>
+          <a:solidFill>
+            <a:srgbClr val="d1d9e0"/>
+          </a:solidFill>
+          <a:ln w="0">
+            <a:noFill/>
+          </a:ln>
+        </p:spPr>
+        <p:txBody>
+          <a:bodyPr lIns="0" rIns="0" tIns="0" bIns="0" anchor="t">
+            <a:noAutofit/>
+          </a:bodyPr>
+          <a:p>
+            <a:endParaRPr b="0" lang="en-AU" sz="2400" spc="-1" strike="noStrike">
+              <a:solidFill>
+                <a:srgbClr val="000000"/>
+              </a:solidFill>
+              <a:latin typeface="Times New Roman"/>
+            </a:endParaRPr>
+          </a:p>
+        </p:txBody>
+      </p:sp>
+      <p:sp>
+        <p:nvSpPr>
+          <p:cNvPr id="191" name=""/>
+          <p:cNvSpPr/>
+          <p:nvPr/>
+        </p:nvSpPr>
+        <p:spPr>
+          <a:xfrm>
+            <a:off x="666720" y="5276520"/>
+            <a:ext cx="371520" cy="10080"/>
+          </a:xfrm>
+          <a:custGeom>
+            <a:avLst/>
+            <a:gdLst/>
+            <a:ahLst/>
+            <a:rect l="0" t="0" r="r" b="b"/>
+            <a:pathLst>
+              <a:path w="1032" h="28">
+                <a:moveTo>
+                  <a:pt x="0" y="0"/>
+                </a:moveTo>
+                <a:lnTo>
+                  <a:pt x="1032" y="0"/>
+                </a:lnTo>
+                <a:lnTo>
+                  <a:pt x="1032" y="28"/>
+                </a:lnTo>
+                <a:lnTo>
+                  <a:pt x="0" y="28"/>
+                </a:lnTo>
+                <a:lnTo>
+                  <a:pt x="0" y="0"/>
+                </a:lnTo>
+                <a:close/>
+              </a:path>
+            </a:pathLst>
+          </a:custGeom>
+          <a:solidFill>
+            <a:srgbClr val="d1d9e0"/>
+          </a:solidFill>
+          <a:ln w="0">
+            <a:noFill/>
+          </a:ln>
+        </p:spPr>
+        <p:txBody>
+          <a:bodyPr lIns="0" rIns="0" tIns="0" bIns="0" anchor="t">
+            <a:noAutofit/>
+          </a:bodyPr>
+          <a:p>
+            <a:endParaRPr b="0" lang="en-AU" sz="2400" spc="-1" strike="noStrike">
+              <a:solidFill>
+                <a:srgbClr val="000000"/>
+              </a:solidFill>
+              <a:latin typeface="Times New Roman"/>
+            </a:endParaRPr>
+          </a:p>
+        </p:txBody>
+      </p:sp>
+      <p:sp>
+        <p:nvSpPr>
+          <p:cNvPr id="192" name=""/>
+          <p:cNvSpPr/>
+          <p:nvPr/>
+        </p:nvSpPr>
+        <p:spPr>
+          <a:xfrm>
+            <a:off x="1037880" y="5276520"/>
+            <a:ext cx="4591440" cy="10080"/>
+          </a:xfrm>
+          <a:custGeom>
+            <a:avLst/>
+            <a:gdLst/>
+            <a:ahLst/>
+            <a:rect l="0" t="0" r="r" b="b"/>
+            <a:pathLst>
+              <a:path w="12754" h="28">
+                <a:moveTo>
+                  <a:pt x="0" y="0"/>
+                </a:moveTo>
+                <a:lnTo>
+                  <a:pt x="12754" y="0"/>
+                </a:lnTo>
+                <a:lnTo>
+                  <a:pt x="12754" y="28"/>
+                </a:lnTo>
+                <a:lnTo>
+                  <a:pt x="0" y="28"/>
+                </a:lnTo>
+                <a:lnTo>
+                  <a:pt x="0" y="0"/>
+                </a:lnTo>
+                <a:close/>
+              </a:path>
+            </a:pathLst>
+          </a:custGeom>
+          <a:solidFill>
+            <a:srgbClr val="d1d9e0"/>
+          </a:solidFill>
+          <a:ln w="0">
+            <a:noFill/>
+          </a:ln>
+        </p:spPr>
+        <p:txBody>
+          <a:bodyPr lIns="0" rIns="0" tIns="0" bIns="0" anchor="t">
+            <a:noAutofit/>
+          </a:bodyPr>
+          <a:p>
+            <a:endParaRPr b="0" lang="en-AU" sz="2400" spc="-1" strike="noStrike">
+              <a:solidFill>
+                <a:srgbClr val="000000"/>
+              </a:solidFill>
+              <a:latin typeface="Times New Roman"/>
+            </a:endParaRPr>
+          </a:p>
+        </p:txBody>
+      </p:sp>
+      <p:sp>
+        <p:nvSpPr>
+          <p:cNvPr id="193" name=""/>
+          <p:cNvSpPr/>
+          <p:nvPr/>
+        </p:nvSpPr>
+        <p:spPr>
+          <a:xfrm>
+            <a:off x="5628960" y="5276520"/>
+            <a:ext cx="3458160" cy="10080"/>
+          </a:xfrm>
+          <a:custGeom>
+            <a:avLst/>
+            <a:gdLst/>
+            <a:ahLst/>
+            <a:rect l="0" t="0" r="r" b="b"/>
+            <a:pathLst>
+              <a:path w="9606" h="28">
+                <a:moveTo>
+                  <a:pt x="0" y="0"/>
+                </a:moveTo>
+                <a:lnTo>
+                  <a:pt x="9606" y="0"/>
+                </a:lnTo>
+                <a:lnTo>
+                  <a:pt x="9606" y="28"/>
+                </a:lnTo>
+                <a:lnTo>
+                  <a:pt x="0" y="28"/>
+                </a:lnTo>
+                <a:lnTo>
+                  <a:pt x="0" y="0"/>
+                </a:lnTo>
+                <a:close/>
+              </a:path>
+            </a:pathLst>
+          </a:custGeom>
+          <a:solidFill>
+            <a:srgbClr val="d1d9e0"/>
+          </a:solidFill>
+          <a:ln w="0">
+            <a:noFill/>
+          </a:ln>
+        </p:spPr>
+        <p:txBody>
+          <a:bodyPr lIns="0" rIns="0" tIns="0" bIns="0" anchor="t">
+            <a:noAutofit/>
+          </a:bodyPr>
+          <a:p>
+            <a:endParaRPr b="0" lang="en-AU" sz="2400" spc="-1" strike="noStrike">
+              <a:solidFill>
+                <a:srgbClr val="000000"/>
+              </a:solidFill>
+              <a:latin typeface="Times New Roman"/>
+            </a:endParaRPr>
+          </a:p>
+        </p:txBody>
+      </p:sp>
+      <p:sp>
+        <p:nvSpPr>
+          <p:cNvPr id="194" name=""/>
+          <p:cNvSpPr/>
+          <p:nvPr/>
+        </p:nvSpPr>
+        <p:spPr>
+          <a:xfrm>
+            <a:off x="666720" y="5438520"/>
+            <a:ext cx="57240" cy="371880"/>
+          </a:xfrm>
+          <a:custGeom>
+            <a:avLst/>
+            <a:gdLst/>
+            <a:ahLst/>
+            <a:rect l="0" t="0" r="r" b="b"/>
+            <a:pathLst>
+              <a:path w="159" h="1033">
+                <a:moveTo>
+                  <a:pt x="0" y="0"/>
+                </a:moveTo>
+                <a:lnTo>
+                  <a:pt x="159" y="0"/>
+                </a:lnTo>
+                <a:lnTo>
+                  <a:pt x="159" y="1033"/>
+                </a:lnTo>
+                <a:lnTo>
+                  <a:pt x="0" y="1033"/>
+                </a:lnTo>
+                <a:lnTo>
+                  <a:pt x="0" y="0"/>
+                </a:lnTo>
+                <a:close/>
+              </a:path>
+            </a:pathLst>
+          </a:custGeom>
+          <a:solidFill>
+            <a:srgbClr val="d1d9e0"/>
+          </a:solidFill>
+          <a:ln w="0">
+            <a:noFill/>
+          </a:ln>
+        </p:spPr>
+        <p:txBody>
+          <a:bodyPr lIns="0" rIns="0" tIns="0" bIns="0" anchor="t">
+            <a:noAutofit/>
+          </a:bodyPr>
+          <a:p>
+            <a:endParaRPr b="0" lang="en-AU" sz="2400" spc="-1" strike="noStrike">
+              <a:solidFill>
+                <a:srgbClr val="000000"/>
+              </a:solidFill>
+              <a:latin typeface="Times New Roman"/>
+            </a:endParaRPr>
+          </a:p>
+        </p:txBody>
+      </p:sp>
+      <p:sp>
+        <p:nvSpPr>
+          <p:cNvPr id="195" name=""/>
           <p:cNvSpPr txBox="1"/>
           <p:nvPr/>
         </p:nvSpPr>
         <p:spPr>
           <a:xfrm>
-            <a:off x="666720" y="2234880"/>
+            <a:off x="666720" y="1044360"/>
             <a:ext cx="1168200" cy="396720"/>
           </a:xfrm>
           <a:prstGeom prst="rect">
@@ -12272,147 +16301,14 @@
       </p:sp>
       <p:sp>
         <p:nvSpPr>
-          <p:cNvPr id="121" name=""/>
-          <p:cNvSpPr/>
-          <p:nvPr/>
-        </p:nvSpPr>
-        <p:spPr>
-          <a:xfrm>
-            <a:off x="3155040" y="3047760"/>
-            <a:ext cx="167040" cy="167040"/>
-          </a:xfrm>
-          <a:custGeom>
-            <a:avLst/>
-            <a:gdLst/>
-            <a:ahLst/>
-            <a:rect l="0" t="0" r="r" b="b"/>
-            <a:pathLst>
-              <a:path w="464" h="464">
-                <a:moveTo>
-                  <a:pt x="464" y="413"/>
-                </a:moveTo>
-                <a:cubicBezTo>
-                  <a:pt x="464" y="441"/>
-                  <a:pt x="441" y="464"/>
-                  <a:pt x="413" y="464"/>
-                </a:cubicBezTo>
-                <a:lnTo>
-                  <a:pt x="51" y="464"/>
-                </a:lnTo>
-                <a:cubicBezTo>
-                  <a:pt x="23" y="464"/>
-                  <a:pt x="0" y="441"/>
-                  <a:pt x="0" y="413"/>
-                </a:cubicBezTo>
-                <a:lnTo>
-                  <a:pt x="0" y="52"/>
-                </a:lnTo>
-                <a:cubicBezTo>
-                  <a:pt x="0" y="23"/>
-                  <a:pt x="23" y="0"/>
-                  <a:pt x="51" y="0"/>
-                </a:cubicBezTo>
-                <a:lnTo>
-                  <a:pt x="413" y="0"/>
-                </a:lnTo>
-                <a:cubicBezTo>
-                  <a:pt x="441" y="0"/>
-                  <a:pt x="464" y="23"/>
-                  <a:pt x="464" y="52"/>
-                </a:cubicBezTo>
-                <a:lnTo>
-                  <a:pt x="464" y="413"/>
-                </a:lnTo>
-                <a:close/>
-              </a:path>
-            </a:pathLst>
-          </a:custGeom>
-          <a:solidFill>
-            <a:srgbClr val="3b88c3"/>
-          </a:solidFill>
-          <a:ln w="0">
-            <a:noFill/>
-          </a:ln>
-        </p:spPr>
-        <p:txBody>
-          <a:bodyPr lIns="0" rIns="0" tIns="0" bIns="0" anchor="t">
-            <a:noAutofit/>
-          </a:bodyPr>
-          <a:p>
-            <a:endParaRPr b="0" lang="en-AU" sz="2400" spc="-1" strike="noStrike">
-              <a:solidFill>
-                <a:srgbClr val="ffffff"/>
-              </a:solidFill>
-              <a:latin typeface="Times New Roman"/>
-            </a:endParaRPr>
-          </a:p>
-        </p:txBody>
-      </p:sp>
-      <p:sp>
-        <p:nvSpPr>
-          <p:cNvPr id="122" name=""/>
-          <p:cNvSpPr/>
-          <p:nvPr/>
-        </p:nvSpPr>
-        <p:spPr>
-          <a:xfrm>
-            <a:off x="3192120" y="3080160"/>
-            <a:ext cx="102240" cy="102240"/>
-          </a:xfrm>
-          <a:custGeom>
-            <a:avLst/>
-            <a:gdLst/>
-            <a:ahLst/>
-            <a:rect l="0" t="0" r="r" b="b"/>
-            <a:pathLst>
-              <a:path w="284" h="284">
-                <a:moveTo>
-                  <a:pt x="0" y="0"/>
-                </a:moveTo>
-                <a:lnTo>
-                  <a:pt x="284" y="143"/>
-                </a:lnTo>
-                <a:lnTo>
-                  <a:pt x="0" y="284"/>
-                </a:lnTo>
-                <a:lnTo>
-                  <a:pt x="0" y="0"/>
-                </a:lnTo>
-                <a:close/>
-              </a:path>
-            </a:pathLst>
-          </a:custGeom>
-          <a:solidFill>
-            <a:srgbClr val="ffffff"/>
-          </a:solidFill>
-          <a:ln w="0">
-            <a:noFill/>
-          </a:ln>
-        </p:spPr>
-        <p:txBody>
-          <a:bodyPr lIns="0" rIns="0" tIns="0" bIns="0" anchor="t">
-            <a:noAutofit/>
-          </a:bodyPr>
-          <a:p>
-            <a:endParaRPr b="0" lang="en-AU" sz="2400" spc="-1" strike="noStrike">
-              <a:solidFill>
-                <a:srgbClr val="000000"/>
-              </a:solidFill>
-              <a:latin typeface="Times New Roman"/>
-            </a:endParaRPr>
-          </a:p>
-        </p:txBody>
-      </p:sp>
-      <p:sp>
-        <p:nvSpPr>
-          <p:cNvPr id="123" name=""/>
+          <p:cNvPr id="196" name=""/>
           <p:cNvSpPr txBox="1"/>
           <p:nvPr/>
         </p:nvSpPr>
         <p:spPr>
           <a:xfrm>
-            <a:off x="828720" y="3060000"/>
-            <a:ext cx="2314080" cy="190800"/>
+            <a:off x="666720" y="1716840"/>
+            <a:ext cx="7712280" cy="303480"/>
           </a:xfrm>
           <a:prstGeom prst="rect">
             <a:avLst/>
@@ -12428,34 +16324,34 @@
           </a:bodyPr>
           <a:p>
             <a:r>
-              <a:rPr b="0" lang="en-AU" sz="1320" spc="-1" strike="noStrike">
+              <a:rPr b="0" lang="en-AU" sz="1950" spc="-1" strike="noStrike">
                 <a:solidFill>
-                  <a:srgbClr val="007a53"/>
+                  <a:srgbClr val="001d34"/>
                 </a:solidFill>
-                <a:latin typeface="Courier New"/>
-                <a:ea typeface="Courier New"/>
+                <a:latin typeface="Calibri"/>
+                <a:ea typeface="Calibri"/>
               </a:rPr>
-              <a:t>Referrer ──(1) search──</a:t>
+              <a:t>The referrer, referral server and imaging provider (ﬁller) interact in six steps:</a:t>
             </a:r>
-            <a:endParaRPr b="0" lang="en-AU" sz="1320" spc="-1" strike="noStrike">
-              <a:solidFill>
-                <a:srgbClr val="000000"/>
-              </a:solidFill>
-              <a:latin typeface="Times New Roman"/>
-            </a:endParaRPr>
-          </a:p>
-        </p:txBody>
-      </p:sp>
-      <p:sp>
-        <p:nvSpPr>
-          <p:cNvPr id="124" name=""/>
+            <a:endParaRPr b="0" lang="en-AU" sz="1950" spc="-1" strike="noStrike">
+              <a:solidFill>
+                <a:srgbClr val="000000"/>
+              </a:solidFill>
+              <a:latin typeface="Times New Roman"/>
+            </a:endParaRPr>
+          </a:p>
+        </p:txBody>
+      </p:sp>
+      <p:sp>
+        <p:nvSpPr>
+          <p:cNvPr id="197" name=""/>
           <p:cNvSpPr txBox="1"/>
           <p:nvPr/>
         </p:nvSpPr>
         <p:spPr>
           <a:xfrm>
-            <a:off x="3332160" y="3060000"/>
-            <a:ext cx="4828680" cy="190800"/>
+            <a:off x="801000" y="2305440"/>
+            <a:ext cx="209160" cy="254880"/>
           </a:xfrm>
           <a:prstGeom prst="rect">
             <a:avLst/>
@@ -12471,44 +16367,216 @@
           </a:bodyPr>
           <a:p>
             <a:r>
-              <a:rPr b="0" lang="en-AU" sz="1320" spc="-1" strike="noStrike">
+              <a:rPr b="1" lang="en-AU" sz="1650" spc="-1" strike="noStrike">
                 <a:solidFill>
-                  <a:srgbClr val="007a53"/>
+                  <a:srgbClr val="ffffff"/>
                 </a:solidFill>
-                <a:latin typeface="Courier New"/>
-                <a:ea typeface="Courier New"/>
+                <a:latin typeface="Calibri"/>
+                <a:ea typeface="Calibri"/>
               </a:rPr>
-              <a:t> </a:t>
+              <a:t>#</a:t>
+            </a:r>
+            <a:endParaRPr b="0" lang="en-AU" sz="1650" spc="-1" strike="noStrike">
+              <a:solidFill>
+                <a:srgbClr val="000000"/>
+              </a:solidFill>
+              <a:latin typeface="Times New Roman"/>
+            </a:endParaRPr>
+          </a:p>
+        </p:txBody>
+      </p:sp>
+      <p:sp>
+        <p:nvSpPr>
+          <p:cNvPr id="198" name=""/>
+          <p:cNvSpPr txBox="1"/>
+          <p:nvPr/>
+        </p:nvSpPr>
+        <p:spPr>
+          <a:xfrm>
+            <a:off x="3137040" y="2305440"/>
+            <a:ext cx="387720" cy="254880"/>
+          </a:xfrm>
+          <a:prstGeom prst="rect">
+            <a:avLst/>
+          </a:prstGeom>
+          <a:noFill/>
+          <a:ln w="0">
+            <a:noFill/>
+          </a:ln>
+        </p:spPr>
+        <p:txBody>
+          <a:bodyPr wrap="none" lIns="0" rIns="0" tIns="0" bIns="0" anchor="t">
+            <a:noAutofit/>
+          </a:bodyPr>
+          <a:p>
+            <a:r>
+              <a:rPr b="1" lang="en-AU" sz="1650" spc="-1" strike="noStrike">
+                <a:solidFill>
+                  <a:srgbClr val="ffffff"/>
+                </a:solidFill>
+                <a:latin typeface="Calibri"/>
+                <a:ea typeface="Calibri"/>
+              </a:rPr>
+              <a:t>Step</a:t>
+            </a:r>
+            <a:endParaRPr b="0" lang="en-AU" sz="1650" spc="-1" strike="noStrike">
+              <a:solidFill>
+                <a:srgbClr val="000000"/>
+              </a:solidFill>
+              <a:latin typeface="Times New Roman"/>
+            </a:endParaRPr>
+          </a:p>
+        </p:txBody>
+      </p:sp>
+      <p:sp>
+        <p:nvSpPr>
+          <p:cNvPr id="199" name=""/>
+          <p:cNvSpPr txBox="1"/>
+          <p:nvPr/>
+        </p:nvSpPr>
+        <p:spPr>
+          <a:xfrm>
+            <a:off x="6889320" y="2305440"/>
+            <a:ext cx="951840" cy="254880"/>
+          </a:xfrm>
+          <a:prstGeom prst="rect">
+            <a:avLst/>
+          </a:prstGeom>
+          <a:noFill/>
+          <a:ln w="0">
+            <a:noFill/>
+          </a:ln>
+        </p:spPr>
+        <p:txBody>
+          <a:bodyPr wrap="none" lIns="0" rIns="0" tIns="0" bIns="0" anchor="t">
+            <a:noAutofit/>
+          </a:bodyPr>
+          <a:p>
+            <a:r>
+              <a:rPr b="1" lang="en-AU" sz="1650" spc="-1" strike="noStrike">
+                <a:solidFill>
+                  <a:srgbClr val="ffffff"/>
+                </a:solidFill>
+                <a:latin typeface="Calibri"/>
+                <a:ea typeface="Calibri"/>
+              </a:rPr>
+              <a:t>From → To</a:t>
+            </a:r>
+            <a:endParaRPr b="0" lang="en-AU" sz="1650" spc="-1" strike="noStrike">
+              <a:solidFill>
+                <a:srgbClr val="000000"/>
+              </a:solidFill>
+              <a:latin typeface="Times New Roman"/>
+            </a:endParaRPr>
+          </a:p>
+        </p:txBody>
+      </p:sp>
+      <p:sp>
+        <p:nvSpPr>
+          <p:cNvPr id="200" name=""/>
+          <p:cNvSpPr txBox="1"/>
+          <p:nvPr/>
+        </p:nvSpPr>
+        <p:spPr>
+          <a:xfrm>
+            <a:off x="799920" y="2743560"/>
+            <a:ext cx="209160" cy="254880"/>
+          </a:xfrm>
+          <a:prstGeom prst="rect">
+            <a:avLst/>
+          </a:prstGeom>
+          <a:noFill/>
+          <a:ln w="0">
+            <a:noFill/>
+          </a:ln>
+        </p:spPr>
+        <p:txBody>
+          <a:bodyPr wrap="none" lIns="0" rIns="0" tIns="0" bIns="0" anchor="t">
+            <a:noAutofit/>
+          </a:bodyPr>
+          <a:p>
+            <a:r>
+              <a:rPr b="1" lang="en-AU" sz="1650" spc="-1" strike="noStrike">
+                <a:solidFill>
+                  <a:srgbClr val="1e22aa"/>
+                </a:solidFill>
+                <a:latin typeface="Calibri"/>
+                <a:ea typeface="Calibri"/>
+              </a:rPr>
+              <a:t>1</a:t>
+            </a:r>
+            <a:endParaRPr b="0" lang="en-AU" sz="1650" spc="-1" strike="noStrike">
+              <a:solidFill>
+                <a:srgbClr val="000000"/>
+              </a:solidFill>
+              <a:latin typeface="Times New Roman"/>
+            </a:endParaRPr>
+          </a:p>
+        </p:txBody>
+      </p:sp>
+      <p:sp>
+        <p:nvSpPr>
+          <p:cNvPr id="201" name=""/>
+          <p:cNvSpPr txBox="1"/>
+          <p:nvPr/>
+        </p:nvSpPr>
+        <p:spPr>
+          <a:xfrm>
+            <a:off x="1163520" y="2743560"/>
+            <a:ext cx="3634200" cy="254880"/>
+          </a:xfrm>
+          <a:prstGeom prst="rect">
+            <a:avLst/>
+          </a:prstGeom>
+          <a:noFill/>
+          <a:ln w="0">
+            <a:noFill/>
+          </a:ln>
+        </p:spPr>
+        <p:txBody>
+          <a:bodyPr wrap="none" lIns="0" rIns="0" tIns="0" bIns="0" anchor="t">
+            <a:noAutofit/>
+          </a:bodyPr>
+          <a:p>
+            <a:r>
+              <a:rPr b="1" lang="en-AU" sz="1650" spc="-1" strike="noStrike">
+                <a:solidFill>
+                  <a:srgbClr val="1e22aa"/>
+                </a:solidFill>
+                <a:latin typeface="Calibri"/>
+                <a:ea typeface="Calibri"/>
+              </a:rPr>
+              <a:t>Search</a:t>
             </a:r>
             <a:r>
-              <a:rPr b="0" lang="en-AU" sz="1320" spc="-1" strike="noStrike">
+              <a:rPr b="0" lang="en-AU" sz="1650" spc="-1" strike="noStrike">
                 <a:solidFill>
-                  <a:srgbClr val="007a53"/>
+                  <a:srgbClr val="001d34"/>
                 </a:solidFill>
-                <a:latin typeface="Courier New"/>
-                <a:ea typeface="Courier New"/>
+                <a:latin typeface="Calibri"/>
+                <a:ea typeface="Calibri"/>
               </a:rPr>
-              <a:t>HCPD  (HealthcareService / Location / Endpoint)</a:t>
+              <a:t> the directory for an imaging service</a:t>
             </a:r>
-            <a:endParaRPr b="0" lang="en-AU" sz="1320" spc="-1" strike="noStrike">
-              <a:solidFill>
-                <a:srgbClr val="000000"/>
-              </a:solidFill>
-              <a:latin typeface="Times New Roman"/>
-            </a:endParaRPr>
-          </a:p>
-        </p:txBody>
-      </p:sp>
-      <p:sp>
-        <p:nvSpPr>
-          <p:cNvPr id="125" name=""/>
+            <a:endParaRPr b="0" lang="en-AU" sz="1650" spc="-1" strike="noStrike">
+              <a:solidFill>
+                <a:srgbClr val="000000"/>
+              </a:solidFill>
+              <a:latin typeface="Times New Roman"/>
+            </a:endParaRPr>
+          </a:p>
+        </p:txBody>
+      </p:sp>
+      <p:sp>
+        <p:nvSpPr>
+          <p:cNvPr id="202" name=""/>
           <p:cNvSpPr txBox="1"/>
           <p:nvPr/>
         </p:nvSpPr>
         <p:spPr>
           <a:xfrm>
-            <a:off x="828720" y="3249360"/>
-            <a:ext cx="503640" cy="190800"/>
+            <a:off x="5754960" y="2743560"/>
+            <a:ext cx="1468440" cy="254880"/>
           </a:xfrm>
           <a:prstGeom prst="rect">
             <a:avLst/>
@@ -12524,167 +16592,34 @@
           </a:bodyPr>
           <a:p>
             <a:r>
-              <a:rPr b="0" lang="en-AU" sz="1320" spc="-1" strike="noStrike">
+              <a:rPr b="0" lang="en-AU" sz="1650" spc="-1" strike="noStrike">
                 <a:solidFill>
-                  <a:srgbClr val="007a53"/>
+                  <a:srgbClr val="001d34"/>
                 </a:solidFill>
-                <a:latin typeface="Courier New"/>
-                <a:ea typeface="Courier New"/>
+                <a:latin typeface="Calibri"/>
+                <a:ea typeface="Calibri"/>
               </a:rPr>
-              <a:t>    │</a:t>
+              <a:t>Referrer → HCPD</a:t>
             </a:r>
-            <a:endParaRPr b="0" lang="en-AU" sz="1320" spc="-1" strike="noStrike">
-              <a:solidFill>
-                <a:srgbClr val="000000"/>
-              </a:solidFill>
-              <a:latin typeface="Times New Roman"/>
-            </a:endParaRPr>
-          </a:p>
-        </p:txBody>
-      </p:sp>
-      <p:sp>
-        <p:nvSpPr>
-          <p:cNvPr id="126" name=""/>
-          <p:cNvSpPr/>
-          <p:nvPr/>
-        </p:nvSpPr>
-        <p:spPr>
-          <a:xfrm>
-            <a:off x="6368040" y="3449520"/>
-            <a:ext cx="174960" cy="167040"/>
-          </a:xfrm>
-          <a:custGeom>
-            <a:avLst/>
-            <a:gdLst/>
-            <a:ahLst/>
-            <a:rect l="0" t="0" r="r" b="b"/>
-            <a:pathLst>
-              <a:path w="486" h="464">
-                <a:moveTo>
-                  <a:pt x="486" y="413"/>
-                </a:moveTo>
-                <a:cubicBezTo>
-                  <a:pt x="486" y="441"/>
-                  <a:pt x="460" y="464"/>
-                  <a:pt x="431" y="464"/>
-                </a:cubicBezTo>
-                <a:lnTo>
-                  <a:pt x="54" y="464"/>
-                </a:lnTo>
-                <a:cubicBezTo>
-                  <a:pt x="24" y="464"/>
-                  <a:pt x="0" y="441"/>
-                  <a:pt x="0" y="413"/>
-                </a:cubicBezTo>
-                <a:lnTo>
-                  <a:pt x="0" y="51"/>
-                </a:lnTo>
-                <a:cubicBezTo>
-                  <a:pt x="0" y="23"/>
-                  <a:pt x="24" y="0"/>
-                  <a:pt x="54" y="0"/>
-                </a:cubicBezTo>
-                <a:lnTo>
-                  <a:pt x="431" y="0"/>
-                </a:lnTo>
-                <a:cubicBezTo>
-                  <a:pt x="460" y="0"/>
-                  <a:pt x="486" y="23"/>
-                  <a:pt x="486" y="51"/>
-                </a:cubicBezTo>
-                <a:lnTo>
-                  <a:pt x="486" y="413"/>
-                </a:lnTo>
-                <a:close/>
-              </a:path>
-            </a:pathLst>
-          </a:custGeom>
-          <a:solidFill>
-            <a:srgbClr val="3b88c3"/>
-          </a:solidFill>
-          <a:ln w="0">
-            <a:noFill/>
-          </a:ln>
-        </p:spPr>
-        <p:txBody>
-          <a:bodyPr lIns="0" rIns="0" tIns="0" bIns="0" anchor="t">
-            <a:noAutofit/>
-          </a:bodyPr>
-          <a:p>
-            <a:endParaRPr b="0" lang="en-AU" sz="2400" spc="-1" strike="noStrike">
-              <a:solidFill>
-                <a:srgbClr val="ffffff"/>
-              </a:solidFill>
-              <a:latin typeface="Times New Roman"/>
-            </a:endParaRPr>
-          </a:p>
-        </p:txBody>
-      </p:sp>
-      <p:sp>
-        <p:nvSpPr>
-          <p:cNvPr id="127" name=""/>
-          <p:cNvSpPr/>
-          <p:nvPr/>
-        </p:nvSpPr>
-        <p:spPr>
-          <a:xfrm>
-            <a:off x="6406920" y="3481920"/>
-            <a:ext cx="106920" cy="102240"/>
-          </a:xfrm>
-          <a:custGeom>
-            <a:avLst/>
-            <a:gdLst/>
-            <a:ahLst/>
-            <a:rect l="0" t="0" r="r" b="b"/>
-            <a:pathLst>
-              <a:path w="297" h="284">
-                <a:moveTo>
-                  <a:pt x="0" y="0"/>
-                </a:moveTo>
-                <a:lnTo>
-                  <a:pt x="297" y="142"/>
-                </a:lnTo>
-                <a:lnTo>
-                  <a:pt x="0" y="284"/>
-                </a:lnTo>
-                <a:lnTo>
-                  <a:pt x="0" y="0"/>
-                </a:lnTo>
-                <a:close/>
-              </a:path>
-            </a:pathLst>
-          </a:custGeom>
-          <a:solidFill>
-            <a:srgbClr val="ffffff"/>
-          </a:solidFill>
-          <a:ln w="0">
-            <a:noFill/>
-          </a:ln>
-        </p:spPr>
-        <p:txBody>
-          <a:bodyPr lIns="0" rIns="0" tIns="0" bIns="0" anchor="t">
-            <a:noAutofit/>
-          </a:bodyPr>
-          <a:p>
-            <a:endParaRPr b="0" lang="en-AU" sz="2400" spc="-1" strike="noStrike">
-              <a:solidFill>
-                <a:srgbClr val="000000"/>
-              </a:solidFill>
-              <a:latin typeface="Times New Roman"/>
-            </a:endParaRPr>
-          </a:p>
-        </p:txBody>
-      </p:sp>
-      <p:sp>
-        <p:nvSpPr>
-          <p:cNvPr id="128" name=""/>
+            <a:endParaRPr b="0" lang="en-AU" sz="1650" spc="-1" strike="noStrike">
+              <a:solidFill>
+                <a:srgbClr val="000000"/>
+              </a:solidFill>
+              <a:latin typeface="Times New Roman"/>
+            </a:endParaRPr>
+          </a:p>
+        </p:txBody>
+      </p:sp>
+      <p:sp>
+        <p:nvSpPr>
+          <p:cNvPr id="203" name=""/>
           <p:cNvSpPr txBox="1"/>
           <p:nvPr/>
         </p:nvSpPr>
         <p:spPr>
           <a:xfrm>
-            <a:off x="828720" y="3461760"/>
-            <a:ext cx="5532840" cy="190800"/>
+            <a:off x="799920" y="3182040"/>
+            <a:ext cx="209160" cy="254880"/>
           </a:xfrm>
           <a:prstGeom prst="rect">
             <a:avLst/>
@@ -12700,177 +16635,87 @@
           </a:bodyPr>
           <a:p>
             <a:r>
-              <a:rPr b="0" lang="en-AU" sz="1320" spc="-1" strike="noStrike">
+              <a:rPr b="1" lang="en-AU" sz="1650" spc="-1" strike="noStrike">
                 <a:solidFill>
-                  <a:srgbClr val="007a53"/>
+                  <a:srgbClr val="1e22aa"/>
                 </a:solidFill>
-                <a:latin typeface="Courier New"/>
-                <a:ea typeface="Courier New"/>
+                <a:latin typeface="Calibri"/>
+                <a:ea typeface="Calibri"/>
               </a:rPr>
-              <a:t>    ├──</a:t>
+              <a:t>2</a:t>
+            </a:r>
+            <a:endParaRPr b="0" lang="en-AU" sz="1650" spc="-1" strike="noStrike">
+              <a:solidFill>
+                <a:srgbClr val="000000"/>
+              </a:solidFill>
+              <a:latin typeface="Times New Roman"/>
+            </a:endParaRPr>
+          </a:p>
+        </p:txBody>
+      </p:sp>
+      <p:sp>
+        <p:nvSpPr>
+          <p:cNvPr id="204" name=""/>
+          <p:cNvSpPr txBox="1"/>
+          <p:nvPr/>
+        </p:nvSpPr>
+        <p:spPr>
+          <a:xfrm>
+            <a:off x="1163520" y="3182040"/>
+            <a:ext cx="4361040" cy="254880"/>
+          </a:xfrm>
+          <a:prstGeom prst="rect">
+            <a:avLst/>
+          </a:prstGeom>
+          <a:noFill/>
+          <a:ln w="0">
+            <a:noFill/>
+          </a:ln>
+        </p:spPr>
+        <p:txBody>
+          <a:bodyPr wrap="none" lIns="0" rIns="0" tIns="0" bIns="0" anchor="t">
+            <a:noAutofit/>
+          </a:bodyPr>
+          <a:p>
+            <a:r>
+              <a:rPr b="1" lang="en-AU" sz="1650" spc="-1" strike="noStrike">
+                <a:solidFill>
+                  <a:srgbClr val="1e22aa"/>
+                </a:solidFill>
+                <a:latin typeface="Calibri"/>
+                <a:ea typeface="Calibri"/>
+              </a:rPr>
+              <a:t>POST</a:t>
             </a:r>
             <a:r>
-              <a:rPr b="0" lang="en-AU" sz="1320" spc="-1" strike="noStrike">
+              <a:rPr b="0" lang="en-AU" sz="1650" spc="-1" strike="noStrike">
                 <a:solidFill>
-                  <a:srgbClr val="007a53"/>
+                  <a:srgbClr val="001d34"/>
                 </a:solidFill>
-                <a:latin typeface="Courier New"/>
-                <a:ea typeface="Courier New"/>
+                <a:latin typeface="Calibri"/>
+                <a:ea typeface="Calibri"/>
               </a:rPr>
-              <a:t>(2) POST Bundle (ServiceRequest + Task + info)──</a:t>
+              <a:t> referral Bundle (ServiceRequest + Task + info)</a:t>
             </a:r>
-            <a:endParaRPr b="0" lang="en-AU" sz="1320" spc="-1" strike="noStrike">
-              <a:solidFill>
-                <a:srgbClr val="000000"/>
-              </a:solidFill>
-              <a:latin typeface="Times New Roman"/>
-            </a:endParaRPr>
-          </a:p>
-        </p:txBody>
-      </p:sp>
-      <p:sp>
-        <p:nvSpPr>
-          <p:cNvPr id="129" name=""/>
-          <p:cNvSpPr/>
-          <p:nvPr/>
-        </p:nvSpPr>
-        <p:spPr>
-          <a:xfrm>
-            <a:off x="8270280" y="3449520"/>
-            <a:ext cx="167040" cy="167040"/>
-          </a:xfrm>
-          <a:custGeom>
-            <a:avLst/>
-            <a:gdLst/>
-            <a:ahLst/>
-            <a:rect l="0" t="0" r="r" b="b"/>
-            <a:pathLst>
-              <a:path w="464" h="464">
-                <a:moveTo>
-                  <a:pt x="0" y="413"/>
-                </a:moveTo>
-                <a:cubicBezTo>
-                  <a:pt x="0" y="441"/>
-                  <a:pt x="23" y="464"/>
-                  <a:pt x="52" y="464"/>
-                </a:cubicBezTo>
-                <a:lnTo>
-                  <a:pt x="413" y="464"/>
-                </a:lnTo>
-                <a:cubicBezTo>
-                  <a:pt x="441" y="464"/>
-                  <a:pt x="464" y="441"/>
-                  <a:pt x="464" y="413"/>
-                </a:cubicBezTo>
-                <a:lnTo>
-                  <a:pt x="464" y="51"/>
-                </a:lnTo>
-                <a:cubicBezTo>
-                  <a:pt x="464" y="23"/>
-                  <a:pt x="441" y="0"/>
-                  <a:pt x="413" y="0"/>
-                </a:cubicBezTo>
-                <a:lnTo>
-                  <a:pt x="52" y="0"/>
-                </a:lnTo>
-                <a:cubicBezTo>
-                  <a:pt x="23" y="0"/>
-                  <a:pt x="0" y="23"/>
-                  <a:pt x="0" y="51"/>
-                </a:cubicBezTo>
-                <a:lnTo>
-                  <a:pt x="0" y="413"/>
-                </a:lnTo>
-                <a:close/>
-              </a:path>
-            </a:pathLst>
-          </a:custGeom>
-          <a:solidFill>
-            <a:srgbClr val="3b88c3"/>
-          </a:solidFill>
-          <a:ln w="0">
-            <a:noFill/>
-          </a:ln>
-        </p:spPr>
-        <p:txBody>
-          <a:bodyPr lIns="0" rIns="0" tIns="0" bIns="0" anchor="t">
-            <a:noAutofit/>
-          </a:bodyPr>
-          <a:p>
-            <a:endParaRPr b="0" lang="en-AU" sz="2400" spc="-1" strike="noStrike">
-              <a:solidFill>
-                <a:srgbClr val="ffffff"/>
-              </a:solidFill>
-              <a:latin typeface="Times New Roman"/>
-            </a:endParaRPr>
-          </a:p>
-        </p:txBody>
-      </p:sp>
-      <p:sp>
-        <p:nvSpPr>
-          <p:cNvPr id="130" name=""/>
-          <p:cNvSpPr/>
-          <p:nvPr/>
-        </p:nvSpPr>
-        <p:spPr>
-          <a:xfrm>
-            <a:off x="8298000" y="3481920"/>
-            <a:ext cx="102240" cy="102240"/>
-          </a:xfrm>
-          <a:custGeom>
-            <a:avLst/>
-            <a:gdLst/>
-            <a:ahLst/>
-            <a:rect l="0" t="0" r="r" b="b"/>
-            <a:pathLst>
-              <a:path w="284" h="284">
-                <a:moveTo>
-                  <a:pt x="284" y="0"/>
-                </a:moveTo>
-                <a:lnTo>
-                  <a:pt x="0" y="142"/>
-                </a:lnTo>
-                <a:lnTo>
-                  <a:pt x="284" y="284"/>
-                </a:lnTo>
-                <a:lnTo>
-                  <a:pt x="284" y="0"/>
-                </a:lnTo>
-                <a:close/>
-              </a:path>
-            </a:pathLst>
-          </a:custGeom>
-          <a:solidFill>
-            <a:srgbClr val="ffffff"/>
-          </a:solidFill>
-          <a:ln w="0">
-            <a:noFill/>
-          </a:ln>
-        </p:spPr>
-        <p:txBody>
-          <a:bodyPr lIns="0" rIns="0" tIns="0" bIns="0" anchor="t">
-            <a:noAutofit/>
-          </a:bodyPr>
-          <a:p>
-            <a:endParaRPr b="0" lang="en-AU" sz="2400" spc="-1" strike="noStrike">
-              <a:solidFill>
-                <a:srgbClr val="000000"/>
-              </a:solidFill>
-              <a:latin typeface="Times New Roman"/>
-            </a:endParaRPr>
-          </a:p>
-        </p:txBody>
-      </p:sp>
-      <p:sp>
-        <p:nvSpPr>
-          <p:cNvPr id="131" name=""/>
+            <a:endParaRPr b="0" lang="en-AU" sz="1650" spc="-1" strike="noStrike">
+              <a:solidFill>
+                <a:srgbClr val="000000"/>
+              </a:solidFill>
+              <a:latin typeface="Times New Roman"/>
+            </a:endParaRPr>
+          </a:p>
+        </p:txBody>
+      </p:sp>
+      <p:sp>
+        <p:nvSpPr>
+          <p:cNvPr id="205" name=""/>
           <p:cNvSpPr txBox="1"/>
           <p:nvPr/>
         </p:nvSpPr>
         <p:spPr>
           <a:xfrm>
-            <a:off x="6547320" y="3461760"/>
-            <a:ext cx="1710360" cy="190800"/>
+            <a:off x="5754960" y="3182040"/>
+            <a:ext cx="2259360" cy="254880"/>
           </a:xfrm>
           <a:prstGeom prst="rect">
             <a:avLst/>
@@ -12886,44 +16731,130 @@
           </a:bodyPr>
           <a:p>
             <a:r>
-              <a:rPr b="0" lang="en-AU" sz="1320" spc="-1" strike="noStrike">
+              <a:rPr b="0" lang="en-AU" sz="1650" spc="-1" strike="noStrike">
                 <a:solidFill>
-                  <a:srgbClr val="007a53"/>
+                  <a:srgbClr val="001d34"/>
                 </a:solidFill>
-                <a:latin typeface="Courier New"/>
-                <a:ea typeface="Courier New"/>
+                <a:latin typeface="Calibri"/>
+                <a:ea typeface="Calibri"/>
               </a:rPr>
-              <a:t> </a:t>
+              <a:t>Referrer → Referral Server</a:t>
+            </a:r>
+            <a:endParaRPr b="0" lang="en-AU" sz="1650" spc="-1" strike="noStrike">
+              <a:solidFill>
+                <a:srgbClr val="000000"/>
+              </a:solidFill>
+              <a:latin typeface="Times New Roman"/>
+            </a:endParaRPr>
+          </a:p>
+        </p:txBody>
+      </p:sp>
+      <p:sp>
+        <p:nvSpPr>
+          <p:cNvPr id="206" name=""/>
+          <p:cNvSpPr txBox="1"/>
+          <p:nvPr/>
+        </p:nvSpPr>
+        <p:spPr>
+          <a:xfrm>
+            <a:off x="799920" y="3620160"/>
+            <a:ext cx="209160" cy="254880"/>
+          </a:xfrm>
+          <a:prstGeom prst="rect">
+            <a:avLst/>
+          </a:prstGeom>
+          <a:noFill/>
+          <a:ln w="0">
+            <a:noFill/>
+          </a:ln>
+        </p:spPr>
+        <p:txBody>
+          <a:bodyPr wrap="none" lIns="0" rIns="0" tIns="0" bIns="0" anchor="t">
+            <a:noAutofit/>
+          </a:bodyPr>
+          <a:p>
+            <a:r>
+              <a:rPr b="1" lang="en-AU" sz="1650" spc="-1" strike="noStrike">
+                <a:solidFill>
+                  <a:srgbClr val="1e22aa"/>
+                </a:solidFill>
+                <a:latin typeface="Calibri"/>
+                <a:ea typeface="Calibri"/>
+              </a:rPr>
+              <a:t>3</a:t>
+            </a:r>
+            <a:endParaRPr b="0" lang="en-AU" sz="1650" spc="-1" strike="noStrike">
+              <a:solidFill>
+                <a:srgbClr val="000000"/>
+              </a:solidFill>
+              <a:latin typeface="Times New Roman"/>
+            </a:endParaRPr>
+          </a:p>
+        </p:txBody>
+      </p:sp>
+      <p:sp>
+        <p:nvSpPr>
+          <p:cNvPr id="207" name=""/>
+          <p:cNvSpPr txBox="1"/>
+          <p:nvPr/>
+        </p:nvSpPr>
+        <p:spPr>
+          <a:xfrm>
+            <a:off x="1163520" y="3620160"/>
+            <a:ext cx="2800440" cy="254880"/>
+          </a:xfrm>
+          <a:prstGeom prst="rect">
+            <a:avLst/>
+          </a:prstGeom>
+          <a:noFill/>
+          <a:ln w="0">
+            <a:noFill/>
+          </a:ln>
+        </p:spPr>
+        <p:txBody>
+          <a:bodyPr wrap="none" lIns="0" rIns="0" tIns="0" bIns="0" anchor="t">
+            <a:noAutofit/>
+          </a:bodyPr>
+          <a:p>
+            <a:r>
+              <a:rPr b="1" lang="en-AU" sz="1650" spc="-1" strike="noStrike">
+                <a:solidFill>
+                  <a:srgbClr val="1e22aa"/>
+                </a:solidFill>
+                <a:latin typeface="Calibri"/>
+                <a:ea typeface="Calibri"/>
+              </a:rPr>
+              <a:t>Poll / subscribe</a:t>
             </a:r>
             <a:r>
-              <a:rPr b="0" lang="en-AU" sz="1320" spc="-1" strike="noStrike">
+              <a:rPr b="0" lang="en-AU" sz="1650" spc="-1" strike="noStrike">
                 <a:solidFill>
-                  <a:srgbClr val="007a53"/>
+                  <a:srgbClr val="001d34"/>
                 </a:solidFill>
-                <a:latin typeface="Courier New"/>
-                <a:ea typeface="Courier New"/>
+                <a:latin typeface="Calibri"/>
+                <a:ea typeface="Calibri"/>
               </a:rPr>
-              <a:t>Referral Server </a:t>
+              <a:t> for new referrals</a:t>
             </a:r>
-            <a:endParaRPr b="0" lang="en-AU" sz="1320" spc="-1" strike="noStrike">
-              <a:solidFill>
-                <a:srgbClr val="000000"/>
-              </a:solidFill>
-              <a:latin typeface="Times New Roman"/>
-            </a:endParaRPr>
-          </a:p>
-        </p:txBody>
-      </p:sp>
-      <p:sp>
-        <p:nvSpPr>
-          <p:cNvPr id="132" name=""/>
+            <a:endParaRPr b="0" lang="en-AU" sz="1650" spc="-1" strike="noStrike">
+              <a:solidFill>
+                <a:srgbClr val="000000"/>
+              </a:solidFill>
+              <a:latin typeface="Times New Roman"/>
+            </a:endParaRPr>
+          </a:p>
+        </p:txBody>
+      </p:sp>
+      <p:sp>
+        <p:nvSpPr>
+          <p:cNvPr id="208" name=""/>
           <p:cNvSpPr txBox="1"/>
           <p:nvPr/>
         </p:nvSpPr>
         <p:spPr>
           <a:xfrm>
-            <a:off x="8447760" y="3461760"/>
-            <a:ext cx="2917800" cy="190800"/>
+            <a:off x="5754960" y="3620160"/>
+            <a:ext cx="2992320" cy="254880"/>
           </a:xfrm>
           <a:prstGeom prst="rect">
             <a:avLst/>
@@ -12939,44 +16870,140 @@
           </a:bodyPr>
           <a:p>
             <a:r>
-              <a:rPr b="0" lang="en-AU" sz="1320" spc="-1" strike="noStrike">
+              <a:rPr b="0" lang="en-AU" sz="1650" spc="-1" strike="noStrike">
                 <a:solidFill>
-                  <a:srgbClr val="007a53"/>
+                  <a:srgbClr val="001d34"/>
                 </a:solidFill>
-                <a:latin typeface="Courier New"/>
-                <a:ea typeface="Courier New"/>
+                <a:latin typeface="Calibri"/>
+                <a:ea typeface="Calibri"/>
               </a:rPr>
-              <a:t>──</a:t>
+              <a:t>Imaging Provider → Referral Server</a:t>
+            </a:r>
+            <a:endParaRPr b="0" lang="en-AU" sz="1650" spc="-1" strike="noStrike">
+              <a:solidFill>
+                <a:srgbClr val="000000"/>
+              </a:solidFill>
+              <a:latin typeface="Times New Roman"/>
+            </a:endParaRPr>
+          </a:p>
+        </p:txBody>
+      </p:sp>
+      <p:sp>
+        <p:nvSpPr>
+          <p:cNvPr id="209" name=""/>
+          <p:cNvSpPr txBox="1"/>
+          <p:nvPr/>
+        </p:nvSpPr>
+        <p:spPr>
+          <a:xfrm>
+            <a:off x="799920" y="4058280"/>
+            <a:ext cx="209160" cy="254880"/>
+          </a:xfrm>
+          <a:prstGeom prst="rect">
+            <a:avLst/>
+          </a:prstGeom>
+          <a:noFill/>
+          <a:ln w="0">
+            <a:noFill/>
+          </a:ln>
+        </p:spPr>
+        <p:txBody>
+          <a:bodyPr wrap="none" lIns="0" rIns="0" tIns="0" bIns="0" anchor="t">
+            <a:noAutofit/>
+          </a:bodyPr>
+          <a:p>
+            <a:r>
+              <a:rPr b="1" lang="en-AU" sz="1650" spc="-1" strike="noStrike">
+                <a:solidFill>
+                  <a:srgbClr val="1e22aa"/>
+                </a:solidFill>
+                <a:latin typeface="Calibri"/>
+                <a:ea typeface="Calibri"/>
+              </a:rPr>
+              <a:t>4</a:t>
+            </a:r>
+            <a:endParaRPr b="0" lang="en-AU" sz="1650" spc="-1" strike="noStrike">
+              <a:solidFill>
+                <a:srgbClr val="000000"/>
+              </a:solidFill>
+              <a:latin typeface="Times New Roman"/>
+            </a:endParaRPr>
+          </a:p>
+        </p:txBody>
+      </p:sp>
+      <p:sp>
+        <p:nvSpPr>
+          <p:cNvPr id="210" name=""/>
+          <p:cNvSpPr txBox="1"/>
+          <p:nvPr/>
+        </p:nvSpPr>
+        <p:spPr>
+          <a:xfrm>
+            <a:off x="1163520" y="4058280"/>
+            <a:ext cx="3073320" cy="254880"/>
+          </a:xfrm>
+          <a:prstGeom prst="rect">
+            <a:avLst/>
+          </a:prstGeom>
+          <a:noFill/>
+          <a:ln w="0">
+            <a:noFill/>
+          </a:ln>
+        </p:spPr>
+        <p:txBody>
+          <a:bodyPr wrap="none" lIns="0" rIns="0" tIns="0" bIns="0" anchor="t">
+            <a:noAutofit/>
+          </a:bodyPr>
+          <a:p>
+            <a:r>
+              <a:rPr b="1" lang="en-AU" sz="1650" spc="-1" strike="noStrike">
+                <a:solidFill>
+                  <a:srgbClr val="1e22aa"/>
+                </a:solidFill>
+                <a:latin typeface="Calibri"/>
+                <a:ea typeface="Calibri"/>
+              </a:rPr>
+              <a:t>Publish</a:t>
             </a:r>
             <a:r>
-              <a:rPr b="0" lang="en-AU" sz="1320" spc="-1" strike="noStrike">
+              <a:rPr b="0" lang="en-AU" sz="1650" spc="-1" strike="noStrike">
                 <a:solidFill>
-                  <a:srgbClr val="007a53"/>
+                  <a:srgbClr val="001d34"/>
                 </a:solidFill>
-                <a:latin typeface="Courier New"/>
-                <a:ea typeface="Courier New"/>
+                <a:latin typeface="Calibri"/>
+                <a:ea typeface="Calibri"/>
               </a:rPr>
-              <a:t>(3) poll── Imaging Provider</a:t>
+              <a:t> availability, then </a:t>
             </a:r>
-            <a:endParaRPr b="0" lang="en-AU" sz="1320" spc="-1" strike="noStrike">
-              <a:solidFill>
-                <a:srgbClr val="000000"/>
-              </a:solidFill>
-              <a:latin typeface="Times New Roman"/>
-            </a:endParaRPr>
-          </a:p>
-        </p:txBody>
-      </p:sp>
-      <p:sp>
-        <p:nvSpPr>
-          <p:cNvPr id="133" name=""/>
+            <a:r>
+              <a:rPr b="1" lang="en-AU" sz="1650" spc="-1" strike="noStrike">
+                <a:solidFill>
+                  <a:srgbClr val="1e22aa"/>
+                </a:solidFill>
+                <a:latin typeface="Calibri"/>
+                <a:ea typeface="Calibri"/>
+              </a:rPr>
+              <a:t>search Slot</a:t>
+            </a:r>
+            <a:endParaRPr b="0" lang="en-AU" sz="1650" spc="-1" strike="noStrike">
+              <a:solidFill>
+                <a:srgbClr val="000000"/>
+              </a:solidFill>
+              <a:latin typeface="Times New Roman"/>
+            </a:endParaRPr>
+          </a:p>
+        </p:txBody>
+      </p:sp>
+      <p:sp>
+        <p:nvSpPr>
+          <p:cNvPr id="211" name=""/>
           <p:cNvSpPr txBox="1"/>
           <p:nvPr/>
         </p:nvSpPr>
         <p:spPr>
           <a:xfrm>
-            <a:off x="828720" y="3651120"/>
-            <a:ext cx="8952840" cy="190800"/>
+            <a:off x="5754960" y="4058280"/>
+            <a:ext cx="3211920" cy="254880"/>
           </a:xfrm>
           <a:prstGeom prst="rect">
             <a:avLst/>
@@ -12992,167 +17019,34 @@
           </a:bodyPr>
           <a:p>
             <a:r>
-              <a:rPr b="0" lang="en-AU" sz="1320" spc="-1" strike="noStrike">
+              <a:rPr b="0" lang="en-AU" sz="1650" spc="-1" strike="noStrike">
                 <a:solidFill>
-                  <a:srgbClr val="007a53"/>
+                  <a:srgbClr val="001d34"/>
                 </a:solidFill>
-                <a:latin typeface="Courier New"/>
-                <a:ea typeface="Courier New"/>
+                <a:latin typeface="Calibri"/>
+                <a:ea typeface="Calibri"/>
               </a:rPr>
-              <a:t>    │                                                        ▲                          │</a:t>
+              <a:t>Provider publishes · Referrer searches</a:t>
             </a:r>
-            <a:endParaRPr b="0" lang="en-AU" sz="1320" spc="-1" strike="noStrike">
-              <a:solidFill>
-                <a:srgbClr val="000000"/>
-              </a:solidFill>
-              <a:latin typeface="Times New Roman"/>
-            </a:endParaRPr>
-          </a:p>
-        </p:txBody>
-      </p:sp>
-      <p:sp>
-        <p:nvSpPr>
-          <p:cNvPr id="134" name=""/>
-          <p:cNvSpPr/>
-          <p:nvPr/>
-        </p:nvSpPr>
-        <p:spPr>
-          <a:xfrm>
-            <a:off x="7171560" y="3843360"/>
-            <a:ext cx="174600" cy="174960"/>
-          </a:xfrm>
-          <a:custGeom>
-            <a:avLst/>
-            <a:gdLst/>
-            <a:ahLst/>
-            <a:rect l="0" t="0" r="r" b="b"/>
-            <a:pathLst>
-              <a:path w="485" h="486">
-                <a:moveTo>
-                  <a:pt x="0" y="432"/>
-                </a:moveTo>
-                <a:cubicBezTo>
-                  <a:pt x="0" y="462"/>
-                  <a:pt x="24" y="486"/>
-                  <a:pt x="54" y="486"/>
-                </a:cubicBezTo>
-                <a:lnTo>
-                  <a:pt x="431" y="486"/>
-                </a:lnTo>
-                <a:cubicBezTo>
-                  <a:pt x="461" y="486"/>
-                  <a:pt x="485" y="462"/>
-                  <a:pt x="485" y="432"/>
-                </a:cubicBezTo>
-                <a:lnTo>
-                  <a:pt x="485" y="54"/>
-                </a:lnTo>
-                <a:cubicBezTo>
-                  <a:pt x="485" y="25"/>
-                  <a:pt x="461" y="0"/>
-                  <a:pt x="431" y="0"/>
-                </a:cubicBezTo>
-                <a:lnTo>
-                  <a:pt x="54" y="0"/>
-                </a:lnTo>
-                <a:cubicBezTo>
-                  <a:pt x="24" y="0"/>
-                  <a:pt x="0" y="25"/>
-                  <a:pt x="0" y="54"/>
-                </a:cubicBezTo>
-                <a:lnTo>
-                  <a:pt x="0" y="432"/>
-                </a:lnTo>
-                <a:close/>
-              </a:path>
-            </a:pathLst>
-          </a:custGeom>
-          <a:solidFill>
-            <a:srgbClr val="3b88c3"/>
-          </a:solidFill>
-          <a:ln w="0">
-            <a:noFill/>
-          </a:ln>
-        </p:spPr>
-        <p:txBody>
-          <a:bodyPr lIns="0" rIns="0" tIns="0" bIns="0" anchor="t">
-            <a:noAutofit/>
-          </a:bodyPr>
-          <a:p>
-            <a:endParaRPr b="0" lang="en-AU" sz="2400" spc="-1" strike="noStrike">
-              <a:solidFill>
-                <a:srgbClr val="ffffff"/>
-              </a:solidFill>
-              <a:latin typeface="Times New Roman"/>
-            </a:endParaRPr>
-          </a:p>
-        </p:txBody>
-      </p:sp>
-      <p:sp>
-        <p:nvSpPr>
-          <p:cNvPr id="135" name=""/>
-          <p:cNvSpPr/>
-          <p:nvPr/>
-        </p:nvSpPr>
-        <p:spPr>
-          <a:xfrm>
-            <a:off x="7200360" y="3877560"/>
-            <a:ext cx="106920" cy="106920"/>
-          </a:xfrm>
-          <a:custGeom>
-            <a:avLst/>
-            <a:gdLst/>
-            <a:ahLst/>
-            <a:rect l="0" t="0" r="r" b="b"/>
-            <a:pathLst>
-              <a:path w="297" h="297">
-                <a:moveTo>
-                  <a:pt x="297" y="0"/>
-                </a:moveTo>
-                <a:lnTo>
-                  <a:pt x="0" y="148"/>
-                </a:lnTo>
-                <a:lnTo>
-                  <a:pt x="297" y="297"/>
-                </a:lnTo>
-                <a:lnTo>
-                  <a:pt x="297" y="0"/>
-                </a:lnTo>
-                <a:close/>
-              </a:path>
-            </a:pathLst>
-          </a:custGeom>
-          <a:solidFill>
-            <a:srgbClr val="ffffff"/>
-          </a:solidFill>
-          <a:ln w="0">
-            <a:noFill/>
-          </a:ln>
-        </p:spPr>
-        <p:txBody>
-          <a:bodyPr lIns="0" rIns="0" tIns="0" bIns="0" anchor="t">
-            <a:noAutofit/>
-          </a:bodyPr>
-          <a:p>
-            <a:endParaRPr b="0" lang="en-AU" sz="2400" spc="-1" strike="noStrike">
-              <a:solidFill>
-                <a:srgbClr val="000000"/>
-              </a:solidFill>
-              <a:latin typeface="Times New Roman"/>
-            </a:endParaRPr>
-          </a:p>
-        </p:txBody>
-      </p:sp>
-      <p:sp>
-        <p:nvSpPr>
-          <p:cNvPr id="136" name=""/>
+            <a:endParaRPr b="0" lang="en-AU" sz="1650" spc="-1" strike="noStrike">
+              <a:solidFill>
+                <a:srgbClr val="000000"/>
+              </a:solidFill>
+              <a:latin typeface="Times New Roman"/>
+            </a:endParaRPr>
+          </a:p>
+        </p:txBody>
+      </p:sp>
+      <p:sp>
+        <p:nvSpPr>
+          <p:cNvPr id="212" name=""/>
           <p:cNvSpPr txBox="1"/>
           <p:nvPr/>
         </p:nvSpPr>
         <p:spPr>
           <a:xfrm>
-            <a:off x="828720" y="3855600"/>
-            <a:ext cx="6337440" cy="190800"/>
+            <a:off x="799920" y="4496400"/>
+            <a:ext cx="209160" cy="254880"/>
           </a:xfrm>
           <a:prstGeom prst="rect">
             <a:avLst/>
@@ -13168,44 +17062,87 @@
           </a:bodyPr>
           <a:p>
             <a:r>
-              <a:rPr b="0" lang="en-AU" sz="1320" spc="-1" strike="noStrike">
+              <a:rPr b="1" lang="en-AU" sz="1650" spc="-1" strike="noStrike">
                 <a:solidFill>
-                  <a:srgbClr val="007a53"/>
+                  <a:srgbClr val="1e22aa"/>
                 </a:solidFill>
-                <a:latin typeface="Courier New"/>
-                <a:ea typeface="Courier New"/>
+                <a:latin typeface="Calibri"/>
+                <a:ea typeface="Calibri"/>
               </a:rPr>
-              <a:t>    ├──</a:t>
+              <a:t>5</a:t>
+            </a:r>
+            <a:endParaRPr b="0" lang="en-AU" sz="1650" spc="-1" strike="noStrike">
+              <a:solidFill>
+                <a:srgbClr val="000000"/>
+              </a:solidFill>
+              <a:latin typeface="Times New Roman"/>
+            </a:endParaRPr>
+          </a:p>
+        </p:txBody>
+      </p:sp>
+      <p:sp>
+        <p:nvSpPr>
+          <p:cNvPr id="213" name=""/>
+          <p:cNvSpPr txBox="1"/>
+          <p:nvPr/>
+        </p:nvSpPr>
+        <p:spPr>
+          <a:xfrm>
+            <a:off x="1163520" y="4496400"/>
+            <a:ext cx="2611440" cy="254880"/>
+          </a:xfrm>
+          <a:prstGeom prst="rect">
+            <a:avLst/>
+          </a:prstGeom>
+          <a:noFill/>
+          <a:ln w="0">
+            <a:noFill/>
+          </a:ln>
+        </p:spPr>
+        <p:txBody>
+          <a:bodyPr wrap="none" lIns="0" rIns="0" tIns="0" bIns="0" anchor="t">
+            <a:noAutofit/>
+          </a:bodyPr>
+          <a:p>
+            <a:r>
+              <a:rPr b="1" lang="en-AU" sz="1650" spc="-1" strike="noStrike">
+                <a:solidFill>
+                  <a:srgbClr val="1e22aa"/>
+                </a:solidFill>
+                <a:latin typeface="Calibri"/>
+                <a:ea typeface="Calibri"/>
+              </a:rPr>
+              <a:t>POST</a:t>
             </a:r>
             <a:r>
-              <a:rPr b="0" lang="en-AU" sz="1320" spc="-1" strike="noStrike">
+              <a:rPr b="0" lang="en-AU" sz="1650" spc="-1" strike="noStrike">
                 <a:solidFill>
-                  <a:srgbClr val="007a53"/>
+                  <a:srgbClr val="001d34"/>
                 </a:solidFill>
-                <a:latin typeface="Courier New"/>
-                <a:ea typeface="Courier New"/>
+                <a:latin typeface="Calibri"/>
+                <a:ea typeface="Calibri"/>
               </a:rPr>
-              <a:t>(4) search Slot ───────────────────────────────────────┤</a:t>
+              <a:t> Appointment (proposed)</a:t>
             </a:r>
-            <a:endParaRPr b="0" lang="en-AU" sz="1320" spc="-1" strike="noStrike">
-              <a:solidFill>
-                <a:srgbClr val="000000"/>
-              </a:solidFill>
-              <a:latin typeface="Times New Roman"/>
-            </a:endParaRPr>
-          </a:p>
-        </p:txBody>
-      </p:sp>
-      <p:sp>
-        <p:nvSpPr>
-          <p:cNvPr id="137" name=""/>
+            <a:endParaRPr b="0" lang="en-AU" sz="1650" spc="-1" strike="noStrike">
+              <a:solidFill>
+                <a:srgbClr val="000000"/>
+              </a:solidFill>
+              <a:latin typeface="Times New Roman"/>
+            </a:endParaRPr>
+          </a:p>
+        </p:txBody>
+      </p:sp>
+      <p:sp>
+        <p:nvSpPr>
+          <p:cNvPr id="214" name=""/>
           <p:cNvSpPr txBox="1"/>
           <p:nvPr/>
         </p:nvSpPr>
         <p:spPr>
           <a:xfrm>
-            <a:off x="7351200" y="3855600"/>
-            <a:ext cx="2817000" cy="190800"/>
+            <a:off x="5754960" y="4496400"/>
+            <a:ext cx="2259360" cy="254880"/>
           </a:xfrm>
           <a:prstGeom prst="rect">
             <a:avLst/>
@@ -13221,44 +17158,150 @@
           </a:bodyPr>
           <a:p>
             <a:r>
-              <a:rPr b="0" lang="en-AU" sz="1320" spc="-1" strike="noStrike">
+              <a:rPr b="0" lang="en-AU" sz="1650" spc="-1" strike="noStrike">
                 <a:solidFill>
-                  <a:srgbClr val="007a53"/>
+                  <a:srgbClr val="001d34"/>
                 </a:solidFill>
-                <a:latin typeface="Courier New"/>
-                <a:ea typeface="Courier New"/>
+                <a:latin typeface="Calibri"/>
+                <a:ea typeface="Calibri"/>
               </a:rPr>
-              <a:t>── </a:t>
+              <a:t>Referrer → Referral Server</a:t>
+            </a:r>
+            <a:endParaRPr b="0" lang="en-AU" sz="1650" spc="-1" strike="noStrike">
+              <a:solidFill>
+                <a:srgbClr val="000000"/>
+              </a:solidFill>
+              <a:latin typeface="Times New Roman"/>
+            </a:endParaRPr>
+          </a:p>
+        </p:txBody>
+      </p:sp>
+      <p:sp>
+        <p:nvSpPr>
+          <p:cNvPr id="215" name=""/>
+          <p:cNvSpPr txBox="1"/>
+          <p:nvPr/>
+        </p:nvSpPr>
+        <p:spPr>
+          <a:xfrm>
+            <a:off x="799920" y="4934520"/>
+            <a:ext cx="209160" cy="254880"/>
+          </a:xfrm>
+          <a:prstGeom prst="rect">
+            <a:avLst/>
+          </a:prstGeom>
+          <a:noFill/>
+          <a:ln w="0">
+            <a:noFill/>
+          </a:ln>
+        </p:spPr>
+        <p:txBody>
+          <a:bodyPr wrap="none" lIns="0" rIns="0" tIns="0" bIns="0" anchor="t">
+            <a:noAutofit/>
+          </a:bodyPr>
+          <a:p>
+            <a:r>
+              <a:rPr b="1" lang="en-AU" sz="1650" spc="-1" strike="noStrike">
+                <a:solidFill>
+                  <a:srgbClr val="1e22aa"/>
+                </a:solidFill>
+                <a:latin typeface="Calibri"/>
+                <a:ea typeface="Calibri"/>
+              </a:rPr>
+              <a:t>6</a:t>
+            </a:r>
+            <a:endParaRPr b="0" lang="en-AU" sz="1650" spc="-1" strike="noStrike">
+              <a:solidFill>
+                <a:srgbClr val="000000"/>
+              </a:solidFill>
+              <a:latin typeface="Times New Roman"/>
+            </a:endParaRPr>
+          </a:p>
+        </p:txBody>
+      </p:sp>
+      <p:sp>
+        <p:nvSpPr>
+          <p:cNvPr id="216" name=""/>
+          <p:cNvSpPr txBox="1"/>
+          <p:nvPr/>
+        </p:nvSpPr>
+        <p:spPr>
+          <a:xfrm>
+            <a:off x="1163520" y="4934520"/>
+            <a:ext cx="3771000" cy="254880"/>
+          </a:xfrm>
+          <a:prstGeom prst="rect">
+            <a:avLst/>
+          </a:prstGeom>
+          <a:noFill/>
+          <a:ln w="0">
+            <a:noFill/>
+          </a:ln>
+        </p:spPr>
+        <p:txBody>
+          <a:bodyPr wrap="none" lIns="0" rIns="0" tIns="0" bIns="0" anchor="t">
+            <a:noAutofit/>
+          </a:bodyPr>
+          <a:p>
+            <a:r>
+              <a:rPr b="1" lang="en-AU" sz="1650" spc="-1" strike="noStrike">
+                <a:solidFill>
+                  <a:srgbClr val="1e22aa"/>
+                </a:solidFill>
+                <a:latin typeface="Calibri"/>
+                <a:ea typeface="Calibri"/>
+              </a:rPr>
+              <a:t>Accept</a:t>
             </a:r>
             <a:r>
-              <a:rPr b="0" lang="en-AU" sz="1320" spc="-1" strike="noStrike">
+              <a:rPr b="0" lang="en-AU" sz="1650" spc="-1" strike="noStrike">
                 <a:solidFill>
-                  <a:srgbClr val="007a53"/>
+                  <a:srgbClr val="001d34"/>
                 </a:solidFill>
-                <a:latin typeface="Courier New"/>
-                <a:ea typeface="Courier New"/>
+                <a:latin typeface="Calibri"/>
+                <a:ea typeface="Calibri"/>
               </a:rPr>
-              <a:t>publishes Schedule/Slot ┤</a:t>
+              <a:t> Task, </a:t>
             </a:r>
-            <a:endParaRPr b="0" lang="en-AU" sz="1320" spc="-1" strike="noStrike">
-              <a:solidFill>
-                <a:srgbClr val="000000"/>
-              </a:solidFill>
-              <a:latin typeface="Times New Roman"/>
-            </a:endParaRPr>
-          </a:p>
-        </p:txBody>
-      </p:sp>
-      <p:sp>
-        <p:nvSpPr>
-          <p:cNvPr id="138" name=""/>
+            <a:r>
+              <a:rPr b="1" lang="en-AU" sz="1650" spc="-1" strike="noStrike">
+                <a:solidFill>
+                  <a:srgbClr val="1e22aa"/>
+                </a:solidFill>
+                <a:latin typeface="Calibri"/>
+                <a:ea typeface="Calibri"/>
+              </a:rPr>
+              <a:t>book</a:t>
+            </a:r>
+            <a:r>
+              <a:rPr b="0" lang="en-AU" sz="1650" spc="-1" strike="noStrike">
+                <a:solidFill>
+                  <a:srgbClr val="001d34"/>
+                </a:solidFill>
+                <a:latin typeface="Calibri"/>
+                <a:ea typeface="Calibri"/>
+              </a:rPr>
+              <a:t> Appointment, read status</a:t>
+            </a:r>
+            <a:endParaRPr b="0" lang="en-AU" sz="1650" spc="-1" strike="noStrike">
+              <a:solidFill>
+                <a:srgbClr val="000000"/>
+              </a:solidFill>
+              <a:latin typeface="Times New Roman"/>
+            </a:endParaRPr>
+          </a:p>
+        </p:txBody>
+      </p:sp>
+      <p:sp>
+        <p:nvSpPr>
+          <p:cNvPr id="217" name=""/>
           <p:cNvSpPr txBox="1"/>
           <p:nvPr/>
         </p:nvSpPr>
         <p:spPr>
           <a:xfrm>
-            <a:off x="828720" y="4052880"/>
-            <a:ext cx="9053280" cy="190800"/>
+            <a:off x="5754960" y="4934520"/>
+            <a:ext cx="2914560" cy="254880"/>
           </a:xfrm>
           <a:prstGeom prst="rect">
             <a:avLst/>
@@ -13274,177 +17317,34 @@
           </a:bodyPr>
           <a:p>
             <a:r>
-              <a:rPr b="0" lang="en-AU" sz="1320" spc="-1" strike="noStrike">
+              <a:rPr b="0" lang="en-AU" sz="1650" spc="-1" strike="noStrike">
                 <a:solidFill>
-                  <a:srgbClr val="007a53"/>
+                  <a:srgbClr val="001d34"/>
                 </a:solidFill>
-                <a:latin typeface="Courier New"/>
-                <a:ea typeface="Courier New"/>
+                <a:latin typeface="Calibri"/>
+                <a:ea typeface="Calibri"/>
               </a:rPr>
-              <a:t>    ├──</a:t>
+              <a:t>Provider conﬁrms · Referrer tracks</a:t>
             </a:r>
-            <a:r>
-              <a:rPr b="0" lang="en-AU" sz="1320" spc="-1" strike="noStrike">
-                <a:solidFill>
-                  <a:srgbClr val="007a53"/>
-                </a:solidFill>
-                <a:latin typeface="Courier New"/>
-                <a:ea typeface="Courier New"/>
-              </a:rPr>
-              <a:t>(5) POST Appointment (proposed) ───────────────────────┤                          │</a:t>
-            </a:r>
-            <a:endParaRPr b="0" lang="en-AU" sz="1320" spc="-1" strike="noStrike">
-              <a:solidFill>
-                <a:srgbClr val="000000"/>
-              </a:solidFill>
-              <a:latin typeface="Times New Roman"/>
-            </a:endParaRPr>
-          </a:p>
-        </p:txBody>
-      </p:sp>
-      <p:sp>
-        <p:nvSpPr>
-          <p:cNvPr id="139" name=""/>
-          <p:cNvSpPr/>
-          <p:nvPr/>
-        </p:nvSpPr>
-        <p:spPr>
-          <a:xfrm>
-            <a:off x="7171560" y="4245120"/>
-            <a:ext cx="174600" cy="167040"/>
-          </a:xfrm>
-          <a:custGeom>
-            <a:avLst/>
-            <a:gdLst/>
-            <a:ahLst/>
-            <a:rect l="0" t="0" r="r" b="b"/>
-            <a:pathLst>
-              <a:path w="485" h="464">
-                <a:moveTo>
-                  <a:pt x="0" y="413"/>
-                </a:moveTo>
-                <a:cubicBezTo>
-                  <a:pt x="0" y="441"/>
-                  <a:pt x="24" y="464"/>
-                  <a:pt x="54" y="464"/>
-                </a:cubicBezTo>
-                <a:lnTo>
-                  <a:pt x="431" y="464"/>
-                </a:lnTo>
-                <a:cubicBezTo>
-                  <a:pt x="461" y="464"/>
-                  <a:pt x="485" y="441"/>
-                  <a:pt x="485" y="413"/>
-                </a:cubicBezTo>
-                <a:lnTo>
-                  <a:pt x="485" y="53"/>
-                </a:lnTo>
-                <a:cubicBezTo>
-                  <a:pt x="485" y="24"/>
-                  <a:pt x="461" y="0"/>
-                  <a:pt x="431" y="0"/>
-                </a:cubicBezTo>
-                <a:lnTo>
-                  <a:pt x="54" y="0"/>
-                </a:lnTo>
-                <a:cubicBezTo>
-                  <a:pt x="24" y="0"/>
-                  <a:pt x="0" y="24"/>
-                  <a:pt x="0" y="53"/>
-                </a:cubicBezTo>
-                <a:lnTo>
-                  <a:pt x="0" y="413"/>
-                </a:lnTo>
-                <a:close/>
-              </a:path>
-            </a:pathLst>
-          </a:custGeom>
-          <a:solidFill>
-            <a:srgbClr val="3b88c3"/>
-          </a:solidFill>
-          <a:ln w="0">
-            <a:noFill/>
-          </a:ln>
-        </p:spPr>
-        <p:txBody>
-          <a:bodyPr lIns="0" rIns="0" tIns="0" bIns="0" anchor="t">
-            <a:noAutofit/>
-          </a:bodyPr>
-          <a:p>
-            <a:endParaRPr b="0" lang="en-AU" sz="2400" spc="-1" strike="noStrike">
-              <a:solidFill>
-                <a:srgbClr val="ffffff"/>
-              </a:solidFill>
-              <a:latin typeface="Times New Roman"/>
-            </a:endParaRPr>
-          </a:p>
-        </p:txBody>
-      </p:sp>
-      <p:sp>
-        <p:nvSpPr>
-          <p:cNvPr id="140" name=""/>
-          <p:cNvSpPr/>
-          <p:nvPr/>
-        </p:nvSpPr>
-        <p:spPr>
-          <a:xfrm>
-            <a:off x="7200360" y="4277520"/>
-            <a:ext cx="106920" cy="102240"/>
-          </a:xfrm>
-          <a:custGeom>
-            <a:avLst/>
-            <a:gdLst/>
-            <a:ahLst/>
-            <a:rect l="0" t="0" r="r" b="b"/>
-            <a:pathLst>
-              <a:path w="297" h="284">
-                <a:moveTo>
-                  <a:pt x="297" y="0"/>
-                </a:moveTo>
-                <a:lnTo>
-                  <a:pt x="0" y="142"/>
-                </a:lnTo>
-                <a:lnTo>
-                  <a:pt x="297" y="284"/>
-                </a:lnTo>
-                <a:lnTo>
-                  <a:pt x="297" y="0"/>
-                </a:lnTo>
-                <a:close/>
-              </a:path>
-            </a:pathLst>
-          </a:custGeom>
-          <a:solidFill>
-            <a:srgbClr val="ffffff"/>
-          </a:solidFill>
-          <a:ln w="0">
-            <a:noFill/>
-          </a:ln>
-        </p:spPr>
-        <p:txBody>
-          <a:bodyPr lIns="0" rIns="0" tIns="0" bIns="0" anchor="t">
-            <a:noAutofit/>
-          </a:bodyPr>
-          <a:p>
-            <a:endParaRPr b="0" lang="en-AU" sz="2400" spc="-1" strike="noStrike">
-              <a:solidFill>
-                <a:srgbClr val="000000"/>
-              </a:solidFill>
-              <a:latin typeface="Times New Roman"/>
-            </a:endParaRPr>
-          </a:p>
-        </p:txBody>
-      </p:sp>
-      <p:sp>
-        <p:nvSpPr>
-          <p:cNvPr id="141" name=""/>
+            <a:endParaRPr b="0" lang="en-AU" sz="1650" spc="-1" strike="noStrike">
+              <a:solidFill>
+                <a:srgbClr val="000000"/>
+              </a:solidFill>
+              <a:latin typeface="Times New Roman"/>
+            </a:endParaRPr>
+          </a:p>
+        </p:txBody>
+      </p:sp>
+      <p:sp>
+        <p:nvSpPr>
+          <p:cNvPr id="218" name=""/>
           <p:cNvSpPr txBox="1"/>
           <p:nvPr/>
         </p:nvSpPr>
         <p:spPr>
           <a:xfrm>
-            <a:off x="828720" y="4257360"/>
-            <a:ext cx="6337440" cy="190800"/>
+            <a:off x="971640" y="5469840"/>
+            <a:ext cx="7395120" cy="303480"/>
           </a:xfrm>
           <a:prstGeom prst="rect">
             <a:avLst/>
@@ -13460,90 +17360,27 @@
           </a:bodyPr>
           <a:p>
             <a:r>
-              <a:rPr b="0" lang="en-AU" sz="1320" spc="-1" strike="noStrike">
+              <a:rPr b="0" lang="en-AU" sz="1950" spc="-1" strike="noStrike">
                 <a:solidFill>
-                  <a:srgbClr val="007a53"/>
+                  <a:srgbClr val="59636e"/>
                 </a:solidFill>
-                <a:latin typeface="Courier New"/>
-                <a:ea typeface="Courier New"/>
+                <a:latin typeface="Calibri"/>
+                <a:ea typeface="Calibri"/>
               </a:rPr>
-              <a:t>    └──</a:t>
+              <a:t>Discovery → request → triage → book → track — one continuous thread.</a:t>
             </a:r>
-            <a:r>
-              <a:rPr b="0" lang="en-AU" sz="1320" spc="-1" strike="noStrike">
-                <a:solidFill>
-                  <a:srgbClr val="007a53"/>
-                </a:solidFill>
-                <a:latin typeface="Courier New"/>
-                <a:ea typeface="Courier New"/>
-              </a:rPr>
-              <a:t>(6) read Task / Appointment status ────────────────────┘</a:t>
-            </a:r>
-            <a:endParaRPr b="0" lang="en-AU" sz="1320" spc="-1" strike="noStrike">
-              <a:solidFill>
-                <a:srgbClr val="000000"/>
-              </a:solidFill>
-              <a:latin typeface="Times New Roman"/>
-            </a:endParaRPr>
-          </a:p>
-        </p:txBody>
-      </p:sp>
-      <p:sp>
-        <p:nvSpPr>
-          <p:cNvPr id="142" name=""/>
-          <p:cNvSpPr txBox="1"/>
-          <p:nvPr/>
-        </p:nvSpPr>
-        <p:spPr>
-          <a:xfrm>
-            <a:off x="7351200" y="4257360"/>
-            <a:ext cx="2716560" cy="190800"/>
-          </a:xfrm>
-          <a:prstGeom prst="rect">
-            <a:avLst/>
-          </a:prstGeom>
-          <a:noFill/>
-          <a:ln w="0">
-            <a:noFill/>
-          </a:ln>
-        </p:spPr>
-        <p:txBody>
-          <a:bodyPr wrap="none" lIns="0" rIns="0" tIns="0" bIns="0" anchor="t">
-            <a:noAutofit/>
-          </a:bodyPr>
-          <a:p>
-            <a:r>
-              <a:rPr b="0" lang="en-AU" sz="1320" spc="-1" strike="noStrike">
-                <a:solidFill>
-                  <a:srgbClr val="007a53"/>
-                </a:solidFill>
-                <a:latin typeface="Courier New"/>
-                <a:ea typeface="Courier New"/>
-              </a:rPr>
-              <a:t>── </a:t>
-            </a:r>
-            <a:r>
-              <a:rPr b="0" lang="en-AU" sz="1320" spc="-1" strike="noStrike">
-                <a:solidFill>
-                  <a:srgbClr val="007a53"/>
-                </a:solidFill>
-                <a:latin typeface="Courier New"/>
-                <a:ea typeface="Courier New"/>
-              </a:rPr>
-              <a:t>accept Task, book Appt ┘</a:t>
-            </a:r>
-            <a:endParaRPr b="0" lang="en-AU" sz="1320" spc="-1" strike="noStrike">
-              <a:solidFill>
-                <a:srgbClr val="000000"/>
-              </a:solidFill>
-              <a:latin typeface="Times New Roman"/>
-            </a:endParaRPr>
-          </a:p>
-        </p:txBody>
-      </p:sp>
-      <p:sp>
-        <p:nvSpPr>
-          <p:cNvPr id="143" name=""/>
+            <a:endParaRPr b="0" lang="en-AU" sz="1950" spc="-1" strike="noStrike">
+              <a:solidFill>
+                <a:srgbClr val="000000"/>
+              </a:solidFill>
+              <a:latin typeface="Times New Roman"/>
+            </a:endParaRPr>
+          </a:p>
+        </p:txBody>
+      </p:sp>
+      <p:sp>
+        <p:nvSpPr>
+          <p:cNvPr id="219" name=""/>
           <p:cNvSpPr txBox="1"/>
           <p:nvPr/>
         </p:nvSpPr>
@@ -13586,7 +17423,7 @@
       </p:sp>
       <p:sp>
         <p:nvSpPr>
-          <p:cNvPr id="144" name=""/>
+          <p:cNvPr id="220" name=""/>
           <p:cNvSpPr txBox="1"/>
           <p:nvPr/>
         </p:nvSpPr>
@@ -13659,7 +17496,7 @@
       </p:grpSpPr>
       <p:sp>
         <p:nvSpPr>
-          <p:cNvPr id="145" name=""/>
+          <p:cNvPr id="221" name=""/>
           <p:cNvSpPr/>
           <p:nvPr/>
         </p:nvSpPr>
@@ -13717,7 +17554,7 @@
       </p:sp>
       <p:sp>
         <p:nvSpPr>
-          <p:cNvPr id="146" name=""/>
+          <p:cNvPr id="222" name=""/>
           <p:cNvSpPr/>
           <p:nvPr/>
         </p:nvSpPr>
@@ -13775,7 +17612,7 @@
       </p:sp>
       <p:sp>
         <p:nvSpPr>
-          <p:cNvPr id="147" name=""/>
+          <p:cNvPr id="223" name=""/>
           <p:cNvSpPr/>
           <p:nvPr/>
         </p:nvSpPr>
@@ -13833,7 +17670,7 @@
       </p:sp>
       <p:sp>
         <p:nvSpPr>
-          <p:cNvPr id="148" name=""/>
+          <p:cNvPr id="224" name=""/>
           <p:cNvSpPr/>
           <p:nvPr/>
         </p:nvSpPr>
@@ -13891,7 +17728,7 @@
       </p:sp>
       <p:sp>
         <p:nvSpPr>
-          <p:cNvPr id="149" name=""/>
+          <p:cNvPr id="225" name=""/>
           <p:cNvSpPr/>
           <p:nvPr/>
         </p:nvSpPr>
@@ -14017,7 +17854,7 @@
       </p:sp>
       <p:sp>
         <p:nvSpPr>
-          <p:cNvPr id="150" name=""/>
+          <p:cNvPr id="226" name=""/>
           <p:cNvSpPr txBox="1"/>
           <p:nvPr/>
         </p:nvSpPr>
@@ -14060,7 +17897,7 @@
       </p:sp>
       <p:sp>
         <p:nvSpPr>
-          <p:cNvPr id="151" name=""/>
+          <p:cNvPr id="227" name=""/>
           <p:cNvSpPr/>
           <p:nvPr/>
         </p:nvSpPr>
@@ -14186,7 +18023,7 @@
       </p:sp>
       <p:sp>
         <p:nvSpPr>
-          <p:cNvPr id="152" name=""/>
+          <p:cNvPr id="228" name=""/>
           <p:cNvSpPr txBox="1"/>
           <p:nvPr/>
         </p:nvSpPr>
@@ -14239,7 +18076,7 @@
       </p:sp>
       <p:sp>
         <p:nvSpPr>
-          <p:cNvPr id="153" name=""/>
+          <p:cNvPr id="229" name=""/>
           <p:cNvSpPr/>
           <p:nvPr/>
         </p:nvSpPr>
@@ -14365,7 +18202,7 @@
       </p:sp>
       <p:sp>
         <p:nvSpPr>
-          <p:cNvPr id="154" name=""/>
+          <p:cNvPr id="230" name=""/>
           <p:cNvSpPr txBox="1"/>
           <p:nvPr/>
         </p:nvSpPr>
@@ -14418,7 +18255,7 @@
       </p:sp>
       <p:sp>
         <p:nvSpPr>
-          <p:cNvPr id="155" name=""/>
+          <p:cNvPr id="231" name=""/>
           <p:cNvSpPr/>
           <p:nvPr/>
         </p:nvSpPr>
@@ -14544,7 +18381,7 @@
       </p:sp>
       <p:sp>
         <p:nvSpPr>
-          <p:cNvPr id="156" name=""/>
+          <p:cNvPr id="232" name=""/>
           <p:cNvSpPr txBox="1"/>
           <p:nvPr/>
         </p:nvSpPr>
@@ -14607,7 +18444,7 @@
       </p:sp>
       <p:sp>
         <p:nvSpPr>
-          <p:cNvPr id="157" name=""/>
+          <p:cNvPr id="233" name=""/>
           <p:cNvSpPr/>
           <p:nvPr/>
         </p:nvSpPr>
@@ -14733,7 +18570,7 @@
       </p:sp>
       <p:sp>
         <p:nvSpPr>
-          <p:cNvPr id="158" name=""/>
+          <p:cNvPr id="234" name=""/>
           <p:cNvSpPr txBox="1"/>
           <p:nvPr/>
         </p:nvSpPr>
@@ -14796,7 +18633,7 @@
       </p:sp>
       <p:sp>
         <p:nvSpPr>
-          <p:cNvPr id="159" name=""/>
+          <p:cNvPr id="235" name=""/>
           <p:cNvSpPr/>
           <p:nvPr/>
         </p:nvSpPr>
@@ -14922,7 +18759,7 @@
       </p:sp>
       <p:sp>
         <p:nvSpPr>
-          <p:cNvPr id="160" name=""/>
+          <p:cNvPr id="236" name=""/>
           <p:cNvSpPr txBox="1"/>
           <p:nvPr/>
         </p:nvSpPr>
@@ -14975,7 +18812,7 @@
       </p:sp>
       <p:sp>
         <p:nvSpPr>
-          <p:cNvPr id="161" name=""/>
+          <p:cNvPr id="237" name=""/>
           <p:cNvSpPr/>
           <p:nvPr/>
         </p:nvSpPr>
@@ -15193,7 +19030,7 @@
       </p:sp>
       <p:sp>
         <p:nvSpPr>
-          <p:cNvPr id="162" name=""/>
+          <p:cNvPr id="238" name=""/>
           <p:cNvSpPr txBox="1"/>
           <p:nvPr/>
         </p:nvSpPr>
@@ -15246,7 +19083,7 @@
       </p:sp>
       <p:sp>
         <p:nvSpPr>
-          <p:cNvPr id="163" name=""/>
+          <p:cNvPr id="239" name=""/>
           <p:cNvSpPr txBox="1"/>
           <p:nvPr/>
         </p:nvSpPr>
@@ -15289,7 +19126,7 @@
       </p:sp>
       <p:sp>
         <p:nvSpPr>
-          <p:cNvPr id="164" name=""/>
+          <p:cNvPr id="240" name=""/>
           <p:cNvSpPr txBox="1"/>
           <p:nvPr/>
         </p:nvSpPr>
@@ -15342,7 +19179,7 @@
       </p:sp>
       <p:sp>
         <p:nvSpPr>
-          <p:cNvPr id="165" name=""/>
+          <p:cNvPr id="241" name=""/>
           <p:cNvSpPr txBox="1"/>
           <p:nvPr/>
         </p:nvSpPr>
@@ -15385,7 +19222,7 @@
       </p:sp>
       <p:sp>
         <p:nvSpPr>
-          <p:cNvPr id="166" name=""/>
+          <p:cNvPr id="242" name=""/>
           <p:cNvSpPr txBox="1"/>
           <p:nvPr/>
         </p:nvSpPr>
@@ -15458,7 +19295,7 @@
       </p:grpSpPr>
       <p:sp>
         <p:nvSpPr>
-          <p:cNvPr id="167" name=""/>
+          <p:cNvPr id="243" name=""/>
           <p:cNvSpPr/>
           <p:nvPr/>
         </p:nvSpPr>
@@ -15516,7 +19353,7 @@
       </p:sp>
       <p:sp>
         <p:nvSpPr>
-          <p:cNvPr id="168" name=""/>
+          <p:cNvPr id="244" name=""/>
           <p:cNvSpPr/>
           <p:nvPr/>
         </p:nvSpPr>
@@ -15574,7 +19411,7 @@
       </p:sp>
       <p:sp>
         <p:nvSpPr>
-          <p:cNvPr id="169" name=""/>
+          <p:cNvPr id="245" name=""/>
           <p:cNvSpPr/>
           <p:nvPr/>
         </p:nvSpPr>
@@ -15632,7 +19469,7 @@
       </p:sp>
       <p:sp>
         <p:nvSpPr>
-          <p:cNvPr id="170" name=""/>
+          <p:cNvPr id="246" name=""/>
           <p:cNvSpPr/>
           <p:nvPr/>
         </p:nvSpPr>
@@ -15690,7 +19527,7 @@
       </p:sp>
       <p:sp>
         <p:nvSpPr>
-          <p:cNvPr id="171" name=""/>
+          <p:cNvPr id="247" name=""/>
           <p:cNvSpPr txBox="1"/>
           <p:nvPr/>
         </p:nvSpPr>
@@ -15733,7 +19570,7 @@
       </p:sp>
       <p:sp>
         <p:nvSpPr>
-          <p:cNvPr id="172" name=""/>
+          <p:cNvPr id="248" name=""/>
           <p:cNvSpPr/>
           <p:nvPr/>
         </p:nvSpPr>
@@ -15859,7 +19696,7 @@
       </p:sp>
       <p:sp>
         <p:nvSpPr>
-          <p:cNvPr id="173" name=""/>
+          <p:cNvPr id="249" name=""/>
           <p:cNvSpPr txBox="1"/>
           <p:nvPr/>
         </p:nvSpPr>
@@ -15902,7 +19739,7 @@
       </p:sp>
       <p:sp>
         <p:nvSpPr>
-          <p:cNvPr id="174" name=""/>
+          <p:cNvPr id="250" name=""/>
           <p:cNvSpPr/>
           <p:nvPr/>
         </p:nvSpPr>
@@ -16028,7 +19865,7 @@
       </p:sp>
       <p:sp>
         <p:nvSpPr>
-          <p:cNvPr id="175" name=""/>
+          <p:cNvPr id="251" name=""/>
           <p:cNvSpPr txBox="1"/>
           <p:nvPr/>
         </p:nvSpPr>
@@ -16071,7 +19908,7 @@
       </p:sp>
       <p:sp>
         <p:nvSpPr>
-          <p:cNvPr id="176" name=""/>
+          <p:cNvPr id="252" name=""/>
           <p:cNvSpPr txBox="1"/>
           <p:nvPr/>
         </p:nvSpPr>
@@ -16114,7 +19951,7 @@
       </p:sp>
       <p:sp>
         <p:nvSpPr>
-          <p:cNvPr id="177" name=""/>
+          <p:cNvPr id="253" name=""/>
           <p:cNvSpPr/>
           <p:nvPr/>
         </p:nvSpPr>
@@ -16240,7 +20077,7 @@
       </p:sp>
       <p:sp>
         <p:nvSpPr>
-          <p:cNvPr id="178" name=""/>
+          <p:cNvPr id="254" name=""/>
           <p:cNvSpPr txBox="1"/>
           <p:nvPr/>
         </p:nvSpPr>
@@ -16283,7 +20120,7 @@
       </p:sp>
       <p:sp>
         <p:nvSpPr>
-          <p:cNvPr id="179" name=""/>
+          <p:cNvPr id="255" name=""/>
           <p:cNvSpPr/>
           <p:nvPr/>
         </p:nvSpPr>
@@ -16409,7 +20246,7 @@
       </p:sp>
       <p:sp>
         <p:nvSpPr>
-          <p:cNvPr id="180" name=""/>
+          <p:cNvPr id="256" name=""/>
           <p:cNvSpPr txBox="1"/>
           <p:nvPr/>
         </p:nvSpPr>
@@ -16452,7 +20289,7 @@
       </p:sp>
       <p:sp>
         <p:nvSpPr>
-          <p:cNvPr id="181" name=""/>
+          <p:cNvPr id="257" name=""/>
           <p:cNvSpPr txBox="1"/>
           <p:nvPr/>
         </p:nvSpPr>
@@ -16515,7 +20352,7 @@
       </p:sp>
       <p:sp>
         <p:nvSpPr>
-          <p:cNvPr id="182" name=""/>
+          <p:cNvPr id="258" name=""/>
           <p:cNvSpPr txBox="1"/>
           <p:nvPr/>
         </p:nvSpPr>
@@ -16558,7 +20395,7 @@
       </p:sp>
       <p:sp>
         <p:nvSpPr>
-          <p:cNvPr id="183" name=""/>
+          <p:cNvPr id="259" name=""/>
           <p:cNvSpPr txBox="1"/>
           <p:nvPr/>
         </p:nvSpPr>
@@ -16631,7 +20468,7 @@
       </p:grpSpPr>
       <p:sp>
         <p:nvSpPr>
-          <p:cNvPr id="184" name=""/>
+          <p:cNvPr id="260" name=""/>
           <p:cNvSpPr/>
           <p:nvPr/>
         </p:nvSpPr>
@@ -16689,7 +20526,7 @@
       </p:sp>
       <p:sp>
         <p:nvSpPr>
-          <p:cNvPr id="185" name=""/>
+          <p:cNvPr id="261" name=""/>
           <p:cNvSpPr/>
           <p:nvPr/>
         </p:nvSpPr>
@@ -16747,7 +20584,7 @@
       </p:sp>
       <p:sp>
         <p:nvSpPr>
-          <p:cNvPr id="186" name=""/>
+          <p:cNvPr id="262" name=""/>
           <p:cNvSpPr/>
           <p:nvPr/>
         </p:nvSpPr>
@@ -16805,7 +20642,7 @@
       </p:sp>
       <p:sp>
         <p:nvSpPr>
-          <p:cNvPr id="187" name=""/>
+          <p:cNvPr id="263" name=""/>
           <p:cNvSpPr/>
           <p:nvPr/>
         </p:nvSpPr>
@@ -16863,7 +20700,7 @@
       </p:sp>
       <p:sp>
         <p:nvSpPr>
-          <p:cNvPr id="188" name=""/>
+          <p:cNvPr id="264" name=""/>
           <p:cNvSpPr/>
           <p:nvPr/>
         </p:nvSpPr>
@@ -16921,7 +20758,7 @@
       </p:sp>
       <p:sp>
         <p:nvSpPr>
-          <p:cNvPr id="189" name=""/>
+          <p:cNvPr id="265" name=""/>
           <p:cNvSpPr/>
           <p:nvPr/>
         </p:nvSpPr>
@@ -16979,7 +20816,7 @@
       </p:sp>
       <p:sp>
         <p:nvSpPr>
-          <p:cNvPr id="190" name=""/>
+          <p:cNvPr id="266" name=""/>
           <p:cNvSpPr/>
           <p:nvPr/>
         </p:nvSpPr>
@@ -17037,7 +20874,7 @@
       </p:sp>
       <p:sp>
         <p:nvSpPr>
-          <p:cNvPr id="191" name=""/>
+          <p:cNvPr id="267" name=""/>
           <p:cNvSpPr/>
           <p:nvPr/>
         </p:nvSpPr>
@@ -17095,7 +20932,7 @@
       </p:sp>
       <p:sp>
         <p:nvSpPr>
-          <p:cNvPr id="192" name=""/>
+          <p:cNvPr id="268" name=""/>
           <p:cNvSpPr/>
           <p:nvPr/>
         </p:nvSpPr>
@@ -17153,7 +20990,7 @@
       </p:sp>
       <p:sp>
         <p:nvSpPr>
-          <p:cNvPr id="193" name=""/>
+          <p:cNvPr id="269" name=""/>
           <p:cNvSpPr/>
           <p:nvPr/>
         </p:nvSpPr>
@@ -17211,7 +21048,7 @@
       </p:sp>
       <p:sp>
         <p:nvSpPr>
-          <p:cNvPr id="194" name=""/>
+          <p:cNvPr id="270" name=""/>
           <p:cNvSpPr/>
           <p:nvPr/>
         </p:nvSpPr>
@@ -17269,7 +21106,7 @@
       </p:sp>
       <p:sp>
         <p:nvSpPr>
-          <p:cNvPr id="195" name=""/>
+          <p:cNvPr id="271" name=""/>
           <p:cNvSpPr/>
           <p:nvPr/>
         </p:nvSpPr>
@@ -17327,7 +21164,7 @@
       </p:sp>
       <p:sp>
         <p:nvSpPr>
-          <p:cNvPr id="196" name=""/>
+          <p:cNvPr id="272" name=""/>
           <p:cNvSpPr/>
           <p:nvPr/>
         </p:nvSpPr>
@@ -17385,7 +21222,7 @@
       </p:sp>
       <p:sp>
         <p:nvSpPr>
-          <p:cNvPr id="197" name=""/>
+          <p:cNvPr id="273" name=""/>
           <p:cNvSpPr/>
           <p:nvPr/>
         </p:nvSpPr>
@@ -17443,7 +21280,7 @@
       </p:sp>
       <p:sp>
         <p:nvSpPr>
-          <p:cNvPr id="198" name=""/>
+          <p:cNvPr id="274" name=""/>
           <p:cNvSpPr/>
           <p:nvPr/>
         </p:nvSpPr>
@@ -17501,7 +21338,7 @@
       </p:sp>
       <p:sp>
         <p:nvSpPr>
-          <p:cNvPr id="199" name=""/>
+          <p:cNvPr id="275" name=""/>
           <p:cNvSpPr/>
           <p:nvPr/>
         </p:nvSpPr>
@@ -17559,7 +21396,7 @@
       </p:sp>
       <p:sp>
         <p:nvSpPr>
-          <p:cNvPr id="200" name=""/>
+          <p:cNvPr id="276" name=""/>
           <p:cNvSpPr/>
           <p:nvPr/>
         </p:nvSpPr>
@@ -17617,7 +21454,7 @@
       </p:sp>
       <p:sp>
         <p:nvSpPr>
-          <p:cNvPr id="201" name=""/>
+          <p:cNvPr id="277" name=""/>
           <p:cNvSpPr/>
           <p:nvPr/>
         </p:nvSpPr>
@@ -17675,7 +21512,7 @@
       </p:sp>
       <p:sp>
         <p:nvSpPr>
-          <p:cNvPr id="202" name=""/>
+          <p:cNvPr id="278" name=""/>
           <p:cNvSpPr/>
           <p:nvPr/>
         </p:nvSpPr>
@@ -17733,7 +21570,7 @@
       </p:sp>
       <p:sp>
         <p:nvSpPr>
-          <p:cNvPr id="203" name=""/>
+          <p:cNvPr id="279" name=""/>
           <p:cNvSpPr/>
           <p:nvPr/>
         </p:nvSpPr>
@@ -17791,7 +21628,7 @@
       </p:sp>
       <p:sp>
         <p:nvSpPr>
-          <p:cNvPr id="204" name=""/>
+          <p:cNvPr id="280" name=""/>
           <p:cNvSpPr/>
           <p:nvPr/>
         </p:nvSpPr>
@@ -17849,7 +21686,7 @@
       </p:sp>
       <p:sp>
         <p:nvSpPr>
-          <p:cNvPr id="205" name=""/>
+          <p:cNvPr id="281" name=""/>
           <p:cNvSpPr/>
           <p:nvPr/>
         </p:nvSpPr>
@@ -17907,7 +21744,7 @@
       </p:sp>
       <p:sp>
         <p:nvSpPr>
-          <p:cNvPr id="206" name=""/>
+          <p:cNvPr id="282" name=""/>
           <p:cNvSpPr/>
           <p:nvPr/>
         </p:nvSpPr>
@@ -17965,7 +21802,7 @@
       </p:sp>
       <p:sp>
         <p:nvSpPr>
-          <p:cNvPr id="207" name=""/>
+          <p:cNvPr id="283" name=""/>
           <p:cNvSpPr/>
           <p:nvPr/>
         </p:nvSpPr>
@@ -18023,7 +21860,7 @@
       </p:sp>
       <p:sp>
         <p:nvSpPr>
-          <p:cNvPr id="208" name=""/>
+          <p:cNvPr id="284" name=""/>
           <p:cNvSpPr/>
           <p:nvPr/>
         </p:nvSpPr>
@@ -18081,7 +21918,7 @@
       </p:sp>
       <p:sp>
         <p:nvSpPr>
-          <p:cNvPr id="209" name=""/>
+          <p:cNvPr id="285" name=""/>
           <p:cNvSpPr/>
           <p:nvPr/>
         </p:nvSpPr>
@@ -18139,7 +21976,7 @@
       </p:sp>
       <p:sp>
         <p:nvSpPr>
-          <p:cNvPr id="210" name=""/>
+          <p:cNvPr id="286" name=""/>
           <p:cNvSpPr/>
           <p:nvPr/>
         </p:nvSpPr>
@@ -18197,7 +22034,7 @@
       </p:sp>
       <p:sp>
         <p:nvSpPr>
-          <p:cNvPr id="211" name=""/>
+          <p:cNvPr id="287" name=""/>
           <p:cNvSpPr/>
           <p:nvPr/>
         </p:nvSpPr>
@@ -18255,7 +22092,7 @@
       </p:sp>
       <p:sp>
         <p:nvSpPr>
-          <p:cNvPr id="212" name=""/>
+          <p:cNvPr id="288" name=""/>
           <p:cNvSpPr/>
           <p:nvPr/>
         </p:nvSpPr>
@@ -18313,7 +22150,7 @@
       </p:sp>
       <p:sp>
         <p:nvSpPr>
-          <p:cNvPr id="213" name=""/>
+          <p:cNvPr id="289" name=""/>
           <p:cNvSpPr/>
           <p:nvPr/>
         </p:nvSpPr>
@@ -18371,7 +22208,7 @@
       </p:sp>
       <p:sp>
         <p:nvSpPr>
-          <p:cNvPr id="214" name=""/>
+          <p:cNvPr id="290" name=""/>
           <p:cNvSpPr/>
           <p:nvPr/>
         </p:nvSpPr>
@@ -18429,7 +22266,7 @@
       </p:sp>
       <p:sp>
         <p:nvSpPr>
-          <p:cNvPr id="215" name=""/>
+          <p:cNvPr id="291" name=""/>
           <p:cNvSpPr/>
           <p:nvPr/>
         </p:nvSpPr>
@@ -18487,7 +22324,7 @@
       </p:sp>
       <p:sp>
         <p:nvSpPr>
-          <p:cNvPr id="216" name=""/>
+          <p:cNvPr id="292" name=""/>
           <p:cNvSpPr/>
           <p:nvPr/>
         </p:nvSpPr>
@@ -18545,7 +22382,7 @@
       </p:sp>
       <p:sp>
         <p:nvSpPr>
-          <p:cNvPr id="217" name=""/>
+          <p:cNvPr id="293" name=""/>
           <p:cNvSpPr/>
           <p:nvPr/>
         </p:nvSpPr>
@@ -18603,7 +22440,7 @@
       </p:sp>
       <p:sp>
         <p:nvSpPr>
-          <p:cNvPr id="218" name=""/>
+          <p:cNvPr id="294" name=""/>
           <p:cNvSpPr/>
           <p:nvPr/>
         </p:nvSpPr>
@@ -18661,7 +22498,7 @@
       </p:sp>
       <p:sp>
         <p:nvSpPr>
-          <p:cNvPr id="219" name=""/>
+          <p:cNvPr id="295" name=""/>
           <p:cNvSpPr/>
           <p:nvPr/>
         </p:nvSpPr>
@@ -18719,7 +22556,7 @@
       </p:sp>
       <p:sp>
         <p:nvSpPr>
-          <p:cNvPr id="220" name=""/>
+          <p:cNvPr id="296" name=""/>
           <p:cNvSpPr txBox="1"/>
           <p:nvPr/>
         </p:nvSpPr>
@@ -18762,7 +22599,7 @@
       </p:sp>
       <p:sp>
         <p:nvSpPr>
-          <p:cNvPr id="221" name=""/>
+          <p:cNvPr id="297" name=""/>
           <p:cNvSpPr txBox="1"/>
           <p:nvPr/>
         </p:nvSpPr>
@@ -18805,7 +22642,7 @@
       </p:sp>
       <p:sp>
         <p:nvSpPr>
-          <p:cNvPr id="222" name=""/>
+          <p:cNvPr id="298" name=""/>
           <p:cNvSpPr txBox="1"/>
           <p:nvPr/>
         </p:nvSpPr>
@@ -18848,7 +22685,7 @@
       </p:sp>
       <p:sp>
         <p:nvSpPr>
-          <p:cNvPr id="223" name=""/>
+          <p:cNvPr id="299" name=""/>
           <p:cNvSpPr txBox="1"/>
           <p:nvPr/>
         </p:nvSpPr>
@@ -18891,7 +22728,7 @@
       </p:sp>
       <p:sp>
         <p:nvSpPr>
-          <p:cNvPr id="224" name=""/>
+          <p:cNvPr id="300" name=""/>
           <p:cNvSpPr txBox="1"/>
           <p:nvPr/>
         </p:nvSpPr>
@@ -18944,7 +22781,7 @@
       </p:sp>
       <p:sp>
         <p:nvSpPr>
-          <p:cNvPr id="225" name=""/>
+          <p:cNvPr id="301" name=""/>
           <p:cNvSpPr txBox="1"/>
           <p:nvPr/>
         </p:nvSpPr>
@@ -18987,7 +22824,7 @@
       </p:sp>
       <p:sp>
         <p:nvSpPr>
-          <p:cNvPr id="226" name=""/>
+          <p:cNvPr id="302" name=""/>
           <p:cNvSpPr txBox="1"/>
           <p:nvPr/>
         </p:nvSpPr>
@@ -19040,7 +22877,7 @@
       </p:sp>
       <p:sp>
         <p:nvSpPr>
-          <p:cNvPr id="227" name=""/>
+          <p:cNvPr id="303" name=""/>
           <p:cNvSpPr txBox="1"/>
           <p:nvPr/>
         </p:nvSpPr>
@@ -19083,7 +22920,7 @@
       </p:sp>
       <p:sp>
         <p:nvSpPr>
-          <p:cNvPr id="228" name=""/>
+          <p:cNvPr id="304" name=""/>
           <p:cNvSpPr/>
           <p:nvPr/>
         </p:nvSpPr>
@@ -19301,7 +23138,7 @@
       </p:sp>
       <p:sp>
         <p:nvSpPr>
-          <p:cNvPr id="229" name=""/>
+          <p:cNvPr id="305" name=""/>
           <p:cNvSpPr txBox="1"/>
           <p:nvPr/>
         </p:nvSpPr>
@@ -19354,7 +23191,7 @@
       </p:sp>
       <p:sp>
         <p:nvSpPr>
-          <p:cNvPr id="230" name=""/>
+          <p:cNvPr id="306" name=""/>
           <p:cNvSpPr txBox="1"/>
           <p:nvPr/>
         </p:nvSpPr>
@@ -19397,7 +23234,7 @@
       </p:sp>
       <p:sp>
         <p:nvSpPr>
-          <p:cNvPr id="231" name=""/>
+          <p:cNvPr id="307" name=""/>
           <p:cNvSpPr txBox="1"/>
           <p:nvPr/>
         </p:nvSpPr>
@@ -19450,7 +23287,7 @@
       </p:sp>
       <p:sp>
         <p:nvSpPr>
-          <p:cNvPr id="232" name=""/>
+          <p:cNvPr id="308" name=""/>
           <p:cNvSpPr txBox="1"/>
           <p:nvPr/>
         </p:nvSpPr>
@@ -19493,7 +23330,7 @@
       </p:sp>
       <p:sp>
         <p:nvSpPr>
-          <p:cNvPr id="233" name=""/>
+          <p:cNvPr id="309" name=""/>
           <p:cNvSpPr txBox="1"/>
           <p:nvPr/>
         </p:nvSpPr>
@@ -19536,7 +23373,7 @@
       </p:sp>
       <p:sp>
         <p:nvSpPr>
-          <p:cNvPr id="234" name=""/>
+          <p:cNvPr id="310" name=""/>
           <p:cNvSpPr txBox="1"/>
           <p:nvPr/>
         </p:nvSpPr>
@@ -19609,7 +23446,7 @@
       </p:grpSpPr>
       <p:sp>
         <p:nvSpPr>
-          <p:cNvPr id="235" name=""/>
+          <p:cNvPr id="311" name=""/>
           <p:cNvSpPr/>
           <p:nvPr/>
         </p:nvSpPr>
@@ -19667,7 +23504,7 @@
       </p:sp>
       <p:sp>
         <p:nvSpPr>
-          <p:cNvPr id="236" name=""/>
+          <p:cNvPr id="312" name=""/>
           <p:cNvSpPr/>
           <p:nvPr/>
         </p:nvSpPr>
@@ -19725,7 +23562,7 @@
       </p:sp>
       <p:sp>
         <p:nvSpPr>
-          <p:cNvPr id="237" name=""/>
+          <p:cNvPr id="313" name=""/>
           <p:cNvSpPr/>
           <p:nvPr/>
         </p:nvSpPr>
@@ -19783,7 +23620,7 @@
       </p:sp>
       <p:sp>
         <p:nvSpPr>
-          <p:cNvPr id="238" name=""/>
+          <p:cNvPr id="314" name=""/>
           <p:cNvSpPr/>
           <p:nvPr/>
         </p:nvSpPr>
@@ -19841,7 +23678,7 @@
       </p:sp>
       <p:sp>
         <p:nvSpPr>
-          <p:cNvPr id="239" name=""/>
+          <p:cNvPr id="315" name=""/>
           <p:cNvSpPr/>
           <p:nvPr/>
         </p:nvSpPr>
@@ -19899,7 +23736,7 @@
       </p:sp>
       <p:sp>
         <p:nvSpPr>
-          <p:cNvPr id="240" name=""/>
+          <p:cNvPr id="316" name=""/>
           <p:cNvSpPr/>
           <p:nvPr/>
         </p:nvSpPr>
@@ -19957,7 +23794,7 @@
       </p:sp>
       <p:sp>
         <p:nvSpPr>
-          <p:cNvPr id="241" name=""/>
+          <p:cNvPr id="317" name=""/>
           <p:cNvSpPr/>
           <p:nvPr/>
         </p:nvSpPr>
@@ -20015,7 +23852,7 @@
       </p:sp>
       <p:sp>
         <p:nvSpPr>
-          <p:cNvPr id="242" name=""/>
+          <p:cNvPr id="318" name=""/>
           <p:cNvSpPr/>
           <p:nvPr/>
         </p:nvSpPr>
@@ -20073,7 +23910,7 @@
       </p:sp>
       <p:sp>
         <p:nvSpPr>
-          <p:cNvPr id="243" name=""/>
+          <p:cNvPr id="319" name=""/>
           <p:cNvSpPr/>
           <p:nvPr/>
         </p:nvSpPr>
@@ -20131,7 +23968,7 @@
       </p:sp>
       <p:sp>
         <p:nvSpPr>
-          <p:cNvPr id="244" name=""/>
+          <p:cNvPr id="320" name=""/>
           <p:cNvSpPr/>
           <p:nvPr/>
         </p:nvSpPr>
@@ -20189,7 +24026,7 @@
       </p:sp>
       <p:sp>
         <p:nvSpPr>
-          <p:cNvPr id="245" name=""/>
+          <p:cNvPr id="321" name=""/>
           <p:cNvSpPr/>
           <p:nvPr/>
         </p:nvSpPr>
@@ -20247,7 +24084,7 @@
       </p:sp>
       <p:sp>
         <p:nvSpPr>
-          <p:cNvPr id="246" name=""/>
+          <p:cNvPr id="322" name=""/>
           <p:cNvSpPr/>
           <p:nvPr/>
         </p:nvSpPr>
@@ -20305,7 +24142,7 @@
       </p:sp>
       <p:sp>
         <p:nvSpPr>
-          <p:cNvPr id="247" name=""/>
+          <p:cNvPr id="323" name=""/>
           <p:cNvSpPr/>
           <p:nvPr/>
         </p:nvSpPr>
@@ -20363,7 +24200,7 @@
       </p:sp>
       <p:sp>
         <p:nvSpPr>
-          <p:cNvPr id="248" name=""/>
+          <p:cNvPr id="324" name=""/>
           <p:cNvSpPr/>
           <p:nvPr/>
         </p:nvSpPr>
@@ -20421,7 +24258,7 @@
       </p:sp>
       <p:sp>
         <p:nvSpPr>
-          <p:cNvPr id="249" name=""/>
+          <p:cNvPr id="325" name=""/>
           <p:cNvSpPr/>
           <p:nvPr/>
         </p:nvSpPr>
@@ -20479,7 +24316,7 @@
       </p:sp>
       <p:sp>
         <p:nvSpPr>
-          <p:cNvPr id="250" name=""/>
+          <p:cNvPr id="326" name=""/>
           <p:cNvSpPr/>
           <p:nvPr/>
         </p:nvSpPr>
@@ -20537,7 +24374,7 @@
       </p:sp>
       <p:sp>
         <p:nvSpPr>
-          <p:cNvPr id="251" name=""/>
+          <p:cNvPr id="327" name=""/>
           <p:cNvSpPr/>
           <p:nvPr/>
         </p:nvSpPr>
@@ -20595,7 +24432,7 @@
       </p:sp>
       <p:sp>
         <p:nvSpPr>
-          <p:cNvPr id="252" name=""/>
+          <p:cNvPr id="328" name=""/>
           <p:cNvSpPr/>
           <p:nvPr/>
         </p:nvSpPr>
@@ -20653,7 +24490,7 @@
       </p:sp>
       <p:sp>
         <p:nvSpPr>
-          <p:cNvPr id="253" name=""/>
+          <p:cNvPr id="329" name=""/>
           <p:cNvSpPr/>
           <p:nvPr/>
         </p:nvSpPr>
@@ -20711,7 +24548,7 @@
       </p:sp>
       <p:sp>
         <p:nvSpPr>
-          <p:cNvPr id="254" name=""/>
+          <p:cNvPr id="330" name=""/>
           <p:cNvSpPr/>
           <p:nvPr/>
         </p:nvSpPr>
@@ -20769,7 +24606,7 @@
       </p:sp>
       <p:sp>
         <p:nvSpPr>
-          <p:cNvPr id="255" name=""/>
+          <p:cNvPr id="331" name=""/>
           <p:cNvSpPr/>
           <p:nvPr/>
         </p:nvSpPr>
@@ -20827,7 +24664,7 @@
       </p:sp>
       <p:sp>
         <p:nvSpPr>
-          <p:cNvPr id="256" name=""/>
+          <p:cNvPr id="332" name=""/>
           <p:cNvSpPr/>
           <p:nvPr/>
         </p:nvSpPr>
@@ -20885,7 +24722,7 @@
       </p:sp>
       <p:sp>
         <p:nvSpPr>
-          <p:cNvPr id="257" name=""/>
+          <p:cNvPr id="333" name=""/>
           <p:cNvSpPr/>
           <p:nvPr/>
         </p:nvSpPr>
@@ -20943,7 +24780,7 @@
       </p:sp>
       <p:sp>
         <p:nvSpPr>
-          <p:cNvPr id="258" name=""/>
+          <p:cNvPr id="334" name=""/>
           <p:cNvSpPr/>
           <p:nvPr/>
         </p:nvSpPr>
@@ -21001,7 +24838,7 @@
       </p:sp>
       <p:sp>
         <p:nvSpPr>
-          <p:cNvPr id="259" name=""/>
+          <p:cNvPr id="335" name=""/>
           <p:cNvSpPr/>
           <p:nvPr/>
         </p:nvSpPr>
@@ -21059,7 +24896,7 @@
       </p:sp>
       <p:sp>
         <p:nvSpPr>
-          <p:cNvPr id="260" name=""/>
+          <p:cNvPr id="336" name=""/>
           <p:cNvSpPr/>
           <p:nvPr/>
         </p:nvSpPr>
@@ -21117,7 +24954,7 @@
       </p:sp>
       <p:sp>
         <p:nvSpPr>
-          <p:cNvPr id="261" name=""/>
+          <p:cNvPr id="337" name=""/>
           <p:cNvSpPr/>
           <p:nvPr/>
         </p:nvSpPr>
@@ -21175,7 +25012,7 @@
       </p:sp>
       <p:sp>
         <p:nvSpPr>
-          <p:cNvPr id="262" name=""/>
+          <p:cNvPr id="338" name=""/>
           <p:cNvSpPr/>
           <p:nvPr/>
         </p:nvSpPr>
@@ -21233,7 +25070,7 @@
       </p:sp>
       <p:sp>
         <p:nvSpPr>
-          <p:cNvPr id="263" name=""/>
+          <p:cNvPr id="339" name=""/>
           <p:cNvSpPr/>
           <p:nvPr/>
         </p:nvSpPr>
@@ -21291,7 +25128,7 @@
       </p:sp>
       <p:sp>
         <p:nvSpPr>
-          <p:cNvPr id="264" name=""/>
+          <p:cNvPr id="340" name=""/>
           <p:cNvSpPr/>
           <p:nvPr/>
         </p:nvSpPr>
@@ -21349,7 +25186,7 @@
       </p:sp>
       <p:sp>
         <p:nvSpPr>
-          <p:cNvPr id="265" name=""/>
+          <p:cNvPr id="341" name=""/>
           <p:cNvSpPr/>
           <p:nvPr/>
         </p:nvSpPr>
@@ -21407,7 +25244,7 @@
       </p:sp>
       <p:sp>
         <p:nvSpPr>
-          <p:cNvPr id="266" name=""/>
+          <p:cNvPr id="342" name=""/>
           <p:cNvSpPr/>
           <p:nvPr/>
         </p:nvSpPr>
@@ -21465,7 +25302,7 @@
       </p:sp>
       <p:sp>
         <p:nvSpPr>
-          <p:cNvPr id="267" name=""/>
+          <p:cNvPr id="343" name=""/>
           <p:cNvSpPr/>
           <p:nvPr/>
         </p:nvSpPr>
@@ -21523,7 +25360,7 @@
       </p:sp>
       <p:sp>
         <p:nvSpPr>
-          <p:cNvPr id="268" name=""/>
+          <p:cNvPr id="344" name=""/>
           <p:cNvSpPr/>
           <p:nvPr/>
         </p:nvSpPr>
@@ -21581,7 +25418,7 @@
       </p:sp>
       <p:sp>
         <p:nvSpPr>
-          <p:cNvPr id="269" name=""/>
+          <p:cNvPr id="345" name=""/>
           <p:cNvSpPr/>
           <p:nvPr/>
         </p:nvSpPr>
@@ -21639,7 +25476,7 @@
       </p:sp>
       <p:sp>
         <p:nvSpPr>
-          <p:cNvPr id="270" name=""/>
+          <p:cNvPr id="346" name=""/>
           <p:cNvSpPr/>
           <p:nvPr/>
         </p:nvSpPr>
@@ -21697,7 +25534,7 @@
       </p:sp>
       <p:sp>
         <p:nvSpPr>
-          <p:cNvPr id="271" name=""/>
+          <p:cNvPr id="347" name=""/>
           <p:cNvSpPr/>
           <p:nvPr/>
         </p:nvSpPr>
@@ -21755,7 +25592,7 @@
       </p:sp>
       <p:sp>
         <p:nvSpPr>
-          <p:cNvPr id="272" name=""/>
+          <p:cNvPr id="348" name=""/>
           <p:cNvSpPr/>
           <p:nvPr/>
         </p:nvSpPr>
@@ -21813,7 +25650,7 @@
       </p:sp>
       <p:sp>
         <p:nvSpPr>
-          <p:cNvPr id="273" name=""/>
+          <p:cNvPr id="349" name=""/>
           <p:cNvSpPr/>
           <p:nvPr/>
         </p:nvSpPr>
@@ -21871,7 +25708,7 @@
       </p:sp>
       <p:sp>
         <p:nvSpPr>
-          <p:cNvPr id="274" name=""/>
+          <p:cNvPr id="350" name=""/>
           <p:cNvSpPr/>
           <p:nvPr/>
         </p:nvSpPr>
@@ -21929,7 +25766,7 @@
       </p:sp>
       <p:sp>
         <p:nvSpPr>
-          <p:cNvPr id="275" name=""/>
+          <p:cNvPr id="351" name=""/>
           <p:cNvSpPr/>
           <p:nvPr/>
         </p:nvSpPr>
@@ -21987,7 +25824,7 @@
       </p:sp>
       <p:sp>
         <p:nvSpPr>
-          <p:cNvPr id="276" name=""/>
+          <p:cNvPr id="352" name=""/>
           <p:cNvSpPr/>
           <p:nvPr/>
         </p:nvSpPr>
@@ -22045,7 +25882,7 @@
       </p:sp>
       <p:sp>
         <p:nvSpPr>
-          <p:cNvPr id="277" name=""/>
+          <p:cNvPr id="353" name=""/>
           <p:cNvSpPr/>
           <p:nvPr/>
         </p:nvSpPr>
@@ -22103,7 +25940,7 @@
       </p:sp>
       <p:sp>
         <p:nvSpPr>
-          <p:cNvPr id="278" name=""/>
+          <p:cNvPr id="354" name=""/>
           <p:cNvSpPr txBox="1"/>
           <p:nvPr/>
         </p:nvSpPr>
@@ -22146,7 +25983,7 @@
       </p:sp>
       <p:sp>
         <p:nvSpPr>
-          <p:cNvPr id="279" name=""/>
+          <p:cNvPr id="355" name=""/>
           <p:cNvSpPr txBox="1"/>
           <p:nvPr/>
         </p:nvSpPr>
@@ -22189,7 +26026,7 @@
       </p:sp>
       <p:sp>
         <p:nvSpPr>
-          <p:cNvPr id="280" name=""/>
+          <p:cNvPr id="356" name=""/>
           <p:cNvSpPr txBox="1"/>
           <p:nvPr/>
         </p:nvSpPr>
@@ -22232,7 +26069,7 @@
       </p:sp>
       <p:sp>
         <p:nvSpPr>
-          <p:cNvPr id="281" name=""/>
+          <p:cNvPr id="357" name=""/>
           <p:cNvSpPr txBox="1"/>
           <p:nvPr/>
         </p:nvSpPr>
@@ -22275,7 +26112,7 @@
       </p:sp>
       <p:sp>
         <p:nvSpPr>
-          <p:cNvPr id="282" name=""/>
+          <p:cNvPr id="358" name=""/>
           <p:cNvSpPr txBox="1"/>
           <p:nvPr/>
         </p:nvSpPr>
@@ -22328,7 +26165,7 @@
       </p:sp>
       <p:sp>
         <p:nvSpPr>
-          <p:cNvPr id="283" name=""/>
+          <p:cNvPr id="359" name=""/>
           <p:cNvSpPr txBox="1"/>
           <p:nvPr/>
         </p:nvSpPr>
@@ -22371,7 +26208,7 @@
       </p:sp>
       <p:sp>
         <p:nvSpPr>
-          <p:cNvPr id="284" name=""/>
+          <p:cNvPr id="360" name=""/>
           <p:cNvSpPr txBox="1"/>
           <p:nvPr/>
         </p:nvSpPr>
@@ -22424,7 +26261,7 @@
       </p:sp>
       <p:sp>
         <p:nvSpPr>
-          <p:cNvPr id="285" name=""/>
+          <p:cNvPr id="361" name=""/>
           <p:cNvSpPr txBox="1"/>
           <p:nvPr/>
         </p:nvSpPr>
@@ -22467,7 +26304,7 @@
       </p:sp>
       <p:sp>
         <p:nvSpPr>
-          <p:cNvPr id="286" name=""/>
+          <p:cNvPr id="362" name=""/>
           <p:cNvSpPr txBox="1"/>
           <p:nvPr/>
         </p:nvSpPr>
@@ -22520,7 +26357,7 @@
       </p:sp>
       <p:sp>
         <p:nvSpPr>
-          <p:cNvPr id="287" name=""/>
+          <p:cNvPr id="363" name=""/>
           <p:cNvSpPr txBox="1"/>
           <p:nvPr/>
         </p:nvSpPr>
@@ -22563,7 +26400,7 @@
       </p:sp>
       <p:sp>
         <p:nvSpPr>
-          <p:cNvPr id="288" name=""/>
+          <p:cNvPr id="364" name=""/>
           <p:cNvSpPr txBox="1"/>
           <p:nvPr/>
         </p:nvSpPr>
@@ -22616,7 +26453,7 @@
       </p:sp>
       <p:sp>
         <p:nvSpPr>
-          <p:cNvPr id="289" name=""/>
+          <p:cNvPr id="365" name=""/>
           <p:cNvSpPr txBox="1"/>
           <p:nvPr/>
         </p:nvSpPr>
@@ -22659,7 +26496,7 @@
       </p:sp>
       <p:sp>
         <p:nvSpPr>
-          <p:cNvPr id="290" name=""/>
+          <p:cNvPr id="366" name=""/>
           <p:cNvSpPr txBox="1"/>
           <p:nvPr/>
         </p:nvSpPr>
@@ -22702,7 +26539,7 @@
       </p:sp>
       <p:sp>
         <p:nvSpPr>
-          <p:cNvPr id="291" name=""/>
+          <p:cNvPr id="367" name=""/>
           <p:cNvSpPr txBox="1"/>
           <p:nvPr/>
         </p:nvSpPr>
